--- a/templates/decks/en/transformer-talk/template.pptx
+++ b/templates/decks/en/transformer-talk/template.pptx
@@ -6177,51 +6177,7 @@
       </p:sp>
       <p:sp>
         <p:nvSpPr>
-          <p:cNvPr id="5" name="Rectangle 4"/>
-          <p:cNvSpPr/>
-          <p:nvPr/>
-        </p:nvSpPr>
-        <p:spPr>
-          <a:xfrm>
-            <a:off x="585216" y="1072896"/>
-            <a:ext cx="1097280" cy="45720"/>
-          </a:xfrm>
-          <a:prstGeom prst="rect">
-            <a:avLst/>
-          </a:prstGeom>
-          <a:solidFill>
-            <a:srgbClr val="B84020"/>
-          </a:solidFill>
-          <a:ln>
-            <a:noFill/>
-          </a:ln>
-          <a:effectLst/>
-        </p:spPr>
-        <p:style>
-          <a:lnRef idx="1">
-            <a:schemeClr val="accent1"/>
-          </a:lnRef>
-          <a:fillRef idx="3">
-            <a:schemeClr val="accent1"/>
-          </a:fillRef>
-          <a:effectRef idx="2">
-            <a:schemeClr val="accent1"/>
-          </a:effectRef>
-          <a:fontRef idx="minor">
-            <a:schemeClr val="lt1"/>
-          </a:fontRef>
-        </p:style>
-        <p:txBody>
-          <a:bodyPr rtlCol="0" anchor="ctr"/>
-          <a:lstStyle/>
-          <a:p>
-            <a:pPr algn="ctr"/>
-          </a:p>
-        </p:txBody>
-      </p:sp>
-      <p:sp>
-        <p:nvSpPr>
-          <p:cNvPr id="6" name="TextBox 5"/>
+          <p:cNvPr id="5" name="TextBox 4"/>
           <p:cNvSpPr txBox="1"/>
           <p:nvPr/>
         </p:nvSpPr>
@@ -6268,7 +6224,7 @@
       </p:sp>
       <p:sp>
         <p:nvSpPr>
-          <p:cNvPr id="7" name="TextBox 6"/>
+          <p:cNvPr id="6" name="TextBox 5"/>
           <p:cNvSpPr txBox="1"/>
           <p:nvPr/>
         </p:nvSpPr>
@@ -6315,7 +6271,7 @@
       </p:sp>
       <p:sp>
         <p:nvSpPr>
-          <p:cNvPr id="8" name="Rounded Rectangle 7"/>
+          <p:cNvPr id="7" name="Rounded Rectangle 6"/>
           <p:cNvSpPr/>
           <p:nvPr/>
         </p:nvSpPr>
@@ -6363,7 +6319,7 @@
       </p:sp>
       <p:sp>
         <p:nvSpPr>
-          <p:cNvPr id="9" name="TextBox 8"/>
+          <p:cNvPr id="8" name="TextBox 7"/>
           <p:cNvSpPr txBox="1"/>
           <p:nvPr/>
         </p:nvSpPr>
@@ -6410,7 +6366,7 @@
       </p:sp>
       <p:sp>
         <p:nvSpPr>
-          <p:cNvPr id="10" name="TextBox 9"/>
+          <p:cNvPr id="9" name="TextBox 8"/>
           <p:cNvSpPr txBox="1"/>
           <p:nvPr/>
         </p:nvSpPr>
@@ -6457,7 +6413,7 @@
       </p:sp>
       <p:sp>
         <p:nvSpPr>
-          <p:cNvPr id="11" name="TextBox 10"/>
+          <p:cNvPr id="10" name="TextBox 9"/>
           <p:cNvSpPr txBox="1"/>
           <p:nvPr/>
         </p:nvSpPr>
@@ -6504,7 +6460,7 @@
       </p:sp>
       <p:sp>
         <p:nvSpPr>
-          <p:cNvPr id="12" name="TextBox 11"/>
+          <p:cNvPr id="11" name="TextBox 10"/>
           <p:cNvSpPr txBox="1"/>
           <p:nvPr/>
         </p:nvSpPr>
@@ -6551,7 +6507,7 @@
       </p:sp>
       <p:sp>
         <p:nvSpPr>
-          <p:cNvPr id="13" name="TextBox 12"/>
+          <p:cNvPr id="12" name="TextBox 11"/>
           <p:cNvSpPr txBox="1"/>
           <p:nvPr/>
         </p:nvSpPr>
@@ -6598,7 +6554,7 @@
       </p:sp>
       <p:sp>
         <p:nvSpPr>
-          <p:cNvPr id="14" name="TextBox 13"/>
+          <p:cNvPr id="13" name="TextBox 12"/>
           <p:cNvSpPr txBox="1"/>
           <p:nvPr/>
         </p:nvSpPr>
@@ -6645,7 +6601,7 @@
       </p:sp>
       <p:sp>
         <p:nvSpPr>
-          <p:cNvPr id="15" name="TextBox 14"/>
+          <p:cNvPr id="14" name="TextBox 13"/>
           <p:cNvSpPr txBox="1"/>
           <p:nvPr/>
         </p:nvSpPr>
@@ -6692,7 +6648,7 @@
       </p:sp>
       <p:sp>
         <p:nvSpPr>
-          <p:cNvPr id="16" name="TextBox 15"/>
+          <p:cNvPr id="15" name="TextBox 14"/>
           <p:cNvSpPr txBox="1"/>
           <p:nvPr/>
         </p:nvSpPr>
@@ -6739,7 +6695,7 @@
       </p:sp>
       <p:sp>
         <p:nvSpPr>
-          <p:cNvPr id="17" name="TextBox 16"/>
+          <p:cNvPr id="16" name="TextBox 15"/>
           <p:cNvSpPr txBox="1"/>
           <p:nvPr/>
         </p:nvSpPr>
@@ -6786,7 +6742,7 @@
       </p:sp>
       <p:sp>
         <p:nvSpPr>
-          <p:cNvPr id="18" name="TextBox 17"/>
+          <p:cNvPr id="17" name="TextBox 16"/>
           <p:cNvSpPr txBox="1"/>
           <p:nvPr/>
         </p:nvSpPr>
@@ -6833,7 +6789,7 @@
       </p:sp>
       <p:sp>
         <p:nvSpPr>
-          <p:cNvPr id="19" name="TextBox 18"/>
+          <p:cNvPr id="18" name="TextBox 17"/>
           <p:cNvSpPr txBox="1"/>
           <p:nvPr/>
         </p:nvSpPr>
@@ -6880,7 +6836,7 @@
       </p:sp>
       <p:sp>
         <p:nvSpPr>
-          <p:cNvPr id="20" name="TextBox 19"/>
+          <p:cNvPr id="19" name="TextBox 18"/>
           <p:cNvSpPr txBox="1"/>
           <p:nvPr/>
         </p:nvSpPr>
@@ -6927,7 +6883,7 @@
       </p:sp>
       <p:sp>
         <p:nvSpPr>
-          <p:cNvPr id="21" name="TextBox 20"/>
+          <p:cNvPr id="20" name="TextBox 19"/>
           <p:cNvSpPr txBox="1"/>
           <p:nvPr/>
         </p:nvSpPr>
@@ -6974,7 +6930,7 @@
       </p:sp>
       <p:sp>
         <p:nvSpPr>
-          <p:cNvPr id="22" name="Rounded Rectangle 21"/>
+          <p:cNvPr id="21" name="Rounded Rectangle 20"/>
           <p:cNvSpPr/>
           <p:nvPr/>
         </p:nvSpPr>
@@ -7022,7 +6978,7 @@
       </p:sp>
       <p:sp>
         <p:nvSpPr>
-          <p:cNvPr id="23" name="TextBox 22"/>
+          <p:cNvPr id="22" name="TextBox 21"/>
           <p:cNvSpPr txBox="1"/>
           <p:nvPr/>
         </p:nvSpPr>
@@ -7069,7 +7025,7 @@
       </p:sp>
       <p:sp>
         <p:nvSpPr>
-          <p:cNvPr id="24" name="TextBox 23"/>
+          <p:cNvPr id="23" name="TextBox 22"/>
           <p:cNvSpPr txBox="1"/>
           <p:nvPr/>
         </p:nvSpPr>
@@ -7116,7 +7072,7 @@
       </p:sp>
       <p:sp>
         <p:nvSpPr>
-          <p:cNvPr id="25" name="TextBox 24"/>
+          <p:cNvPr id="24" name="TextBox 23"/>
           <p:cNvSpPr txBox="1"/>
           <p:nvPr/>
         </p:nvSpPr>
@@ -7163,7 +7119,7 @@
       </p:sp>
       <p:sp>
         <p:nvSpPr>
-          <p:cNvPr id="26" name="TextBox 25"/>
+          <p:cNvPr id="25" name="TextBox 24"/>
           <p:cNvSpPr txBox="1"/>
           <p:nvPr/>
         </p:nvSpPr>
@@ -7210,7 +7166,7 @@
       </p:sp>
       <p:sp>
         <p:nvSpPr>
-          <p:cNvPr id="27" name="TextBox 26"/>
+          <p:cNvPr id="26" name="TextBox 25"/>
           <p:cNvSpPr txBox="1"/>
           <p:nvPr/>
         </p:nvSpPr>
@@ -7257,7 +7213,7 @@
       </p:sp>
       <p:sp>
         <p:nvSpPr>
-          <p:cNvPr id="28" name="TextBox 27"/>
+          <p:cNvPr id="27" name="TextBox 26"/>
           <p:cNvSpPr txBox="1"/>
           <p:nvPr/>
         </p:nvSpPr>
@@ -7304,7 +7260,7 @@
       </p:sp>
       <p:sp>
         <p:nvSpPr>
-          <p:cNvPr id="29" name="TextBox 28"/>
+          <p:cNvPr id="28" name="TextBox 27"/>
           <p:cNvSpPr txBox="1"/>
           <p:nvPr/>
         </p:nvSpPr>
@@ -7351,7 +7307,7 @@
       </p:sp>
       <p:sp>
         <p:nvSpPr>
-          <p:cNvPr id="30" name="TextBox 29"/>
+          <p:cNvPr id="29" name="TextBox 28"/>
           <p:cNvSpPr txBox="1"/>
           <p:nvPr/>
         </p:nvSpPr>
@@ -7398,7 +7354,7 @@
       </p:sp>
       <p:sp>
         <p:nvSpPr>
-          <p:cNvPr id="31" name="TextBox 30"/>
+          <p:cNvPr id="30" name="TextBox 29"/>
           <p:cNvSpPr txBox="1"/>
           <p:nvPr/>
         </p:nvSpPr>
@@ -7445,7 +7401,7 @@
       </p:sp>
       <p:sp>
         <p:nvSpPr>
-          <p:cNvPr id="32" name="TextBox 31"/>
+          <p:cNvPr id="31" name="TextBox 30"/>
           <p:cNvSpPr txBox="1"/>
           <p:nvPr/>
         </p:nvSpPr>
@@ -7492,7 +7448,7 @@
       </p:sp>
       <p:sp>
         <p:nvSpPr>
-          <p:cNvPr id="33" name="TextBox 32"/>
+          <p:cNvPr id="32" name="TextBox 31"/>
           <p:cNvSpPr txBox="1"/>
           <p:nvPr/>
         </p:nvSpPr>
@@ -7539,7 +7495,7 @@
       </p:sp>
       <p:sp>
         <p:nvSpPr>
-          <p:cNvPr id="34" name="TextBox 33"/>
+          <p:cNvPr id="33" name="TextBox 32"/>
           <p:cNvSpPr txBox="1"/>
           <p:nvPr/>
         </p:nvSpPr>
@@ -7586,7 +7542,7 @@
       </p:sp>
       <p:sp>
         <p:nvSpPr>
-          <p:cNvPr id="35" name="TextBox 34"/>
+          <p:cNvPr id="34" name="TextBox 33"/>
           <p:cNvSpPr txBox="1"/>
           <p:nvPr/>
         </p:nvSpPr>
@@ -7633,7 +7589,7 @@
       </p:sp>
       <p:sp>
         <p:nvSpPr>
-          <p:cNvPr id="36" name="TextBox 35"/>
+          <p:cNvPr id="35" name="TextBox 34"/>
           <p:cNvSpPr txBox="1"/>
           <p:nvPr/>
         </p:nvSpPr>
@@ -7680,7 +7636,7 @@
       </p:sp>
       <p:sp>
         <p:nvSpPr>
-          <p:cNvPr id="37" name="TextBox 36"/>
+          <p:cNvPr id="36" name="TextBox 35"/>
           <p:cNvSpPr txBox="1"/>
           <p:nvPr/>
         </p:nvSpPr>
@@ -7727,7 +7683,7 @@
       </p:sp>
       <p:sp>
         <p:nvSpPr>
-          <p:cNvPr id="38" name="Rounded Rectangle 37"/>
+          <p:cNvPr id="37" name="Rounded Rectangle 36"/>
           <p:cNvSpPr/>
           <p:nvPr/>
         </p:nvSpPr>
@@ -7773,7 +7729,7 @@
       </p:sp>
       <p:sp>
         <p:nvSpPr>
-          <p:cNvPr id="39" name="TextBox 38"/>
+          <p:cNvPr id="38" name="TextBox 37"/>
           <p:cNvSpPr txBox="1"/>
           <p:nvPr/>
         </p:nvSpPr>
@@ -7820,7 +7776,7 @@
       </p:sp>
       <p:sp>
         <p:nvSpPr>
-          <p:cNvPr id="40" name="TextBox 39"/>
+          <p:cNvPr id="39" name="TextBox 38"/>
           <p:cNvSpPr txBox="1"/>
           <p:nvPr/>
         </p:nvSpPr>
@@ -7867,7 +7823,7 @@
       </p:sp>
       <p:sp>
         <p:nvSpPr>
-          <p:cNvPr id="41" name="Rounded Rectangle 40"/>
+          <p:cNvPr id="40" name="Rounded Rectangle 39"/>
           <p:cNvSpPr/>
           <p:nvPr/>
         </p:nvSpPr>
@@ -7913,7 +7869,7 @@
       </p:sp>
       <p:sp>
         <p:nvSpPr>
-          <p:cNvPr id="42" name="TextBox 41"/>
+          <p:cNvPr id="41" name="TextBox 40"/>
           <p:cNvSpPr txBox="1"/>
           <p:nvPr/>
         </p:nvSpPr>
@@ -7960,7 +7916,7 @@
       </p:sp>
       <p:sp>
         <p:nvSpPr>
-          <p:cNvPr id="43" name="TextBox 42"/>
+          <p:cNvPr id="42" name="TextBox 41"/>
           <p:cNvSpPr txBox="1"/>
           <p:nvPr/>
         </p:nvSpPr>
@@ -8007,7 +7963,7 @@
       </p:sp>
       <p:sp>
         <p:nvSpPr>
-          <p:cNvPr id="44" name="Rounded Rectangle 43"/>
+          <p:cNvPr id="43" name="Rounded Rectangle 42"/>
           <p:cNvSpPr/>
           <p:nvPr/>
         </p:nvSpPr>
@@ -8053,7 +8009,7 @@
       </p:sp>
       <p:sp>
         <p:nvSpPr>
-          <p:cNvPr id="45" name="TextBox 44"/>
+          <p:cNvPr id="44" name="TextBox 43"/>
           <p:cNvSpPr txBox="1"/>
           <p:nvPr/>
         </p:nvSpPr>
@@ -8100,7 +8056,7 @@
       </p:sp>
       <p:sp>
         <p:nvSpPr>
-          <p:cNvPr id="46" name="TextBox 45"/>
+          <p:cNvPr id="45" name="TextBox 44"/>
           <p:cNvSpPr txBox="1"/>
           <p:nvPr/>
         </p:nvSpPr>
@@ -8147,7 +8103,7 @@
       </p:sp>
       <p:sp>
         <p:nvSpPr>
-          <p:cNvPr id="47" name="Rounded Rectangle 46"/>
+          <p:cNvPr id="46" name="Rounded Rectangle 45"/>
           <p:cNvSpPr/>
           <p:nvPr/>
         </p:nvSpPr>
@@ -8193,7 +8149,7 @@
       </p:sp>
       <p:sp>
         <p:nvSpPr>
-          <p:cNvPr id="48" name="TextBox 47"/>
+          <p:cNvPr id="47" name="TextBox 46"/>
           <p:cNvSpPr txBox="1"/>
           <p:nvPr/>
         </p:nvSpPr>
@@ -8240,7 +8196,7 @@
       </p:sp>
       <p:sp>
         <p:nvSpPr>
-          <p:cNvPr id="49" name="TextBox 48"/>
+          <p:cNvPr id="48" name="TextBox 47"/>
           <p:cNvSpPr txBox="1"/>
           <p:nvPr/>
         </p:nvSpPr>
@@ -8443,51 +8399,7 @@
       </p:sp>
       <p:sp>
         <p:nvSpPr>
-          <p:cNvPr id="5" name="Rectangle 4"/>
-          <p:cNvSpPr/>
-          <p:nvPr/>
-        </p:nvSpPr>
-        <p:spPr>
-          <a:xfrm>
-            <a:off x="585216" y="1072896"/>
-            <a:ext cx="1097280" cy="45720"/>
-          </a:xfrm>
-          <a:prstGeom prst="rect">
-            <a:avLst/>
-          </a:prstGeom>
-          <a:solidFill>
-            <a:srgbClr val="B84020"/>
-          </a:solidFill>
-          <a:ln>
-            <a:noFill/>
-          </a:ln>
-          <a:effectLst/>
-        </p:spPr>
-        <p:style>
-          <a:lnRef idx="1">
-            <a:schemeClr val="accent1"/>
-          </a:lnRef>
-          <a:fillRef idx="3">
-            <a:schemeClr val="accent1"/>
-          </a:fillRef>
-          <a:effectRef idx="2">
-            <a:schemeClr val="accent1"/>
-          </a:effectRef>
-          <a:fontRef idx="minor">
-            <a:schemeClr val="lt1"/>
-          </a:fontRef>
-        </p:style>
-        <p:txBody>
-          <a:bodyPr rtlCol="0" anchor="ctr"/>
-          <a:lstStyle/>
-          <a:p>
-            <a:pPr algn="ctr"/>
-          </a:p>
-        </p:txBody>
-      </p:sp>
-      <p:sp>
-        <p:nvSpPr>
-          <p:cNvPr id="6" name="TextBox 5"/>
+          <p:cNvPr id="5" name="TextBox 4"/>
           <p:cNvSpPr txBox="1"/>
           <p:nvPr/>
         </p:nvSpPr>
@@ -8534,7 +8446,7 @@
       </p:sp>
       <p:sp>
         <p:nvSpPr>
-          <p:cNvPr id="7" name="TextBox 6"/>
+          <p:cNvPr id="6" name="TextBox 5"/>
           <p:cNvSpPr txBox="1"/>
           <p:nvPr/>
         </p:nvSpPr>
@@ -8581,7 +8493,7 @@
       </p:sp>
       <p:graphicFrame>
         <p:nvGraphicFramePr>
-          <p:cNvPr id="8" name="Chart 7"/>
+          <p:cNvPr id="7" name="Chart 6"/>
           <p:cNvGraphicFramePr>
             <a:graphicFrameLocks noGrp="1"/>
           </p:cNvGraphicFramePr>
@@ -8599,7 +8511,7 @@
       </p:graphicFrame>
       <p:sp>
         <p:nvSpPr>
-          <p:cNvPr id="9" name="TextBox 8"/>
+          <p:cNvPr id="8" name="TextBox 7"/>
           <p:cNvSpPr txBox="1"/>
           <p:nvPr/>
         </p:nvSpPr>
@@ -8646,7 +8558,7 @@
       </p:sp>
       <p:sp>
         <p:nvSpPr>
-          <p:cNvPr id="10" name="TextBox 9"/>
+          <p:cNvPr id="9" name="TextBox 8"/>
           <p:cNvSpPr txBox="1"/>
           <p:nvPr/>
         </p:nvSpPr>
@@ -8693,7 +8605,7 @@
       </p:sp>
       <p:sp>
         <p:nvSpPr>
-          <p:cNvPr id="11" name="TextBox 10"/>
+          <p:cNvPr id="10" name="TextBox 9"/>
           <p:cNvSpPr txBox="1"/>
           <p:nvPr/>
         </p:nvSpPr>
@@ -8740,7 +8652,7 @@
       </p:sp>
       <p:sp>
         <p:nvSpPr>
-          <p:cNvPr id="12" name="TextBox 11"/>
+          <p:cNvPr id="11" name="TextBox 10"/>
           <p:cNvSpPr txBox="1"/>
           <p:nvPr/>
         </p:nvSpPr>
@@ -8966,17 +8878,790 @@
       </p:sp>
       <p:sp>
         <p:nvSpPr>
-          <p:cNvPr id="5" name="Rectangle 4"/>
+          <p:cNvPr id="5" name="TextBox 4"/>
+          <p:cNvSpPr txBox="1"/>
+          <p:nvPr/>
+        </p:nvSpPr>
+        <p:spPr>
+          <a:xfrm>
+            <a:off x="7680960" y="4759452"/>
+            <a:ext cx="1097280" cy="274320"/>
+          </a:xfrm>
+          <a:prstGeom prst="rect">
+            <a:avLst/>
+          </a:prstGeom>
+          <a:noFill/>
+          <a:ln/>
+        </p:spPr>
+        <p:txBody>
+          <a:bodyPr wrap="square" anchor="t" lIns="25400" rIns="25400" tIns="25400" bIns="25400">
+            <a:spAutoFit/>
+          </a:bodyPr>
+          <a:lstStyle/>
+          <a:p>
+            <a:pPr algn="r">
+              <a:lnSpc>
+                <a:spcPct val="100000"/>
+              </a:lnSpc>
+              <a:spcBef>
+                <a:spcPts val="0"/>
+              </a:spcBef>
+              <a:spcAft>
+                <a:spcPts val="0"/>
+              </a:spcAft>
+            </a:pPr>
+            <a:r>
+              <a:rPr sz="900" b="1" i="0">
+                <a:solidFill>
+                  <a:srgbClr val="6F6656"/>
+                </a:solidFill>
+                <a:latin typeface="Menlo"/>
+                <a:ea typeface="Hiragino Sans GB"/>
+              </a:rPr>
+              <a:t>12 / 15</a:t>
+            </a:r>
+          </a:p>
+        </p:txBody>
+      </p:sp>
+      <p:sp>
+        <p:nvSpPr>
+          <p:cNvPr id="6" name="TextBox 5"/>
+          <p:cNvSpPr txBox="1"/>
+          <p:nvPr/>
+        </p:nvSpPr>
+        <p:spPr>
+          <a:xfrm>
+            <a:off x="566928" y="4777740"/>
+            <a:ext cx="5486400" cy="274320"/>
+          </a:xfrm>
+          <a:prstGeom prst="rect">
+            <a:avLst/>
+          </a:prstGeom>
+          <a:noFill/>
+          <a:ln/>
+        </p:spPr>
+        <p:txBody>
+          <a:bodyPr wrap="square" anchor="t" lIns="25400" rIns="25400" tIns="25400" bIns="25400">
+            <a:spAutoFit/>
+          </a:bodyPr>
+          <a:lstStyle/>
+          <a:p>
+            <a:pPr algn="l">
+              <a:lnSpc>
+                <a:spcPct val="100000"/>
+              </a:lnSpc>
+              <a:spcBef>
+                <a:spcPts val="0"/>
+              </a:spcBef>
+              <a:spcAft>
+                <a:spcPts val="0"/>
+              </a:spcAft>
+            </a:pPr>
+            <a:r>
+              <a:rPr sz="800" b="0" i="0">
+                <a:solidFill>
+                  <a:srgbClr val="6F6656"/>
+                </a:solidFill>
+                <a:latin typeface="Menlo"/>
+                <a:ea typeface="Hiragino Sans GB"/>
+              </a:rPr>
+              <a:t>ATTENTION IS ALL YOU NEED · PAPER DEEP-DIVE</a:t>
+            </a:r>
+          </a:p>
+        </p:txBody>
+      </p:sp>
+      <p:sp>
+        <p:nvSpPr>
+          <p:cNvPr id="7" name="TextBox 6"/>
+          <p:cNvSpPr txBox="1"/>
+          <p:nvPr/>
+        </p:nvSpPr>
+        <p:spPr>
+          <a:xfrm>
+            <a:off x="640080" y="1603248"/>
+            <a:ext cx="2377440" cy="640080"/>
+          </a:xfrm>
+          <a:prstGeom prst="rect">
+            <a:avLst/>
+          </a:prstGeom>
+          <a:noFill/>
+          <a:ln/>
+        </p:spPr>
+        <p:txBody>
+          <a:bodyPr wrap="square" anchor="t" lIns="25400" rIns="25400" tIns="25400" bIns="25400">
+            <a:spAutoFit/>
+          </a:bodyPr>
+          <a:lstStyle/>
+          <a:p>
+            <a:pPr algn="l">
+              <a:lnSpc>
+                <a:spcPct val="100000"/>
+              </a:lnSpc>
+              <a:spcBef>
+                <a:spcPts val="0"/>
+              </a:spcBef>
+              <a:spcAft>
+                <a:spcPts val="0"/>
+              </a:spcAft>
+            </a:pPr>
+            <a:r>
+              <a:rPr sz="3600" b="1" i="0">
+                <a:solidFill>
+                  <a:srgbClr val="1C1D22"/>
+                </a:solidFill>
+                <a:latin typeface="Helvetica Neue"/>
+                <a:ea typeface="Hiragino Sans GB"/>
+              </a:rPr>
+              <a:t>28.4</a:t>
+            </a:r>
+            <a:r>
+              <a:rPr sz="1512" b="1" i="0">
+                <a:solidFill>
+                  <a:srgbClr val="B84020"/>
+                </a:solidFill>
+                <a:latin typeface="Helvetica Neue"/>
+                <a:ea typeface="Hiragino Sans GB"/>
+              </a:rPr>
+              <a:t> BLEU</a:t>
+            </a:r>
+          </a:p>
+        </p:txBody>
+      </p:sp>
+      <p:sp>
+        <p:nvSpPr>
+          <p:cNvPr id="8" name="TextBox 7"/>
+          <p:cNvSpPr txBox="1"/>
+          <p:nvPr/>
+        </p:nvSpPr>
+        <p:spPr>
+          <a:xfrm>
+            <a:off x="640080" y="2206752"/>
+            <a:ext cx="2377440" cy="365760"/>
+          </a:xfrm>
+          <a:prstGeom prst="rect">
+            <a:avLst/>
+          </a:prstGeom>
+          <a:noFill/>
+          <a:ln/>
+        </p:spPr>
+        <p:txBody>
+          <a:bodyPr wrap="square" anchor="t" lIns="25400" rIns="25400" tIns="25400" bIns="25400">
+            <a:spAutoFit/>
+          </a:bodyPr>
+          <a:lstStyle/>
+          <a:p>
+            <a:pPr algn="l">
+              <a:lnSpc>
+                <a:spcPct val="100000"/>
+              </a:lnSpc>
+              <a:spcBef>
+                <a:spcPts val="0"/>
+              </a:spcBef>
+              <a:spcAft>
+                <a:spcPts val="0"/>
+              </a:spcAft>
+            </a:pPr>
+            <a:r>
+              <a:rPr sz="1200" b="0" i="0">
+                <a:solidFill>
+                  <a:srgbClr val="6F6656"/>
+                </a:solidFill>
+                <a:latin typeface="Helvetica Neue"/>
+                <a:ea typeface="Hiragino Sans GB"/>
+              </a:rPr>
+              <a:t>En→De · big · new high</a:t>
+            </a:r>
+          </a:p>
+        </p:txBody>
+      </p:sp>
+      <p:sp>
+        <p:nvSpPr>
+          <p:cNvPr id="9" name="TextBox 8"/>
+          <p:cNvSpPr txBox="1"/>
+          <p:nvPr/>
+        </p:nvSpPr>
+        <p:spPr>
+          <a:xfrm>
+            <a:off x="3383280" y="1603248"/>
+            <a:ext cx="2377440" cy="640080"/>
+          </a:xfrm>
+          <a:prstGeom prst="rect">
+            <a:avLst/>
+          </a:prstGeom>
+          <a:noFill/>
+          <a:ln/>
+        </p:spPr>
+        <p:txBody>
+          <a:bodyPr wrap="square" anchor="t" lIns="25400" rIns="25400" tIns="25400" bIns="25400">
+            <a:spAutoFit/>
+          </a:bodyPr>
+          <a:lstStyle/>
+          <a:p>
+            <a:pPr algn="l">
+              <a:lnSpc>
+                <a:spcPct val="100000"/>
+              </a:lnSpc>
+              <a:spcBef>
+                <a:spcPts val="0"/>
+              </a:spcBef>
+              <a:spcAft>
+                <a:spcPts val="0"/>
+              </a:spcAft>
+            </a:pPr>
+            <a:r>
+              <a:rPr sz="3600" b="1" i="0">
+                <a:solidFill>
+                  <a:srgbClr val="1C1D22"/>
+                </a:solidFill>
+                <a:latin typeface="Helvetica Neue"/>
+                <a:ea typeface="Hiragino Sans GB"/>
+              </a:rPr>
+              <a:t>3.5</a:t>
+            </a:r>
+            <a:r>
+              <a:rPr sz="1512" b="1" i="0">
+                <a:solidFill>
+                  <a:srgbClr val="B84020"/>
+                </a:solidFill>
+                <a:latin typeface="Helvetica Neue"/>
+                <a:ea typeface="Hiragino Sans GB"/>
+              </a:rPr>
+              <a:t> days</a:t>
+            </a:r>
+          </a:p>
+        </p:txBody>
+      </p:sp>
+      <p:sp>
+        <p:nvSpPr>
+          <p:cNvPr id="10" name="TextBox 9"/>
+          <p:cNvSpPr txBox="1"/>
+          <p:nvPr/>
+        </p:nvSpPr>
+        <p:spPr>
+          <a:xfrm>
+            <a:off x="3383280" y="2206752"/>
+            <a:ext cx="2377440" cy="365760"/>
+          </a:xfrm>
+          <a:prstGeom prst="rect">
+            <a:avLst/>
+          </a:prstGeom>
+          <a:noFill/>
+          <a:ln/>
+        </p:spPr>
+        <p:txBody>
+          <a:bodyPr wrap="square" anchor="t" lIns="25400" rIns="25400" tIns="25400" bIns="25400">
+            <a:spAutoFit/>
+          </a:bodyPr>
+          <a:lstStyle/>
+          <a:p>
+            <a:pPr algn="l">
+              <a:lnSpc>
+                <a:spcPct val="100000"/>
+              </a:lnSpc>
+              <a:spcBef>
+                <a:spcPts val="0"/>
+              </a:spcBef>
+              <a:spcAft>
+                <a:spcPts val="0"/>
+              </a:spcAft>
+            </a:pPr>
+            <a:r>
+              <a:rPr sz="1200" b="0" i="0">
+                <a:solidFill>
+                  <a:srgbClr val="6F6656"/>
+                </a:solidFill>
+                <a:latin typeface="Helvetica Neue"/>
+                <a:ea typeface="Hiragino Sans GB"/>
+              </a:rPr>
+              <a:t>trained on 8 × P100</a:t>
+            </a:r>
+          </a:p>
+        </p:txBody>
+      </p:sp>
+      <p:sp>
+        <p:nvSpPr>
+          <p:cNvPr id="11" name="Rectangle 10"/>
           <p:cNvSpPr/>
           <p:nvPr/>
         </p:nvSpPr>
         <p:spPr>
           <a:xfrm>
-            <a:off x="585216" y="1072896"/>
-            <a:ext cx="1097280" cy="45720"/>
-          </a:xfrm>
-          <a:prstGeom prst="rect">
-            <a:avLst/>
+            <a:off x="3200400" y="1658112"/>
+            <a:ext cx="12801" cy="822960"/>
+          </a:xfrm>
+          <a:prstGeom prst="rect">
+            <a:avLst/>
+          </a:prstGeom>
+          <a:solidFill>
+            <a:srgbClr val="DDDDDD"/>
+          </a:solidFill>
+          <a:ln>
+            <a:noFill/>
+          </a:ln>
+          <a:effectLst/>
+        </p:spPr>
+        <p:style>
+          <a:lnRef idx="1">
+            <a:schemeClr val="accent1"/>
+          </a:lnRef>
+          <a:fillRef idx="3">
+            <a:schemeClr val="accent1"/>
+          </a:fillRef>
+          <a:effectRef idx="2">
+            <a:schemeClr val="accent1"/>
+          </a:effectRef>
+          <a:fontRef idx="minor">
+            <a:schemeClr val="lt1"/>
+          </a:fontRef>
+        </p:style>
+        <p:txBody>
+          <a:bodyPr rtlCol="0" anchor="ctr"/>
+          <a:lstStyle/>
+          <a:p>
+            <a:pPr algn="ctr"/>
+          </a:p>
+        </p:txBody>
+      </p:sp>
+      <p:sp>
+        <p:nvSpPr>
+          <p:cNvPr id="12" name="TextBox 11"/>
+          <p:cNvSpPr txBox="1"/>
+          <p:nvPr/>
+        </p:nvSpPr>
+        <p:spPr>
+          <a:xfrm>
+            <a:off x="6126480" y="1603248"/>
+            <a:ext cx="2377440" cy="640080"/>
+          </a:xfrm>
+          <a:prstGeom prst="rect">
+            <a:avLst/>
+          </a:prstGeom>
+          <a:noFill/>
+          <a:ln/>
+        </p:spPr>
+        <p:txBody>
+          <a:bodyPr wrap="square" anchor="t" lIns="25400" rIns="25400" tIns="25400" bIns="25400">
+            <a:spAutoFit/>
+          </a:bodyPr>
+          <a:lstStyle/>
+          <a:p>
+            <a:pPr algn="l">
+              <a:lnSpc>
+                <a:spcPct val="100000"/>
+              </a:lnSpc>
+              <a:spcBef>
+                <a:spcPts val="0"/>
+              </a:spcBef>
+              <a:spcAft>
+                <a:spcPts val="0"/>
+              </a:spcAft>
+            </a:pPr>
+            <a:r>
+              <a:rPr sz="3600" b="1" i="0">
+                <a:solidFill>
+                  <a:srgbClr val="1C1D22"/>
+                </a:solidFill>
+                <a:latin typeface="Helvetica Neue"/>
+                <a:ea typeface="Hiragino Sans GB"/>
+              </a:rPr>
+              <a:t>&lt; 1/4</a:t>
+            </a:r>
+          </a:p>
+        </p:txBody>
+      </p:sp>
+      <p:sp>
+        <p:nvSpPr>
+          <p:cNvPr id="13" name="TextBox 12"/>
+          <p:cNvSpPr txBox="1"/>
+          <p:nvPr/>
+        </p:nvSpPr>
+        <p:spPr>
+          <a:xfrm>
+            <a:off x="6126480" y="2206752"/>
+            <a:ext cx="2377440" cy="365760"/>
+          </a:xfrm>
+          <a:prstGeom prst="rect">
+            <a:avLst/>
+          </a:prstGeom>
+          <a:noFill/>
+          <a:ln/>
+        </p:spPr>
+        <p:txBody>
+          <a:bodyPr wrap="square" anchor="t" lIns="25400" rIns="25400" tIns="25400" bIns="25400">
+            <a:spAutoFit/>
+          </a:bodyPr>
+          <a:lstStyle/>
+          <a:p>
+            <a:pPr algn="l">
+              <a:lnSpc>
+                <a:spcPct val="100000"/>
+              </a:lnSpc>
+              <a:spcBef>
+                <a:spcPts val="0"/>
+              </a:spcBef>
+              <a:spcAft>
+                <a:spcPts val="0"/>
+              </a:spcAft>
+            </a:pPr>
+            <a:r>
+              <a:rPr sz="1200" b="0" i="0">
+                <a:solidFill>
+                  <a:srgbClr val="6F6656"/>
+                </a:solidFill>
+                <a:latin typeface="Helvetica Neue"/>
+                <a:ea typeface="Hiragino Sans GB"/>
+              </a:rPr>
+              <a:t>of the compute to top En→Fr</a:t>
+            </a:r>
+          </a:p>
+        </p:txBody>
+      </p:sp>
+      <p:sp>
+        <p:nvSpPr>
+          <p:cNvPr id="14" name="Rectangle 13"/>
+          <p:cNvSpPr/>
+          <p:nvPr/>
+        </p:nvSpPr>
+        <p:spPr>
+          <a:xfrm>
+            <a:off x="5943600" y="1658112"/>
+            <a:ext cx="12801" cy="822960"/>
+          </a:xfrm>
+          <a:prstGeom prst="rect">
+            <a:avLst/>
+          </a:prstGeom>
+          <a:solidFill>
+            <a:srgbClr val="DDDDDD"/>
+          </a:solidFill>
+          <a:ln>
+            <a:noFill/>
+          </a:ln>
+          <a:effectLst/>
+        </p:spPr>
+        <p:style>
+          <a:lnRef idx="1">
+            <a:schemeClr val="accent1"/>
+          </a:lnRef>
+          <a:fillRef idx="3">
+            <a:schemeClr val="accent1"/>
+          </a:fillRef>
+          <a:effectRef idx="2">
+            <a:schemeClr val="accent1"/>
+          </a:effectRef>
+          <a:fontRef idx="minor">
+            <a:schemeClr val="lt1"/>
+          </a:fontRef>
+        </p:style>
+        <p:txBody>
+          <a:bodyPr rtlCol="0" anchor="ctr"/>
+          <a:lstStyle/>
+          <a:p>
+            <a:pPr algn="ctr"/>
+          </a:p>
+        </p:txBody>
+      </p:sp>
+      <p:sp>
+        <p:nvSpPr>
+          <p:cNvPr id="15" name="Rounded Rectangle 14"/>
+          <p:cNvSpPr/>
+          <p:nvPr/>
+        </p:nvSpPr>
+        <p:spPr>
+          <a:xfrm>
+            <a:off x="640080" y="2828544"/>
+            <a:ext cx="7863840" cy="530352"/>
+          </a:xfrm>
+          <a:prstGeom prst="roundRect">
+            <a:avLst>
+              <a:gd name="adj" fmla="val 8000"/>
+            </a:avLst>
+          </a:prstGeom>
+          <a:solidFill>
+            <a:srgbClr val="1C1D22"/>
+          </a:solidFill>
+          <a:ln>
+            <a:noFill/>
+          </a:ln>
+          <a:effectLst/>
+        </p:spPr>
+        <p:style>
+          <a:lnRef idx="1">
+            <a:schemeClr val="accent1"/>
+          </a:lnRef>
+          <a:fillRef idx="3">
+            <a:schemeClr val="accent1"/>
+          </a:fillRef>
+          <a:effectRef idx="2">
+            <a:schemeClr val="accent1"/>
+          </a:effectRef>
+          <a:fontRef idx="minor">
+            <a:schemeClr val="lt1"/>
+          </a:fontRef>
+        </p:style>
+        <p:txBody>
+          <a:bodyPr rtlCol="0" anchor="ctr"/>
+          <a:lstStyle/>
+          <a:p>
+            <a:pPr algn="ctr"/>
+          </a:p>
+        </p:txBody>
+      </p:sp>
+      <p:sp>
+        <p:nvSpPr>
+          <p:cNvPr id="16" name="Rectangle 15"/>
+          <p:cNvSpPr/>
+          <p:nvPr/>
+        </p:nvSpPr>
+        <p:spPr>
+          <a:xfrm>
+            <a:off x="640080" y="2919984"/>
+            <a:ext cx="54864" cy="347471"/>
+          </a:xfrm>
+          <a:prstGeom prst="rect">
+            <a:avLst/>
+          </a:prstGeom>
+          <a:solidFill>
+            <a:srgbClr val="E69A6E"/>
+          </a:solidFill>
+          <a:ln>
+            <a:noFill/>
+          </a:ln>
+          <a:effectLst/>
+        </p:spPr>
+        <p:style>
+          <a:lnRef idx="1">
+            <a:schemeClr val="accent1"/>
+          </a:lnRef>
+          <a:fillRef idx="3">
+            <a:schemeClr val="accent1"/>
+          </a:fillRef>
+          <a:effectRef idx="2">
+            <a:schemeClr val="accent1"/>
+          </a:effectRef>
+          <a:fontRef idx="minor">
+            <a:schemeClr val="lt1"/>
+          </a:fontRef>
+        </p:style>
+        <p:txBody>
+          <a:bodyPr rtlCol="0" anchor="ctr"/>
+          <a:lstStyle/>
+          <a:p>
+            <a:pPr algn="ctr"/>
+          </a:p>
+        </p:txBody>
+      </p:sp>
+      <p:sp>
+        <p:nvSpPr>
+          <p:cNvPr id="17" name="TextBox 16"/>
+          <p:cNvSpPr txBox="1"/>
+          <p:nvPr/>
+        </p:nvSpPr>
+        <p:spPr>
+          <a:xfrm>
+            <a:off x="896112" y="2828544"/>
+            <a:ext cx="7406640" cy="530352"/>
+          </a:xfrm>
+          <a:prstGeom prst="rect">
+            <a:avLst/>
+          </a:prstGeom>
+          <a:noFill/>
+          <a:ln/>
+        </p:spPr>
+        <p:txBody>
+          <a:bodyPr wrap="square" anchor="ctr" lIns="25400" rIns="25400" tIns="25400" bIns="25400">
+            <a:spAutoFit/>
+          </a:bodyPr>
+          <a:lstStyle/>
+          <a:p>
+            <a:pPr algn="l">
+              <a:lnSpc>
+                <a:spcPct val="100000"/>
+              </a:lnSpc>
+              <a:spcBef>
+                <a:spcPts val="0"/>
+              </a:spcBef>
+              <a:spcAft>
+                <a:spcPts val="0"/>
+              </a:spcAft>
+            </a:pPr>
+            <a:r>
+              <a:rPr sz="1100" b="1" i="0">
+                <a:solidFill>
+                  <a:srgbClr val="E69A6E"/>
+                </a:solidFill>
+                <a:latin typeface="Helvetica Neue"/>
+                <a:ea typeface="Hiragino Sans GB"/>
+              </a:rPr>
+              <a:t>So   </a:t>
+            </a:r>
+            <a:r>
+              <a:rPr sz="1350" b="0" i="0">
+                <a:solidFill>
+                  <a:srgbClr val="FFFFFF"/>
+                </a:solidFill>
+                <a:latin typeface="Helvetica Neue"/>
+                <a:ea typeface="Hiragino Sans GB"/>
+              </a:rPr>
+              <a:t>On En→Fr, big reaches a new single-model SOTA with under 1/4 the training compute of the previous best.</a:t>
+            </a:r>
+          </a:p>
+        </p:txBody>
+      </p:sp>
+      <p:sp>
+        <p:nvSpPr>
+          <p:cNvPr id="18" name="TextBox 17"/>
+          <p:cNvSpPr txBox="1"/>
+          <p:nvPr/>
+        </p:nvSpPr>
+        <p:spPr>
+          <a:xfrm>
+            <a:off x="640080" y="3614928"/>
+            <a:ext cx="5486400" cy="274320"/>
+          </a:xfrm>
+          <a:prstGeom prst="rect">
+            <a:avLst/>
+          </a:prstGeom>
+          <a:noFill/>
+          <a:ln/>
+        </p:spPr>
+        <p:txBody>
+          <a:bodyPr wrap="square" anchor="t" lIns="25400" rIns="25400" tIns="25400" bIns="25400">
+            <a:spAutoFit/>
+          </a:bodyPr>
+          <a:lstStyle/>
+          <a:p>
+            <a:pPr algn="l">
+              <a:lnSpc>
+                <a:spcPct val="100000"/>
+              </a:lnSpc>
+              <a:spcBef>
+                <a:spcPts val="0"/>
+              </a:spcBef>
+              <a:spcAft>
+                <a:spcPts val="0"/>
+              </a:spcAft>
+            </a:pPr>
+            <a:r>
+              <a:rPr sz="1100" b="1" i="0">
+                <a:solidFill>
+                  <a:srgbClr val="6F6656"/>
+                </a:solidFill>
+                <a:latin typeface="Menlo"/>
+                <a:ea typeface="Hiragino Sans GB"/>
+              </a:rPr>
+              <a:t>En→Fr training compute, FLOPs (shorter is better)</a:t>
+            </a:r>
+          </a:p>
+        </p:txBody>
+      </p:sp>
+      <p:sp>
+        <p:nvSpPr>
+          <p:cNvPr id="19" name="TextBox 18"/>
+          <p:cNvSpPr txBox="1"/>
+          <p:nvPr/>
+        </p:nvSpPr>
+        <p:spPr>
+          <a:xfrm>
+            <a:off x="640080" y="3944112"/>
+            <a:ext cx="1600200" cy="237744"/>
+          </a:xfrm>
+          <a:prstGeom prst="rect">
+            <a:avLst/>
+          </a:prstGeom>
+          <a:noFill/>
+          <a:ln/>
+        </p:spPr>
+        <p:txBody>
+          <a:bodyPr wrap="square" anchor="ctr" lIns="25400" rIns="25400" tIns="25400" bIns="25400">
+            <a:spAutoFit/>
+          </a:bodyPr>
+          <a:lstStyle/>
+          <a:p>
+            <a:pPr algn="l">
+              <a:lnSpc>
+                <a:spcPct val="100000"/>
+              </a:lnSpc>
+              <a:spcBef>
+                <a:spcPts val="0"/>
+              </a:spcBef>
+              <a:spcAft>
+                <a:spcPts val="0"/>
+              </a:spcAft>
+            </a:pPr>
+            <a:r>
+              <a:rPr sz="1150" b="1" i="0">
+                <a:solidFill>
+                  <a:srgbClr val="1C1D22"/>
+                </a:solidFill>
+                <a:latin typeface="Helvetica Neue"/>
+                <a:ea typeface="Hiragino Sans GB"/>
+              </a:rPr>
+              <a:t>Ours · big</a:t>
+            </a:r>
+          </a:p>
+        </p:txBody>
+      </p:sp>
+      <p:sp>
+        <p:nvSpPr>
+          <p:cNvPr id="20" name="Rounded Rectangle 19"/>
+          <p:cNvSpPr/>
+          <p:nvPr/>
+        </p:nvSpPr>
+        <p:spPr>
+          <a:xfrm>
+            <a:off x="2286000" y="3944112"/>
+            <a:ext cx="4754880" cy="237744"/>
+          </a:xfrm>
+          <a:prstGeom prst="roundRect">
+            <a:avLst>
+              <a:gd name="adj" fmla="val 50000"/>
+            </a:avLst>
+          </a:prstGeom>
+          <a:solidFill>
+            <a:srgbClr val="E6E9EE"/>
+          </a:solidFill>
+          <a:ln>
+            <a:noFill/>
+          </a:ln>
+          <a:effectLst/>
+        </p:spPr>
+        <p:style>
+          <a:lnRef idx="1">
+            <a:schemeClr val="accent1"/>
+          </a:lnRef>
+          <a:fillRef idx="3">
+            <a:schemeClr val="accent1"/>
+          </a:fillRef>
+          <a:effectRef idx="2">
+            <a:schemeClr val="accent1"/>
+          </a:effectRef>
+          <a:fontRef idx="minor">
+            <a:schemeClr val="lt1"/>
+          </a:fontRef>
+        </p:style>
+        <p:txBody>
+          <a:bodyPr rtlCol="0" anchor="ctr"/>
+          <a:lstStyle/>
+          <a:p>
+            <a:pPr algn="ctr"/>
+          </a:p>
+        </p:txBody>
+      </p:sp>
+      <p:sp>
+        <p:nvSpPr>
+          <p:cNvPr id="21" name="Rounded Rectangle 20"/>
+          <p:cNvSpPr/>
+          <p:nvPr/>
+        </p:nvSpPr>
+        <p:spPr>
+          <a:xfrm>
+            <a:off x="2286000" y="3944112"/>
+            <a:ext cx="727496" cy="237744"/>
+          </a:xfrm>
+          <a:prstGeom prst="roundRect">
+            <a:avLst>
+              <a:gd name="adj" fmla="val 50000"/>
+            </a:avLst>
           </a:prstGeom>
           <a:solidFill>
             <a:srgbClr val="B84020"/>
@@ -9010,14 +9695,14 @@
       </p:sp>
       <p:sp>
         <p:nvSpPr>
-          <p:cNvPr id="6" name="TextBox 5"/>
+          <p:cNvPr id="22" name="TextBox 21"/>
           <p:cNvSpPr txBox="1"/>
           <p:nvPr/>
         </p:nvSpPr>
         <p:spPr>
           <a:xfrm>
-            <a:off x="7680960" y="4759452"/>
-            <a:ext cx="1097280" cy="274320"/>
+            <a:off x="7223760" y="3944112"/>
+            <a:ext cx="1463040" cy="237744"/>
           </a:xfrm>
           <a:prstGeom prst="rect">
             <a:avLst/>
@@ -9026,54 +9711,7 @@
           <a:ln/>
         </p:spPr>
         <p:txBody>
-          <a:bodyPr wrap="square" anchor="t" lIns="25400" rIns="25400" tIns="25400" bIns="25400">
-            <a:spAutoFit/>
-          </a:bodyPr>
-          <a:lstStyle/>
-          <a:p>
-            <a:pPr algn="r">
-              <a:lnSpc>
-                <a:spcPct val="100000"/>
-              </a:lnSpc>
-              <a:spcBef>
-                <a:spcPts val="0"/>
-              </a:spcBef>
-              <a:spcAft>
-                <a:spcPts val="0"/>
-              </a:spcAft>
-            </a:pPr>
-            <a:r>
-              <a:rPr sz="900" b="1" i="0">
-                <a:solidFill>
-                  <a:srgbClr val="6F6656"/>
-                </a:solidFill>
-                <a:latin typeface="Menlo"/>
-                <a:ea typeface="Hiragino Sans GB"/>
-              </a:rPr>
-              <a:t>12 / 15</a:t>
-            </a:r>
-          </a:p>
-        </p:txBody>
-      </p:sp>
-      <p:sp>
-        <p:nvSpPr>
-          <p:cNvPr id="7" name="TextBox 6"/>
-          <p:cNvSpPr txBox="1"/>
-          <p:nvPr/>
-        </p:nvSpPr>
-        <p:spPr>
-          <a:xfrm>
-            <a:off x="566928" y="4777740"/>
-            <a:ext cx="5486400" cy="274320"/>
-          </a:xfrm>
-          <a:prstGeom prst="rect">
-            <a:avLst/>
-          </a:prstGeom>
-          <a:noFill/>
-          <a:ln/>
-        </p:spPr>
-        <p:txBody>
-          <a:bodyPr wrap="square" anchor="t" lIns="25400" rIns="25400" tIns="25400" bIns="25400">
+          <a:bodyPr wrap="square" anchor="ctr" lIns="25400" rIns="25400" tIns="25400" bIns="25400">
             <a:spAutoFit/>
           </a:bodyPr>
           <a:lstStyle/>
@@ -9090,28 +9728,28 @@
               </a:spcAft>
             </a:pPr>
             <a:r>
-              <a:rPr sz="800" b="0" i="0">
-                <a:solidFill>
-                  <a:srgbClr val="6F6656"/>
-                </a:solidFill>
-                <a:latin typeface="Menlo"/>
+              <a:rPr sz="1800" b="1" i="0">
+                <a:solidFill>
+                  <a:srgbClr val="1C1D22"/>
+                </a:solidFill>
+                <a:latin typeface="Helvetica Neue"/>
                 <a:ea typeface="Hiragino Sans GB"/>
               </a:rPr>
-              <a:t>ATTENTION IS ALL YOU NEED · PAPER DEEP-DIVE</a:t>
-            </a:r>
-          </a:p>
-        </p:txBody>
-      </p:sp>
-      <p:sp>
-        <p:nvSpPr>
-          <p:cNvPr id="8" name="TextBox 7"/>
+              <a:t>2.3×10¹⁹</a:t>
+            </a:r>
+          </a:p>
+        </p:txBody>
+      </p:sp>
+      <p:sp>
+        <p:nvSpPr>
+          <p:cNvPr id="23" name="TextBox 22"/>
           <p:cNvSpPr txBox="1"/>
           <p:nvPr/>
         </p:nvSpPr>
         <p:spPr>
           <a:xfrm>
-            <a:off x="640080" y="1603248"/>
-            <a:ext cx="2377440" cy="640080"/>
+            <a:off x="640080" y="4309872"/>
+            <a:ext cx="1600200" cy="237744"/>
           </a:xfrm>
           <a:prstGeom prst="rect">
             <a:avLst/>
@@ -9120,7 +9758,7 @@
           <a:ln/>
         </p:spPr>
         <p:txBody>
-          <a:bodyPr wrap="square" anchor="t" lIns="25400" rIns="25400" tIns="25400" bIns="25400">
+          <a:bodyPr wrap="square" anchor="ctr" lIns="25400" rIns="25400" tIns="25400" bIns="25400">
             <a:spAutoFit/>
           </a:bodyPr>
           <a:lstStyle/>
@@ -9137,611 +9775,27 @@
               </a:spcAft>
             </a:pPr>
             <a:r>
-              <a:rPr sz="3600" b="1" i="0">
+              <a:rPr sz="1150" b="1" i="0">
                 <a:solidFill>
                   <a:srgbClr val="1C1D22"/>
                 </a:solidFill>
                 <a:latin typeface="Helvetica Neue"/>
                 <a:ea typeface="Hiragino Sans GB"/>
               </a:rPr>
-              <a:t>28.4</a:t>
-            </a:r>
-            <a:r>
-              <a:rPr sz="1512" b="1" i="0">
-                <a:solidFill>
-                  <a:srgbClr val="B84020"/>
-                </a:solidFill>
-                <a:latin typeface="Helvetica Neue"/>
-                <a:ea typeface="Hiragino Sans GB"/>
-              </a:rPr>
-              <a:t> BLEU</a:t>
-            </a:r>
-          </a:p>
-        </p:txBody>
-      </p:sp>
-      <p:sp>
-        <p:nvSpPr>
-          <p:cNvPr id="9" name="TextBox 8"/>
-          <p:cNvSpPr txBox="1"/>
-          <p:nvPr/>
-        </p:nvSpPr>
-        <p:spPr>
-          <a:xfrm>
-            <a:off x="640080" y="2206752"/>
-            <a:ext cx="2377440" cy="365760"/>
-          </a:xfrm>
-          <a:prstGeom prst="rect">
-            <a:avLst/>
-          </a:prstGeom>
-          <a:noFill/>
-          <a:ln/>
-        </p:spPr>
-        <p:txBody>
-          <a:bodyPr wrap="square" anchor="t" lIns="25400" rIns="25400" tIns="25400" bIns="25400">
-            <a:spAutoFit/>
-          </a:bodyPr>
-          <a:lstStyle/>
-          <a:p>
-            <a:pPr algn="l">
-              <a:lnSpc>
-                <a:spcPct val="100000"/>
-              </a:lnSpc>
-              <a:spcBef>
-                <a:spcPts val="0"/>
-              </a:spcBef>
-              <a:spcAft>
-                <a:spcPts val="0"/>
-              </a:spcAft>
-            </a:pPr>
-            <a:r>
-              <a:rPr sz="1200" b="0" i="0">
-                <a:solidFill>
-                  <a:srgbClr val="6F6656"/>
-                </a:solidFill>
-                <a:latin typeface="Helvetica Neue"/>
-                <a:ea typeface="Hiragino Sans GB"/>
-              </a:rPr>
-              <a:t>En→De · big · new high</a:t>
-            </a:r>
-          </a:p>
-        </p:txBody>
-      </p:sp>
-      <p:sp>
-        <p:nvSpPr>
-          <p:cNvPr id="10" name="TextBox 9"/>
-          <p:cNvSpPr txBox="1"/>
-          <p:nvPr/>
-        </p:nvSpPr>
-        <p:spPr>
-          <a:xfrm>
-            <a:off x="3383280" y="1603248"/>
-            <a:ext cx="2377440" cy="640080"/>
-          </a:xfrm>
-          <a:prstGeom prst="rect">
-            <a:avLst/>
-          </a:prstGeom>
-          <a:noFill/>
-          <a:ln/>
-        </p:spPr>
-        <p:txBody>
-          <a:bodyPr wrap="square" anchor="t" lIns="25400" rIns="25400" tIns="25400" bIns="25400">
-            <a:spAutoFit/>
-          </a:bodyPr>
-          <a:lstStyle/>
-          <a:p>
-            <a:pPr algn="l">
-              <a:lnSpc>
-                <a:spcPct val="100000"/>
-              </a:lnSpc>
-              <a:spcBef>
-                <a:spcPts val="0"/>
-              </a:spcBef>
-              <a:spcAft>
-                <a:spcPts val="0"/>
-              </a:spcAft>
-            </a:pPr>
-            <a:r>
-              <a:rPr sz="3600" b="1" i="0">
-                <a:solidFill>
-                  <a:srgbClr val="1C1D22"/>
-                </a:solidFill>
-                <a:latin typeface="Helvetica Neue"/>
-                <a:ea typeface="Hiragino Sans GB"/>
-              </a:rPr>
-              <a:t>3.5</a:t>
-            </a:r>
-            <a:r>
-              <a:rPr sz="1512" b="1" i="0">
-                <a:solidFill>
-                  <a:srgbClr val="B84020"/>
-                </a:solidFill>
-                <a:latin typeface="Helvetica Neue"/>
-                <a:ea typeface="Hiragino Sans GB"/>
-              </a:rPr>
-              <a:t> days</a:t>
-            </a:r>
-          </a:p>
-        </p:txBody>
-      </p:sp>
-      <p:sp>
-        <p:nvSpPr>
-          <p:cNvPr id="11" name="TextBox 10"/>
-          <p:cNvSpPr txBox="1"/>
-          <p:nvPr/>
-        </p:nvSpPr>
-        <p:spPr>
-          <a:xfrm>
-            <a:off x="3383280" y="2206752"/>
-            <a:ext cx="2377440" cy="365760"/>
-          </a:xfrm>
-          <a:prstGeom prst="rect">
-            <a:avLst/>
-          </a:prstGeom>
-          <a:noFill/>
-          <a:ln/>
-        </p:spPr>
-        <p:txBody>
-          <a:bodyPr wrap="square" anchor="t" lIns="25400" rIns="25400" tIns="25400" bIns="25400">
-            <a:spAutoFit/>
-          </a:bodyPr>
-          <a:lstStyle/>
-          <a:p>
-            <a:pPr algn="l">
-              <a:lnSpc>
-                <a:spcPct val="100000"/>
-              </a:lnSpc>
-              <a:spcBef>
-                <a:spcPts val="0"/>
-              </a:spcBef>
-              <a:spcAft>
-                <a:spcPts val="0"/>
-              </a:spcAft>
-            </a:pPr>
-            <a:r>
-              <a:rPr sz="1200" b="0" i="0">
-                <a:solidFill>
-                  <a:srgbClr val="6F6656"/>
-                </a:solidFill>
-                <a:latin typeface="Helvetica Neue"/>
-                <a:ea typeface="Hiragino Sans GB"/>
-              </a:rPr>
-              <a:t>trained on 8 × P100</a:t>
-            </a:r>
-          </a:p>
-        </p:txBody>
-      </p:sp>
-      <p:sp>
-        <p:nvSpPr>
-          <p:cNvPr id="12" name="Rectangle 11"/>
+              <a:t>Prev. SOTA</a:t>
+            </a:r>
+          </a:p>
+        </p:txBody>
+      </p:sp>
+      <p:sp>
+        <p:nvSpPr>
+          <p:cNvPr id="24" name="Rounded Rectangle 23"/>
           <p:cNvSpPr/>
           <p:nvPr/>
         </p:nvSpPr>
         <p:spPr>
           <a:xfrm>
-            <a:off x="3200400" y="1658112"/>
-            <a:ext cx="12801" cy="822960"/>
-          </a:xfrm>
-          <a:prstGeom prst="rect">
-            <a:avLst/>
-          </a:prstGeom>
-          <a:solidFill>
-            <a:srgbClr val="DDDDDD"/>
-          </a:solidFill>
-          <a:ln>
-            <a:noFill/>
-          </a:ln>
-          <a:effectLst/>
-        </p:spPr>
-        <p:style>
-          <a:lnRef idx="1">
-            <a:schemeClr val="accent1"/>
-          </a:lnRef>
-          <a:fillRef idx="3">
-            <a:schemeClr val="accent1"/>
-          </a:fillRef>
-          <a:effectRef idx="2">
-            <a:schemeClr val="accent1"/>
-          </a:effectRef>
-          <a:fontRef idx="minor">
-            <a:schemeClr val="lt1"/>
-          </a:fontRef>
-        </p:style>
-        <p:txBody>
-          <a:bodyPr rtlCol="0" anchor="ctr"/>
-          <a:lstStyle/>
-          <a:p>
-            <a:pPr algn="ctr"/>
-          </a:p>
-        </p:txBody>
-      </p:sp>
-      <p:sp>
-        <p:nvSpPr>
-          <p:cNvPr id="13" name="TextBox 12"/>
-          <p:cNvSpPr txBox="1"/>
-          <p:nvPr/>
-        </p:nvSpPr>
-        <p:spPr>
-          <a:xfrm>
-            <a:off x="6126480" y="1603248"/>
-            <a:ext cx="2377440" cy="640080"/>
-          </a:xfrm>
-          <a:prstGeom prst="rect">
-            <a:avLst/>
-          </a:prstGeom>
-          <a:noFill/>
-          <a:ln/>
-        </p:spPr>
-        <p:txBody>
-          <a:bodyPr wrap="square" anchor="t" lIns="25400" rIns="25400" tIns="25400" bIns="25400">
-            <a:spAutoFit/>
-          </a:bodyPr>
-          <a:lstStyle/>
-          <a:p>
-            <a:pPr algn="l">
-              <a:lnSpc>
-                <a:spcPct val="100000"/>
-              </a:lnSpc>
-              <a:spcBef>
-                <a:spcPts val="0"/>
-              </a:spcBef>
-              <a:spcAft>
-                <a:spcPts val="0"/>
-              </a:spcAft>
-            </a:pPr>
-            <a:r>
-              <a:rPr sz="3600" b="1" i="0">
-                <a:solidFill>
-                  <a:srgbClr val="1C1D22"/>
-                </a:solidFill>
-                <a:latin typeface="Helvetica Neue"/>
-                <a:ea typeface="Hiragino Sans GB"/>
-              </a:rPr>
-              <a:t>&lt; 1/4</a:t>
-            </a:r>
-          </a:p>
-        </p:txBody>
-      </p:sp>
-      <p:sp>
-        <p:nvSpPr>
-          <p:cNvPr id="14" name="TextBox 13"/>
-          <p:cNvSpPr txBox="1"/>
-          <p:nvPr/>
-        </p:nvSpPr>
-        <p:spPr>
-          <a:xfrm>
-            <a:off x="6126480" y="2206752"/>
-            <a:ext cx="2377440" cy="365760"/>
-          </a:xfrm>
-          <a:prstGeom prst="rect">
-            <a:avLst/>
-          </a:prstGeom>
-          <a:noFill/>
-          <a:ln/>
-        </p:spPr>
-        <p:txBody>
-          <a:bodyPr wrap="square" anchor="t" lIns="25400" rIns="25400" tIns="25400" bIns="25400">
-            <a:spAutoFit/>
-          </a:bodyPr>
-          <a:lstStyle/>
-          <a:p>
-            <a:pPr algn="l">
-              <a:lnSpc>
-                <a:spcPct val="100000"/>
-              </a:lnSpc>
-              <a:spcBef>
-                <a:spcPts val="0"/>
-              </a:spcBef>
-              <a:spcAft>
-                <a:spcPts val="0"/>
-              </a:spcAft>
-            </a:pPr>
-            <a:r>
-              <a:rPr sz="1200" b="0" i="0">
-                <a:solidFill>
-                  <a:srgbClr val="6F6656"/>
-                </a:solidFill>
-                <a:latin typeface="Helvetica Neue"/>
-                <a:ea typeface="Hiragino Sans GB"/>
-              </a:rPr>
-              <a:t>of the compute to top En→Fr</a:t>
-            </a:r>
-          </a:p>
-        </p:txBody>
-      </p:sp>
-      <p:sp>
-        <p:nvSpPr>
-          <p:cNvPr id="15" name="Rectangle 14"/>
-          <p:cNvSpPr/>
-          <p:nvPr/>
-        </p:nvSpPr>
-        <p:spPr>
-          <a:xfrm>
-            <a:off x="5943600" y="1658112"/>
-            <a:ext cx="12801" cy="822960"/>
-          </a:xfrm>
-          <a:prstGeom prst="rect">
-            <a:avLst/>
-          </a:prstGeom>
-          <a:solidFill>
-            <a:srgbClr val="DDDDDD"/>
-          </a:solidFill>
-          <a:ln>
-            <a:noFill/>
-          </a:ln>
-          <a:effectLst/>
-        </p:spPr>
-        <p:style>
-          <a:lnRef idx="1">
-            <a:schemeClr val="accent1"/>
-          </a:lnRef>
-          <a:fillRef idx="3">
-            <a:schemeClr val="accent1"/>
-          </a:fillRef>
-          <a:effectRef idx="2">
-            <a:schemeClr val="accent1"/>
-          </a:effectRef>
-          <a:fontRef idx="minor">
-            <a:schemeClr val="lt1"/>
-          </a:fontRef>
-        </p:style>
-        <p:txBody>
-          <a:bodyPr rtlCol="0" anchor="ctr"/>
-          <a:lstStyle/>
-          <a:p>
-            <a:pPr algn="ctr"/>
-          </a:p>
-        </p:txBody>
-      </p:sp>
-      <p:sp>
-        <p:nvSpPr>
-          <p:cNvPr id="16" name="Rounded Rectangle 15"/>
-          <p:cNvSpPr/>
-          <p:nvPr/>
-        </p:nvSpPr>
-        <p:spPr>
-          <a:xfrm>
-            <a:off x="640080" y="2828544"/>
-            <a:ext cx="7863840" cy="530352"/>
-          </a:xfrm>
-          <a:prstGeom prst="roundRect">
-            <a:avLst>
-              <a:gd name="adj" fmla="val 8000"/>
-            </a:avLst>
-          </a:prstGeom>
-          <a:solidFill>
-            <a:srgbClr val="1C1D22"/>
-          </a:solidFill>
-          <a:ln>
-            <a:noFill/>
-          </a:ln>
-          <a:effectLst/>
-        </p:spPr>
-        <p:style>
-          <a:lnRef idx="1">
-            <a:schemeClr val="accent1"/>
-          </a:lnRef>
-          <a:fillRef idx="3">
-            <a:schemeClr val="accent1"/>
-          </a:fillRef>
-          <a:effectRef idx="2">
-            <a:schemeClr val="accent1"/>
-          </a:effectRef>
-          <a:fontRef idx="minor">
-            <a:schemeClr val="lt1"/>
-          </a:fontRef>
-        </p:style>
-        <p:txBody>
-          <a:bodyPr rtlCol="0" anchor="ctr"/>
-          <a:lstStyle/>
-          <a:p>
-            <a:pPr algn="ctr"/>
-          </a:p>
-        </p:txBody>
-      </p:sp>
-      <p:sp>
-        <p:nvSpPr>
-          <p:cNvPr id="17" name="Rectangle 16"/>
-          <p:cNvSpPr/>
-          <p:nvPr/>
-        </p:nvSpPr>
-        <p:spPr>
-          <a:xfrm>
-            <a:off x="640080" y="2919984"/>
-            <a:ext cx="54864" cy="347471"/>
-          </a:xfrm>
-          <a:prstGeom prst="rect">
-            <a:avLst/>
-          </a:prstGeom>
-          <a:solidFill>
-            <a:srgbClr val="E69A6E"/>
-          </a:solidFill>
-          <a:ln>
-            <a:noFill/>
-          </a:ln>
-          <a:effectLst/>
-        </p:spPr>
-        <p:style>
-          <a:lnRef idx="1">
-            <a:schemeClr val="accent1"/>
-          </a:lnRef>
-          <a:fillRef idx="3">
-            <a:schemeClr val="accent1"/>
-          </a:fillRef>
-          <a:effectRef idx="2">
-            <a:schemeClr val="accent1"/>
-          </a:effectRef>
-          <a:fontRef idx="minor">
-            <a:schemeClr val="lt1"/>
-          </a:fontRef>
-        </p:style>
-        <p:txBody>
-          <a:bodyPr rtlCol="0" anchor="ctr"/>
-          <a:lstStyle/>
-          <a:p>
-            <a:pPr algn="ctr"/>
-          </a:p>
-        </p:txBody>
-      </p:sp>
-      <p:sp>
-        <p:nvSpPr>
-          <p:cNvPr id="18" name="TextBox 17"/>
-          <p:cNvSpPr txBox="1"/>
-          <p:nvPr/>
-        </p:nvSpPr>
-        <p:spPr>
-          <a:xfrm>
-            <a:off x="896112" y="2828544"/>
-            <a:ext cx="7406640" cy="530352"/>
-          </a:xfrm>
-          <a:prstGeom prst="rect">
-            <a:avLst/>
-          </a:prstGeom>
-          <a:noFill/>
-          <a:ln/>
-        </p:spPr>
-        <p:txBody>
-          <a:bodyPr wrap="square" anchor="ctr" lIns="25400" rIns="25400" tIns="25400" bIns="25400">
-            <a:spAutoFit/>
-          </a:bodyPr>
-          <a:lstStyle/>
-          <a:p>
-            <a:pPr algn="l">
-              <a:lnSpc>
-                <a:spcPct val="100000"/>
-              </a:lnSpc>
-              <a:spcBef>
-                <a:spcPts val="0"/>
-              </a:spcBef>
-              <a:spcAft>
-                <a:spcPts val="0"/>
-              </a:spcAft>
-            </a:pPr>
-            <a:r>
-              <a:rPr sz="1100" b="1" i="0">
-                <a:solidFill>
-                  <a:srgbClr val="E69A6E"/>
-                </a:solidFill>
-                <a:latin typeface="Helvetica Neue"/>
-                <a:ea typeface="Hiragino Sans GB"/>
-              </a:rPr>
-              <a:t>So   </a:t>
-            </a:r>
-            <a:r>
-              <a:rPr sz="1350" b="0" i="0">
-                <a:solidFill>
-                  <a:srgbClr val="FFFFFF"/>
-                </a:solidFill>
-                <a:latin typeface="Helvetica Neue"/>
-                <a:ea typeface="Hiragino Sans GB"/>
-              </a:rPr>
-              <a:t>On En→Fr, big reaches a new single-model SOTA with under 1/4 the training compute of the previous best.</a:t>
-            </a:r>
-          </a:p>
-        </p:txBody>
-      </p:sp>
-      <p:sp>
-        <p:nvSpPr>
-          <p:cNvPr id="19" name="TextBox 18"/>
-          <p:cNvSpPr txBox="1"/>
-          <p:nvPr/>
-        </p:nvSpPr>
-        <p:spPr>
-          <a:xfrm>
-            <a:off x="640080" y="3614928"/>
-            <a:ext cx="5486400" cy="274320"/>
-          </a:xfrm>
-          <a:prstGeom prst="rect">
-            <a:avLst/>
-          </a:prstGeom>
-          <a:noFill/>
-          <a:ln/>
-        </p:spPr>
-        <p:txBody>
-          <a:bodyPr wrap="square" anchor="t" lIns="25400" rIns="25400" tIns="25400" bIns="25400">
-            <a:spAutoFit/>
-          </a:bodyPr>
-          <a:lstStyle/>
-          <a:p>
-            <a:pPr algn="l">
-              <a:lnSpc>
-                <a:spcPct val="100000"/>
-              </a:lnSpc>
-              <a:spcBef>
-                <a:spcPts val="0"/>
-              </a:spcBef>
-              <a:spcAft>
-                <a:spcPts val="0"/>
-              </a:spcAft>
-            </a:pPr>
-            <a:r>
-              <a:rPr sz="1100" b="1" i="0">
-                <a:solidFill>
-                  <a:srgbClr val="6F6656"/>
-                </a:solidFill>
-                <a:latin typeface="Menlo"/>
-                <a:ea typeface="Hiragino Sans GB"/>
-              </a:rPr>
-              <a:t>En→Fr training compute, FLOPs (shorter is better)</a:t>
-            </a:r>
-          </a:p>
-        </p:txBody>
-      </p:sp>
-      <p:sp>
-        <p:nvSpPr>
-          <p:cNvPr id="20" name="TextBox 19"/>
-          <p:cNvSpPr txBox="1"/>
-          <p:nvPr/>
-        </p:nvSpPr>
-        <p:spPr>
-          <a:xfrm>
-            <a:off x="640080" y="3944112"/>
-            <a:ext cx="1600200" cy="237744"/>
-          </a:xfrm>
-          <a:prstGeom prst="rect">
-            <a:avLst/>
-          </a:prstGeom>
-          <a:noFill/>
-          <a:ln/>
-        </p:spPr>
-        <p:txBody>
-          <a:bodyPr wrap="square" anchor="ctr" lIns="25400" rIns="25400" tIns="25400" bIns="25400">
-            <a:spAutoFit/>
-          </a:bodyPr>
-          <a:lstStyle/>
-          <a:p>
-            <a:pPr algn="l">
-              <a:lnSpc>
-                <a:spcPct val="100000"/>
-              </a:lnSpc>
-              <a:spcBef>
-                <a:spcPts val="0"/>
-              </a:spcBef>
-              <a:spcAft>
-                <a:spcPts val="0"/>
-              </a:spcAft>
-            </a:pPr>
-            <a:r>
-              <a:rPr sz="1150" b="1" i="0">
-                <a:solidFill>
-                  <a:srgbClr val="1C1D22"/>
-                </a:solidFill>
-                <a:latin typeface="Helvetica Neue"/>
-                <a:ea typeface="Hiragino Sans GB"/>
-              </a:rPr>
-              <a:t>Ours · big</a:t>
-            </a:r>
-          </a:p>
-        </p:txBody>
-      </p:sp>
-      <p:sp>
-        <p:nvSpPr>
-          <p:cNvPr id="21" name="Rounded Rectangle 20"/>
-          <p:cNvSpPr/>
-          <p:nvPr/>
-        </p:nvSpPr>
-        <p:spPr>
-          <a:xfrm>
-            <a:off x="2286000" y="3944112"/>
+            <a:off x="2286000" y="4309872"/>
             <a:ext cx="4754880" cy="237744"/>
           </a:xfrm>
           <a:prstGeom prst="roundRect">
@@ -9781,193 +9835,7 @@
       </p:sp>
       <p:sp>
         <p:nvSpPr>
-          <p:cNvPr id="22" name="Rounded Rectangle 21"/>
-          <p:cNvSpPr/>
-          <p:nvPr/>
-        </p:nvSpPr>
-        <p:spPr>
-          <a:xfrm>
-            <a:off x="2286000" y="3944112"/>
-            <a:ext cx="727496" cy="237744"/>
-          </a:xfrm>
-          <a:prstGeom prst="roundRect">
-            <a:avLst>
-              <a:gd name="adj" fmla="val 50000"/>
-            </a:avLst>
-          </a:prstGeom>
-          <a:solidFill>
-            <a:srgbClr val="B84020"/>
-          </a:solidFill>
-          <a:ln>
-            <a:noFill/>
-          </a:ln>
-          <a:effectLst/>
-        </p:spPr>
-        <p:style>
-          <a:lnRef idx="1">
-            <a:schemeClr val="accent1"/>
-          </a:lnRef>
-          <a:fillRef idx="3">
-            <a:schemeClr val="accent1"/>
-          </a:fillRef>
-          <a:effectRef idx="2">
-            <a:schemeClr val="accent1"/>
-          </a:effectRef>
-          <a:fontRef idx="minor">
-            <a:schemeClr val="lt1"/>
-          </a:fontRef>
-        </p:style>
-        <p:txBody>
-          <a:bodyPr rtlCol="0" anchor="ctr"/>
-          <a:lstStyle/>
-          <a:p>
-            <a:pPr algn="ctr"/>
-          </a:p>
-        </p:txBody>
-      </p:sp>
-      <p:sp>
-        <p:nvSpPr>
-          <p:cNvPr id="23" name="TextBox 22"/>
-          <p:cNvSpPr txBox="1"/>
-          <p:nvPr/>
-        </p:nvSpPr>
-        <p:spPr>
-          <a:xfrm>
-            <a:off x="7223760" y="3944112"/>
-            <a:ext cx="1463040" cy="237744"/>
-          </a:xfrm>
-          <a:prstGeom prst="rect">
-            <a:avLst/>
-          </a:prstGeom>
-          <a:noFill/>
-          <a:ln/>
-        </p:spPr>
-        <p:txBody>
-          <a:bodyPr wrap="square" anchor="ctr" lIns="25400" rIns="25400" tIns="25400" bIns="25400">
-            <a:spAutoFit/>
-          </a:bodyPr>
-          <a:lstStyle/>
-          <a:p>
-            <a:pPr algn="l">
-              <a:lnSpc>
-                <a:spcPct val="100000"/>
-              </a:lnSpc>
-              <a:spcBef>
-                <a:spcPts val="0"/>
-              </a:spcBef>
-              <a:spcAft>
-                <a:spcPts val="0"/>
-              </a:spcAft>
-            </a:pPr>
-            <a:r>
-              <a:rPr sz="1800" b="1" i="0">
-                <a:solidFill>
-                  <a:srgbClr val="1C1D22"/>
-                </a:solidFill>
-                <a:latin typeface="Helvetica Neue"/>
-                <a:ea typeface="Hiragino Sans GB"/>
-              </a:rPr>
-              <a:t>2.3×10¹⁹</a:t>
-            </a:r>
-          </a:p>
-        </p:txBody>
-      </p:sp>
-      <p:sp>
-        <p:nvSpPr>
-          <p:cNvPr id="24" name="TextBox 23"/>
-          <p:cNvSpPr txBox="1"/>
-          <p:nvPr/>
-        </p:nvSpPr>
-        <p:spPr>
-          <a:xfrm>
-            <a:off x="640080" y="4309872"/>
-            <a:ext cx="1600200" cy="237744"/>
-          </a:xfrm>
-          <a:prstGeom prst="rect">
-            <a:avLst/>
-          </a:prstGeom>
-          <a:noFill/>
-          <a:ln/>
-        </p:spPr>
-        <p:txBody>
-          <a:bodyPr wrap="square" anchor="ctr" lIns="25400" rIns="25400" tIns="25400" bIns="25400">
-            <a:spAutoFit/>
-          </a:bodyPr>
-          <a:lstStyle/>
-          <a:p>
-            <a:pPr algn="l">
-              <a:lnSpc>
-                <a:spcPct val="100000"/>
-              </a:lnSpc>
-              <a:spcBef>
-                <a:spcPts val="0"/>
-              </a:spcBef>
-              <a:spcAft>
-                <a:spcPts val="0"/>
-              </a:spcAft>
-            </a:pPr>
-            <a:r>
-              <a:rPr sz="1150" b="1" i="0">
-                <a:solidFill>
-                  <a:srgbClr val="1C1D22"/>
-                </a:solidFill>
-                <a:latin typeface="Helvetica Neue"/>
-                <a:ea typeface="Hiragino Sans GB"/>
-              </a:rPr>
-              <a:t>Prev. SOTA</a:t>
-            </a:r>
-          </a:p>
-        </p:txBody>
-      </p:sp>
-      <p:sp>
-        <p:nvSpPr>
           <p:cNvPr id="25" name="Rounded Rectangle 24"/>
-          <p:cNvSpPr/>
-          <p:nvPr/>
-        </p:nvSpPr>
-        <p:spPr>
-          <a:xfrm>
-            <a:off x="2286000" y="4309872"/>
-            <a:ext cx="4754880" cy="237744"/>
-          </a:xfrm>
-          <a:prstGeom prst="roundRect">
-            <a:avLst>
-              <a:gd name="adj" fmla="val 50000"/>
-            </a:avLst>
-          </a:prstGeom>
-          <a:solidFill>
-            <a:srgbClr val="E6E9EE"/>
-          </a:solidFill>
-          <a:ln>
-            <a:noFill/>
-          </a:ln>
-          <a:effectLst/>
-        </p:spPr>
-        <p:style>
-          <a:lnRef idx="1">
-            <a:schemeClr val="accent1"/>
-          </a:lnRef>
-          <a:fillRef idx="3">
-            <a:schemeClr val="accent1"/>
-          </a:fillRef>
-          <a:effectRef idx="2">
-            <a:schemeClr val="accent1"/>
-          </a:effectRef>
-          <a:fontRef idx="minor">
-            <a:schemeClr val="lt1"/>
-          </a:fontRef>
-        </p:style>
-        <p:txBody>
-          <a:bodyPr rtlCol="0" anchor="ctr"/>
-          <a:lstStyle/>
-          <a:p>
-            <a:pPr algn="ctr"/>
-          </a:p>
-        </p:txBody>
-      </p:sp>
-      <p:sp>
-        <p:nvSpPr>
-          <p:cNvPr id="26" name="Rounded Rectangle 25"/>
           <p:cNvSpPr/>
           <p:nvPr/>
         </p:nvSpPr>
@@ -10013,7 +9881,7 @@
       </p:sp>
       <p:sp>
         <p:nvSpPr>
-          <p:cNvPr id="27" name="TextBox 26"/>
+          <p:cNvPr id="26" name="TextBox 25"/>
           <p:cNvSpPr txBox="1"/>
           <p:nvPr/>
         </p:nvSpPr>
@@ -10216,51 +10084,7 @@
       </p:sp>
       <p:sp>
         <p:nvSpPr>
-          <p:cNvPr id="5" name="Rectangle 4"/>
-          <p:cNvSpPr/>
-          <p:nvPr/>
-        </p:nvSpPr>
-        <p:spPr>
-          <a:xfrm>
-            <a:off x="585216" y="1072896"/>
-            <a:ext cx="1097280" cy="45720"/>
-          </a:xfrm>
-          <a:prstGeom prst="rect">
-            <a:avLst/>
-          </a:prstGeom>
-          <a:solidFill>
-            <a:srgbClr val="B84020"/>
-          </a:solidFill>
-          <a:ln>
-            <a:noFill/>
-          </a:ln>
-          <a:effectLst/>
-        </p:spPr>
-        <p:style>
-          <a:lnRef idx="1">
-            <a:schemeClr val="accent1"/>
-          </a:lnRef>
-          <a:fillRef idx="3">
-            <a:schemeClr val="accent1"/>
-          </a:fillRef>
-          <a:effectRef idx="2">
-            <a:schemeClr val="accent1"/>
-          </a:effectRef>
-          <a:fontRef idx="minor">
-            <a:schemeClr val="lt1"/>
-          </a:fontRef>
-        </p:style>
-        <p:txBody>
-          <a:bodyPr rtlCol="0" anchor="ctr"/>
-          <a:lstStyle/>
-          <a:p>
-            <a:pPr algn="ctr"/>
-          </a:p>
-        </p:txBody>
-      </p:sp>
-      <p:sp>
-        <p:nvSpPr>
-          <p:cNvPr id="6" name="TextBox 5"/>
+          <p:cNvPr id="5" name="TextBox 4"/>
           <p:cNvSpPr txBox="1"/>
           <p:nvPr/>
         </p:nvSpPr>
@@ -10307,7 +10131,7 @@
       </p:sp>
       <p:sp>
         <p:nvSpPr>
-          <p:cNvPr id="7" name="TextBox 6"/>
+          <p:cNvPr id="6" name="TextBox 5"/>
           <p:cNvSpPr txBox="1"/>
           <p:nvPr/>
         </p:nvSpPr>
@@ -10354,7 +10178,7 @@
       </p:sp>
       <p:sp>
         <p:nvSpPr>
-          <p:cNvPr id="8" name="Rounded Rectangle 7"/>
+          <p:cNvPr id="7" name="Rounded Rectangle 6"/>
           <p:cNvSpPr/>
           <p:nvPr/>
         </p:nvSpPr>
@@ -10402,7 +10226,7 @@
       </p:sp>
       <p:sp>
         <p:nvSpPr>
-          <p:cNvPr id="9" name="Round Same Side Corner Rectangle 8"/>
+          <p:cNvPr id="8" name="Round Same Side Corner Rectangle 7"/>
           <p:cNvSpPr/>
           <p:nvPr/>
         </p:nvSpPr>
@@ -10449,7 +10273,7 @@
       </p:sp>
       <p:sp>
         <p:nvSpPr>
-          <p:cNvPr id="10" name="TextBox 9"/>
+          <p:cNvPr id="9" name="TextBox 8"/>
           <p:cNvSpPr txBox="1"/>
           <p:nvPr/>
         </p:nvSpPr>
@@ -10496,7 +10320,7 @@
       </p:sp>
       <p:sp>
         <p:nvSpPr>
-          <p:cNvPr id="11" name="TextBox 10"/>
+          <p:cNvPr id="10" name="TextBox 9"/>
           <p:cNvSpPr txBox="1"/>
           <p:nvPr/>
         </p:nvSpPr>
@@ -10543,7 +10367,7 @@
       </p:sp>
       <p:sp>
         <p:nvSpPr>
-          <p:cNvPr id="12" name="Rounded Rectangle 11"/>
+          <p:cNvPr id="11" name="Rounded Rectangle 10"/>
           <p:cNvSpPr/>
           <p:nvPr/>
         </p:nvSpPr>
@@ -10589,7 +10413,7 @@
       </p:sp>
       <p:sp>
         <p:nvSpPr>
-          <p:cNvPr id="13" name="TextBox 12"/>
+          <p:cNvPr id="12" name="TextBox 11"/>
           <p:cNvSpPr txBox="1"/>
           <p:nvPr/>
         </p:nvSpPr>
@@ -10636,7 +10460,7 @@
       </p:sp>
       <p:sp>
         <p:nvSpPr>
-          <p:cNvPr id="14" name="TextBox 13"/>
+          <p:cNvPr id="13" name="TextBox 12"/>
           <p:cNvSpPr txBox="1"/>
           <p:nvPr/>
         </p:nvSpPr>
@@ -10683,7 +10507,7 @@
       </p:sp>
       <p:sp>
         <p:nvSpPr>
-          <p:cNvPr id="15" name="Rounded Rectangle 14"/>
+          <p:cNvPr id="14" name="Rounded Rectangle 13"/>
           <p:cNvSpPr/>
           <p:nvPr/>
         </p:nvSpPr>
@@ -10729,7 +10553,7 @@
       </p:sp>
       <p:sp>
         <p:nvSpPr>
-          <p:cNvPr id="16" name="TextBox 15"/>
+          <p:cNvPr id="15" name="TextBox 14"/>
           <p:cNvSpPr txBox="1"/>
           <p:nvPr/>
         </p:nvSpPr>
@@ -10776,7 +10600,7 @@
       </p:sp>
       <p:sp>
         <p:nvSpPr>
-          <p:cNvPr id="17" name="TextBox 16"/>
+          <p:cNvPr id="16" name="TextBox 15"/>
           <p:cNvSpPr txBox="1"/>
           <p:nvPr/>
         </p:nvSpPr>
@@ -10823,7 +10647,7 @@
       </p:sp>
       <p:sp>
         <p:nvSpPr>
-          <p:cNvPr id="18" name="Rounded Rectangle 17"/>
+          <p:cNvPr id="17" name="Rounded Rectangle 16"/>
           <p:cNvSpPr/>
           <p:nvPr/>
         </p:nvSpPr>
@@ -10869,7 +10693,7 @@
       </p:sp>
       <p:sp>
         <p:nvSpPr>
-          <p:cNvPr id="19" name="TextBox 18"/>
+          <p:cNvPr id="18" name="TextBox 17"/>
           <p:cNvSpPr txBox="1"/>
           <p:nvPr/>
         </p:nvSpPr>
@@ -10916,7 +10740,7 @@
       </p:sp>
       <p:sp>
         <p:nvSpPr>
-          <p:cNvPr id="20" name="TextBox 19"/>
+          <p:cNvPr id="19" name="TextBox 18"/>
           <p:cNvSpPr txBox="1"/>
           <p:nvPr/>
         </p:nvSpPr>
@@ -10963,7 +10787,7 @@
       </p:sp>
       <p:sp>
         <p:nvSpPr>
-          <p:cNvPr id="21" name="Rounded Rectangle 20"/>
+          <p:cNvPr id="20" name="Rounded Rectangle 19"/>
           <p:cNvSpPr/>
           <p:nvPr/>
         </p:nvSpPr>
@@ -11011,7 +10835,7 @@
       </p:sp>
       <p:sp>
         <p:nvSpPr>
-          <p:cNvPr id="22" name="Round Same Side Corner Rectangle 21"/>
+          <p:cNvPr id="21" name="Round Same Side Corner Rectangle 20"/>
           <p:cNvSpPr/>
           <p:nvPr/>
         </p:nvSpPr>
@@ -11058,7 +10882,7 @@
       </p:sp>
       <p:sp>
         <p:nvSpPr>
-          <p:cNvPr id="23" name="TextBox 22"/>
+          <p:cNvPr id="22" name="TextBox 21"/>
           <p:cNvSpPr txBox="1"/>
           <p:nvPr/>
         </p:nvSpPr>
@@ -11105,7 +10929,7 @@
       </p:sp>
       <p:sp>
         <p:nvSpPr>
-          <p:cNvPr id="24" name="TextBox 23"/>
+          <p:cNvPr id="23" name="TextBox 22"/>
           <p:cNvSpPr txBox="1"/>
           <p:nvPr/>
         </p:nvSpPr>
@@ -11152,7 +10976,7 @@
       </p:sp>
       <p:sp>
         <p:nvSpPr>
-          <p:cNvPr id="25" name="Rounded Rectangle 24"/>
+          <p:cNvPr id="24" name="Rounded Rectangle 23"/>
           <p:cNvSpPr/>
           <p:nvPr/>
         </p:nvSpPr>
@@ -11198,7 +11022,7 @@
       </p:sp>
       <p:sp>
         <p:nvSpPr>
-          <p:cNvPr id="26" name="TextBox 25"/>
+          <p:cNvPr id="25" name="TextBox 24"/>
           <p:cNvSpPr txBox="1"/>
           <p:nvPr/>
         </p:nvSpPr>
@@ -11245,7 +11069,7 @@
       </p:sp>
       <p:sp>
         <p:nvSpPr>
-          <p:cNvPr id="27" name="TextBox 26"/>
+          <p:cNvPr id="26" name="TextBox 25"/>
           <p:cNvSpPr txBox="1"/>
           <p:nvPr/>
         </p:nvSpPr>
@@ -11292,7 +11116,7 @@
       </p:sp>
       <p:sp>
         <p:nvSpPr>
-          <p:cNvPr id="28" name="Rounded Rectangle 27"/>
+          <p:cNvPr id="27" name="Rounded Rectangle 26"/>
           <p:cNvSpPr/>
           <p:nvPr/>
         </p:nvSpPr>
@@ -11338,7 +11162,7 @@
       </p:sp>
       <p:sp>
         <p:nvSpPr>
-          <p:cNvPr id="29" name="TextBox 28"/>
+          <p:cNvPr id="28" name="TextBox 27"/>
           <p:cNvSpPr txBox="1"/>
           <p:nvPr/>
         </p:nvSpPr>
@@ -11385,7 +11209,7 @@
       </p:sp>
       <p:sp>
         <p:nvSpPr>
-          <p:cNvPr id="30" name="TextBox 29"/>
+          <p:cNvPr id="29" name="TextBox 28"/>
           <p:cNvSpPr txBox="1"/>
           <p:nvPr/>
         </p:nvSpPr>
@@ -11432,7 +11256,7 @@
       </p:sp>
       <p:sp>
         <p:nvSpPr>
-          <p:cNvPr id="31" name="Rounded Rectangle 30"/>
+          <p:cNvPr id="30" name="Rounded Rectangle 29"/>
           <p:cNvSpPr/>
           <p:nvPr/>
         </p:nvSpPr>
@@ -11478,7 +11302,7 @@
       </p:sp>
       <p:sp>
         <p:nvSpPr>
-          <p:cNvPr id="32" name="TextBox 31"/>
+          <p:cNvPr id="31" name="TextBox 30"/>
           <p:cNvSpPr txBox="1"/>
           <p:nvPr/>
         </p:nvSpPr>
@@ -11525,7 +11349,7 @@
       </p:sp>
       <p:sp>
         <p:nvSpPr>
-          <p:cNvPr id="33" name="TextBox 32"/>
+          <p:cNvPr id="32" name="TextBox 31"/>
           <p:cNvSpPr txBox="1"/>
           <p:nvPr/>
         </p:nvSpPr>
@@ -11728,17 +11552,113 @@
       </p:sp>
       <p:sp>
         <p:nvSpPr>
-          <p:cNvPr id="5" name="Rectangle 4"/>
+          <p:cNvPr id="5" name="TextBox 4"/>
+          <p:cNvSpPr txBox="1"/>
+          <p:nvPr/>
+        </p:nvSpPr>
+        <p:spPr>
+          <a:xfrm>
+            <a:off x="7680960" y="4759452"/>
+            <a:ext cx="1097280" cy="274320"/>
+          </a:xfrm>
+          <a:prstGeom prst="rect">
+            <a:avLst/>
+          </a:prstGeom>
+          <a:noFill/>
+          <a:ln/>
+        </p:spPr>
+        <p:txBody>
+          <a:bodyPr wrap="square" anchor="t" lIns="25400" rIns="25400" tIns="25400" bIns="25400">
+            <a:spAutoFit/>
+          </a:bodyPr>
+          <a:lstStyle/>
+          <a:p>
+            <a:pPr algn="r">
+              <a:lnSpc>
+                <a:spcPct val="100000"/>
+              </a:lnSpc>
+              <a:spcBef>
+                <a:spcPts val="0"/>
+              </a:spcBef>
+              <a:spcAft>
+                <a:spcPts val="0"/>
+              </a:spcAft>
+            </a:pPr>
+            <a:r>
+              <a:rPr sz="900" b="1" i="0">
+                <a:solidFill>
+                  <a:srgbClr val="6F6656"/>
+                </a:solidFill>
+                <a:latin typeface="Menlo"/>
+                <a:ea typeface="Hiragino Sans GB"/>
+              </a:rPr>
+              <a:t>14 / 15</a:t>
+            </a:r>
+          </a:p>
+        </p:txBody>
+      </p:sp>
+      <p:sp>
+        <p:nvSpPr>
+          <p:cNvPr id="6" name="TextBox 5"/>
+          <p:cNvSpPr txBox="1"/>
+          <p:nvPr/>
+        </p:nvSpPr>
+        <p:spPr>
+          <a:xfrm>
+            <a:off x="566928" y="4777740"/>
+            <a:ext cx="5486400" cy="274320"/>
+          </a:xfrm>
+          <a:prstGeom prst="rect">
+            <a:avLst/>
+          </a:prstGeom>
+          <a:noFill/>
+          <a:ln/>
+        </p:spPr>
+        <p:txBody>
+          <a:bodyPr wrap="square" anchor="t" lIns="25400" rIns="25400" tIns="25400" bIns="25400">
+            <a:spAutoFit/>
+          </a:bodyPr>
+          <a:lstStyle/>
+          <a:p>
+            <a:pPr algn="l">
+              <a:lnSpc>
+                <a:spcPct val="100000"/>
+              </a:lnSpc>
+              <a:spcBef>
+                <a:spcPts val="0"/>
+              </a:spcBef>
+              <a:spcAft>
+                <a:spcPts val="0"/>
+              </a:spcAft>
+            </a:pPr>
+            <a:r>
+              <a:rPr sz="800" b="0" i="0">
+                <a:solidFill>
+                  <a:srgbClr val="6F6656"/>
+                </a:solidFill>
+                <a:latin typeface="Menlo"/>
+                <a:ea typeface="Hiragino Sans GB"/>
+              </a:rPr>
+              <a:t>ATTENTION IS ALL YOU NEED · PAPER DEEP-DIVE</a:t>
+            </a:r>
+          </a:p>
+        </p:txBody>
+      </p:sp>
+      <p:sp>
+        <p:nvSpPr>
+          <p:cNvPr id="7" name="Rounded Rectangle 6"/>
           <p:cNvSpPr/>
           <p:nvPr/>
         </p:nvSpPr>
         <p:spPr>
           <a:xfrm>
-            <a:off x="585216" y="1072896"/>
-            <a:ext cx="1097280" cy="45720"/>
-          </a:xfrm>
-          <a:prstGeom prst="rect">
-            <a:avLst/>
+            <a:off x="777240" y="1530096"/>
+            <a:ext cx="402336" cy="402336"/>
+          </a:xfrm>
+          <a:prstGeom prst="roundRect">
+            <a:avLst>
+              <a:gd name="adj" fmla="val 50000"/>
+            </a:avLst>
           </a:prstGeom>
           <a:solidFill>
             <a:srgbClr val="B84020"/>
@@ -11772,14 +11692,14 @@
       </p:sp>
       <p:sp>
         <p:nvSpPr>
-          <p:cNvPr id="6" name="TextBox 5"/>
+          <p:cNvPr id="8" name="TextBox 7"/>
           <p:cNvSpPr txBox="1"/>
           <p:nvPr/>
         </p:nvSpPr>
         <p:spPr>
           <a:xfrm>
-            <a:off x="7680960" y="4759452"/>
-            <a:ext cx="1097280" cy="274320"/>
+            <a:off x="777240" y="1530096"/>
+            <a:ext cx="402336" cy="420624"/>
           </a:xfrm>
           <a:prstGeom prst="rect">
             <a:avLst/>
@@ -11788,12 +11708,12 @@
           <a:ln/>
         </p:spPr>
         <p:txBody>
-          <a:bodyPr wrap="square" anchor="t" lIns="25400" rIns="25400" tIns="25400" bIns="25400">
+          <a:bodyPr wrap="square" anchor="ctr" lIns="25400" rIns="25400" tIns="25400" bIns="25400">
             <a:spAutoFit/>
           </a:bodyPr>
           <a:lstStyle/>
           <a:p>
-            <a:pPr algn="r">
+            <a:pPr algn="ctr">
               <a:lnSpc>
                 <a:spcPct val="100000"/>
               </a:lnSpc>
@@ -11805,28 +11725,28 @@
               </a:spcAft>
             </a:pPr>
             <a:r>
-              <a:rPr sz="900" b="1" i="0">
-                <a:solidFill>
-                  <a:srgbClr val="6F6656"/>
-                </a:solidFill>
-                <a:latin typeface="Menlo"/>
+              <a:rPr sz="1600" b="1" i="0">
+                <a:solidFill>
+                  <a:srgbClr val="FFFFFF"/>
+                </a:solidFill>
+                <a:latin typeface="Helvetica Neue"/>
                 <a:ea typeface="Hiragino Sans GB"/>
               </a:rPr>
-              <a:t>14 / 15</a:t>
-            </a:r>
-          </a:p>
-        </p:txBody>
-      </p:sp>
-      <p:sp>
-        <p:nvSpPr>
-          <p:cNvPr id="7" name="TextBox 6"/>
+              <a:t>1</a:t>
+            </a:r>
+          </a:p>
+        </p:txBody>
+      </p:sp>
+      <p:sp>
+        <p:nvSpPr>
+          <p:cNvPr id="9" name="TextBox 8"/>
           <p:cNvSpPr txBox="1"/>
           <p:nvPr/>
         </p:nvSpPr>
         <p:spPr>
           <a:xfrm>
-            <a:off x="566928" y="4777740"/>
-            <a:ext cx="5486400" cy="274320"/>
+            <a:off x="1335024" y="1502664"/>
+            <a:ext cx="4663440" cy="292608"/>
           </a:xfrm>
           <a:prstGeom prst="rect">
             <a:avLst/>
@@ -11852,27 +11772,118 @@
               </a:spcAft>
             </a:pPr>
             <a:r>
-              <a:rPr sz="800" b="0" i="0">
-                <a:solidFill>
-                  <a:srgbClr val="6F6656"/>
-                </a:solidFill>
-                <a:latin typeface="Menlo"/>
+              <a:rPr sz="1550" b="1" i="0">
+                <a:solidFill>
+                  <a:srgbClr val="1C1D22"/>
+                </a:solidFill>
+                <a:latin typeface="Helvetica Neue"/>
                 <a:ea typeface="Hiragino Sans GB"/>
               </a:rPr>
-              <a:t>ATTENTION IS ALL YOU NEED · PAPER DEEP-DIVE</a:t>
-            </a:r>
-          </a:p>
-        </p:txBody>
-      </p:sp>
-      <p:sp>
-        <p:nvSpPr>
-          <p:cNvPr id="8" name="Rounded Rectangle 7"/>
+              <a:t>Attention only</a:t>
+            </a:r>
+          </a:p>
+        </p:txBody>
+      </p:sp>
+      <p:sp>
+        <p:nvSpPr>
+          <p:cNvPr id="10" name="TextBox 9"/>
+          <p:cNvSpPr txBox="1"/>
+          <p:nvPr/>
+        </p:nvSpPr>
+        <p:spPr>
+          <a:xfrm>
+            <a:off x="1335024" y="1795272"/>
+            <a:ext cx="4663440" cy="274320"/>
+          </a:xfrm>
+          <a:prstGeom prst="rect">
+            <a:avLst/>
+          </a:prstGeom>
+          <a:noFill/>
+          <a:ln/>
+        </p:spPr>
+        <p:txBody>
+          <a:bodyPr wrap="square" anchor="t" lIns="25400" rIns="25400" tIns="25400" bIns="25400">
+            <a:spAutoFit/>
+          </a:bodyPr>
+          <a:lstStyle/>
+          <a:p>
+            <a:pPr algn="l">
+              <a:lnSpc>
+                <a:spcPct val="100000"/>
+              </a:lnSpc>
+              <a:spcBef>
+                <a:spcPts val="0"/>
+              </a:spcBef>
+              <a:spcAft>
+                <a:spcPts val="0"/>
+              </a:spcAft>
+            </a:pPr>
+            <a:r>
+              <a:rPr sz="1150" b="0" i="0">
+                <a:solidFill>
+                  <a:srgbClr val="5A5E68"/>
+                </a:solidFill>
+                <a:latin typeface="Helvetica Neue"/>
+                <a:ea typeface="Hiragino Sans GB"/>
+              </a:rPr>
+              <a:t>No recurrence or convolution; attention does it all.</a:t>
+            </a:r>
+          </a:p>
+        </p:txBody>
+      </p:sp>
+      <p:sp>
+        <p:nvSpPr>
+          <p:cNvPr id="11" name="Rectangle 10"/>
           <p:cNvSpPr/>
           <p:nvPr/>
         </p:nvSpPr>
         <p:spPr>
           <a:xfrm>
-            <a:off x="777240" y="1530096"/>
+            <a:off x="978408" y="1932432"/>
+            <a:ext cx="12801" cy="201168"/>
+          </a:xfrm>
+          <a:prstGeom prst="rect">
+            <a:avLst/>
+          </a:prstGeom>
+          <a:solidFill>
+            <a:srgbClr val="DCAA99"/>
+          </a:solidFill>
+          <a:ln>
+            <a:noFill/>
+          </a:ln>
+          <a:effectLst/>
+        </p:spPr>
+        <p:style>
+          <a:lnRef idx="1">
+            <a:schemeClr val="accent1"/>
+          </a:lnRef>
+          <a:fillRef idx="3">
+            <a:schemeClr val="accent1"/>
+          </a:fillRef>
+          <a:effectRef idx="2">
+            <a:schemeClr val="accent1"/>
+          </a:effectRef>
+          <a:fontRef idx="minor">
+            <a:schemeClr val="lt1"/>
+          </a:fontRef>
+        </p:style>
+        <p:txBody>
+          <a:bodyPr rtlCol="0" anchor="ctr"/>
+          <a:lstStyle/>
+          <a:p>
+            <a:pPr algn="ctr"/>
+          </a:p>
+        </p:txBody>
+      </p:sp>
+      <p:sp>
+        <p:nvSpPr>
+          <p:cNvPr id="12" name="Rounded Rectangle 11"/>
+          <p:cNvSpPr/>
+          <p:nvPr/>
+        </p:nvSpPr>
+        <p:spPr>
+          <a:xfrm>
+            <a:off x="777240" y="2133600"/>
             <a:ext cx="402336" cy="402336"/>
           </a:xfrm>
           <a:prstGeom prst="roundRect">
@@ -11912,13 +11923,13 @@
       </p:sp>
       <p:sp>
         <p:nvSpPr>
-          <p:cNvPr id="9" name="TextBox 8"/>
+          <p:cNvPr id="13" name="TextBox 12"/>
           <p:cNvSpPr txBox="1"/>
           <p:nvPr/>
         </p:nvSpPr>
         <p:spPr>
           <a:xfrm>
-            <a:off x="777240" y="1530096"/>
+            <a:off x="777240" y="2133600"/>
             <a:ext cx="402336" cy="420624"/>
           </a:xfrm>
           <a:prstGeom prst="rect">
@@ -11952,20 +11963,20 @@
                 <a:latin typeface="Helvetica Neue"/>
                 <a:ea typeface="Hiragino Sans GB"/>
               </a:rPr>
-              <a:t>1</a:t>
-            </a:r>
-          </a:p>
-        </p:txBody>
-      </p:sp>
-      <p:sp>
-        <p:nvSpPr>
-          <p:cNvPr id="10" name="TextBox 9"/>
+              <a:t>2</a:t>
+            </a:r>
+          </a:p>
+        </p:txBody>
+      </p:sp>
+      <p:sp>
+        <p:nvSpPr>
+          <p:cNvPr id="14" name="TextBox 13"/>
           <p:cNvSpPr txBox="1"/>
           <p:nvPr/>
         </p:nvSpPr>
         <p:spPr>
           <a:xfrm>
-            <a:off x="1335024" y="1502664"/>
+            <a:off x="1335024" y="2106168"/>
             <a:ext cx="4663440" cy="292608"/>
           </a:xfrm>
           <a:prstGeom prst="rect">
@@ -11999,20 +12010,20 @@
                 <a:latin typeface="Helvetica Neue"/>
                 <a:ea typeface="Hiragino Sans GB"/>
               </a:rPr>
-              <a:t>Attention only</a:t>
-            </a:r>
-          </a:p>
-        </p:txBody>
-      </p:sp>
-      <p:sp>
-        <p:nvSpPr>
-          <p:cNvPr id="11" name="TextBox 10"/>
+              <a:t>Scaled dot-product at the core</a:t>
+            </a:r>
+          </a:p>
+        </p:txBody>
+      </p:sp>
+      <p:sp>
+        <p:nvSpPr>
+          <p:cNvPr id="15" name="TextBox 14"/>
           <p:cNvSpPr txBox="1"/>
           <p:nvPr/>
         </p:nvSpPr>
         <p:spPr>
           <a:xfrm>
-            <a:off x="1335024" y="1795272"/>
+            <a:off x="1335024" y="2398776"/>
             <a:ext cx="4663440" cy="274320"/>
           </a:xfrm>
           <a:prstGeom prst="rect">
@@ -12046,20 +12057,20 @@
                 <a:latin typeface="Helvetica Neue"/>
                 <a:ea typeface="Hiragino Sans GB"/>
               </a:rPr>
-              <a:t>No recurrence or convolution; attention does it all.</a:t>
-            </a:r>
-          </a:p>
-        </p:txBody>
-      </p:sp>
-      <p:sp>
-        <p:nvSpPr>
-          <p:cNvPr id="12" name="Rectangle 11"/>
+              <a:t>softmax(QKᵀ/√dₖ)·V — weight the values by similarity.</a:t>
+            </a:r>
+          </a:p>
+        </p:txBody>
+      </p:sp>
+      <p:sp>
+        <p:nvSpPr>
+          <p:cNvPr id="16" name="Rectangle 15"/>
           <p:cNvSpPr/>
           <p:nvPr/>
         </p:nvSpPr>
         <p:spPr>
           <a:xfrm>
-            <a:off x="978408" y="1932432"/>
+            <a:off x="978408" y="2535936"/>
             <a:ext cx="12801" cy="201168"/>
           </a:xfrm>
           <a:prstGeom prst="rect">
@@ -12097,13 +12108,13 @@
       </p:sp>
       <p:sp>
         <p:nvSpPr>
-          <p:cNvPr id="13" name="Rounded Rectangle 12"/>
+          <p:cNvPr id="17" name="Rounded Rectangle 16"/>
           <p:cNvSpPr/>
           <p:nvPr/>
         </p:nvSpPr>
         <p:spPr>
           <a:xfrm>
-            <a:off x="777240" y="2133600"/>
+            <a:off x="777240" y="2737104"/>
             <a:ext cx="402336" cy="402336"/>
           </a:xfrm>
           <a:prstGeom prst="roundRect">
@@ -12143,13 +12154,13 @@
       </p:sp>
       <p:sp>
         <p:nvSpPr>
-          <p:cNvPr id="14" name="TextBox 13"/>
+          <p:cNvPr id="18" name="TextBox 17"/>
           <p:cNvSpPr txBox="1"/>
           <p:nvPr/>
         </p:nvSpPr>
         <p:spPr>
           <a:xfrm>
-            <a:off x="777240" y="2133600"/>
+            <a:off x="777240" y="2737104"/>
             <a:ext cx="402336" cy="420624"/>
           </a:xfrm>
           <a:prstGeom prst="rect">
@@ -12183,20 +12194,20 @@
                 <a:latin typeface="Helvetica Neue"/>
                 <a:ea typeface="Hiragino Sans GB"/>
               </a:rPr>
-              <a:t>2</a:t>
-            </a:r>
-          </a:p>
-        </p:txBody>
-      </p:sp>
-      <p:sp>
-        <p:nvSpPr>
-          <p:cNvPr id="15" name="TextBox 14"/>
+              <a:t>3</a:t>
+            </a:r>
+          </a:p>
+        </p:txBody>
+      </p:sp>
+      <p:sp>
+        <p:nvSpPr>
+          <p:cNvPr id="19" name="TextBox 18"/>
           <p:cNvSpPr txBox="1"/>
           <p:nvPr/>
         </p:nvSpPr>
         <p:spPr>
           <a:xfrm>
-            <a:off x="1335024" y="2106168"/>
+            <a:off x="1335024" y="2709672"/>
             <a:ext cx="4663440" cy="292608"/>
           </a:xfrm>
           <a:prstGeom prst="rect">
@@ -12230,20 +12241,20 @@
                 <a:latin typeface="Helvetica Neue"/>
                 <a:ea typeface="Hiragino Sans GB"/>
               </a:rPr>
-              <a:t>Scaled dot-product at the core</a:t>
-            </a:r>
-          </a:p>
-        </p:txBody>
-      </p:sp>
-      <p:sp>
-        <p:nvSpPr>
-          <p:cNvPr id="16" name="TextBox 15"/>
+              <a:t>Multi-head + positional encoding</a:t>
+            </a:r>
+          </a:p>
+        </p:txBody>
+      </p:sp>
+      <p:sp>
+        <p:nvSpPr>
+          <p:cNvPr id="20" name="TextBox 19"/>
           <p:cNvSpPr txBox="1"/>
           <p:nvPr/>
         </p:nvSpPr>
         <p:spPr>
           <a:xfrm>
-            <a:off x="1335024" y="2398776"/>
+            <a:off x="1335024" y="3002280"/>
             <a:ext cx="4663440" cy="274320"/>
           </a:xfrm>
           <a:prstGeom prst="rect">
@@ -12277,20 +12288,20 @@
                 <a:latin typeface="Helvetica Neue"/>
                 <a:ea typeface="Hiragino Sans GB"/>
               </a:rPr>
-              <a:t>softmax(QKᵀ/√dₖ)·V — weight the values by similarity.</a:t>
-            </a:r>
-          </a:p>
-        </p:txBody>
-      </p:sp>
-      <p:sp>
-        <p:nvSpPr>
-          <p:cNvPr id="17" name="Rectangle 16"/>
+              <a:t>8 heads for different relations; sinusoids add order back.</a:t>
+            </a:r>
+          </a:p>
+        </p:txBody>
+      </p:sp>
+      <p:sp>
+        <p:nvSpPr>
+          <p:cNvPr id="21" name="Rectangle 20"/>
           <p:cNvSpPr/>
           <p:nvPr/>
         </p:nvSpPr>
         <p:spPr>
           <a:xfrm>
-            <a:off x="978408" y="2535936"/>
+            <a:off x="978408" y="3139440"/>
             <a:ext cx="12801" cy="201168"/>
           </a:xfrm>
           <a:prstGeom prst="rect">
@@ -12328,13 +12339,13 @@
       </p:sp>
       <p:sp>
         <p:nvSpPr>
-          <p:cNvPr id="18" name="Rounded Rectangle 17"/>
+          <p:cNvPr id="22" name="Rounded Rectangle 21"/>
           <p:cNvSpPr/>
           <p:nvPr/>
         </p:nvSpPr>
         <p:spPr>
           <a:xfrm>
-            <a:off x="777240" y="2737104"/>
+            <a:off x="777240" y="3340608"/>
             <a:ext cx="402336" cy="402336"/>
           </a:xfrm>
           <a:prstGeom prst="roundRect">
@@ -12374,13 +12385,13 @@
       </p:sp>
       <p:sp>
         <p:nvSpPr>
-          <p:cNvPr id="19" name="TextBox 18"/>
+          <p:cNvPr id="23" name="TextBox 22"/>
           <p:cNvSpPr txBox="1"/>
           <p:nvPr/>
         </p:nvSpPr>
         <p:spPr>
           <a:xfrm>
-            <a:off x="777240" y="2737104"/>
+            <a:off x="777240" y="3340608"/>
             <a:ext cx="402336" cy="420624"/>
           </a:xfrm>
           <a:prstGeom prst="rect">
@@ -12414,20 +12425,20 @@
                 <a:latin typeface="Helvetica Neue"/>
                 <a:ea typeface="Hiragino Sans GB"/>
               </a:rPr>
-              <a:t>3</a:t>
-            </a:r>
-          </a:p>
-        </p:txBody>
-      </p:sp>
-      <p:sp>
-        <p:nvSpPr>
-          <p:cNvPr id="20" name="TextBox 19"/>
+              <a:t>4</a:t>
+            </a:r>
+          </a:p>
+        </p:txBody>
+      </p:sp>
+      <p:sp>
+        <p:nvSpPr>
+          <p:cNvPr id="24" name="TextBox 23"/>
           <p:cNvSpPr txBox="1"/>
           <p:nvPr/>
         </p:nvSpPr>
         <p:spPr>
           <a:xfrm>
-            <a:off x="1335024" y="2709672"/>
+            <a:off x="1335024" y="3313176"/>
             <a:ext cx="4663440" cy="292608"/>
           </a:xfrm>
           <a:prstGeom prst="rect">
@@ -12461,20 +12472,20 @@
                 <a:latin typeface="Helvetica Neue"/>
                 <a:ea typeface="Hiragino Sans GB"/>
               </a:rPr>
-              <a:t>Multi-head + positional encoding</a:t>
-            </a:r>
-          </a:p>
-        </p:txBody>
-      </p:sp>
-      <p:sp>
-        <p:nvSpPr>
-          <p:cNvPr id="21" name="TextBox 20"/>
+              <a:t>Parallel, short paths</a:t>
+            </a:r>
+          </a:p>
+        </p:txBody>
+      </p:sp>
+      <p:sp>
+        <p:nvSpPr>
+          <p:cNvPr id="25" name="TextBox 24"/>
           <p:cNvSpPr txBox="1"/>
           <p:nvPr/>
         </p:nvSpPr>
         <p:spPr>
           <a:xfrm>
-            <a:off x="1335024" y="3002280"/>
+            <a:off x="1335024" y="3605784"/>
             <a:ext cx="4663440" cy="274320"/>
           </a:xfrm>
           <a:prstGeom prst="rect">
@@ -12508,20 +12519,20 @@
                 <a:latin typeface="Helvetica Neue"/>
                 <a:ea typeface="Hiragino Sans GB"/>
               </a:rPr>
-              <a:t>8 heads for different relations; sinusoids add order back.</a:t>
-            </a:r>
-          </a:p>
-        </p:txBody>
-      </p:sp>
-      <p:sp>
-        <p:nvSpPr>
-          <p:cNvPr id="22" name="Rectangle 21"/>
+              <a:t>O(1) sequential ops, any two positions one hop — fast and stable.</a:t>
+            </a:r>
+          </a:p>
+        </p:txBody>
+      </p:sp>
+      <p:sp>
+        <p:nvSpPr>
+          <p:cNvPr id="26" name="Rectangle 25"/>
           <p:cNvSpPr/>
           <p:nvPr/>
         </p:nvSpPr>
         <p:spPr>
           <a:xfrm>
-            <a:off x="978408" y="3139440"/>
+            <a:off x="978408" y="3742944"/>
             <a:ext cx="12801" cy="201168"/>
           </a:xfrm>
           <a:prstGeom prst="rect">
@@ -12559,13 +12570,13 @@
       </p:sp>
       <p:sp>
         <p:nvSpPr>
-          <p:cNvPr id="23" name="Rounded Rectangle 22"/>
+          <p:cNvPr id="27" name="Rounded Rectangle 26"/>
           <p:cNvSpPr/>
           <p:nvPr/>
         </p:nvSpPr>
         <p:spPr>
           <a:xfrm>
-            <a:off x="777240" y="3340608"/>
+            <a:off x="777240" y="3944112"/>
             <a:ext cx="402336" cy="402336"/>
           </a:xfrm>
           <a:prstGeom prst="roundRect">
@@ -12605,13 +12616,13 @@
       </p:sp>
       <p:sp>
         <p:nvSpPr>
-          <p:cNvPr id="24" name="TextBox 23"/>
+          <p:cNvPr id="28" name="TextBox 27"/>
           <p:cNvSpPr txBox="1"/>
           <p:nvPr/>
         </p:nvSpPr>
         <p:spPr>
           <a:xfrm>
-            <a:off x="777240" y="3340608"/>
+            <a:off x="777240" y="3944112"/>
             <a:ext cx="402336" cy="420624"/>
           </a:xfrm>
           <a:prstGeom prst="rect">
@@ -12645,20 +12656,20 @@
                 <a:latin typeface="Helvetica Neue"/>
                 <a:ea typeface="Hiragino Sans GB"/>
               </a:rPr>
-              <a:t>4</a:t>
-            </a:r>
-          </a:p>
-        </p:txBody>
-      </p:sp>
-      <p:sp>
-        <p:nvSpPr>
-          <p:cNvPr id="25" name="TextBox 24"/>
+              <a:t>5</a:t>
+            </a:r>
+          </a:p>
+        </p:txBody>
+      </p:sp>
+      <p:sp>
+        <p:nvSpPr>
+          <p:cNvPr id="29" name="TextBox 28"/>
           <p:cNvSpPr txBox="1"/>
           <p:nvPr/>
         </p:nvSpPr>
         <p:spPr>
           <a:xfrm>
-            <a:off x="1335024" y="3313176"/>
+            <a:off x="1335024" y="3916680"/>
             <a:ext cx="4663440" cy="292608"/>
           </a:xfrm>
           <a:prstGeom prst="rect">
@@ -12692,20 +12703,20 @@
                 <a:latin typeface="Helvetica Neue"/>
                 <a:ea typeface="Hiragino Sans GB"/>
               </a:rPr>
-              <a:t>Parallel, short paths</a:t>
-            </a:r>
-          </a:p>
-        </p:txBody>
-      </p:sp>
-      <p:sp>
-        <p:nvSpPr>
-          <p:cNvPr id="26" name="TextBox 25"/>
+              <a:t>Bedrock of large models</a:t>
+            </a:r>
+          </a:p>
+        </p:txBody>
+      </p:sp>
+      <p:sp>
+        <p:nvSpPr>
+          <p:cNvPr id="30" name="TextBox 29"/>
           <p:cNvSpPr txBox="1"/>
           <p:nvPr/>
         </p:nvSpPr>
         <p:spPr>
           <a:xfrm>
-            <a:off x="1335024" y="3605784"/>
+            <a:off x="1335024" y="4209288"/>
             <a:ext cx="4663440" cy="274320"/>
           </a:xfrm>
           <a:prstGeom prst="rect">
@@ -12739,27 +12750,29 @@
                 <a:latin typeface="Helvetica Neue"/>
                 <a:ea typeface="Hiragino Sans GB"/>
               </a:rPr>
-              <a:t>O(1) sequential ops, any two positions one hop — fast and stable.</a:t>
-            </a:r>
-          </a:p>
-        </p:txBody>
-      </p:sp>
-      <p:sp>
-        <p:nvSpPr>
-          <p:cNvPr id="27" name="Rectangle 26"/>
+              <a:t>28.4 En–De / 41.8 En–Fr BLEU — the backbone of all that followed.</a:t>
+            </a:r>
+          </a:p>
+        </p:txBody>
+      </p:sp>
+      <p:sp>
+        <p:nvSpPr>
+          <p:cNvPr id="31" name="Rounded Rectangle 30"/>
           <p:cNvSpPr/>
           <p:nvPr/>
         </p:nvSpPr>
         <p:spPr>
           <a:xfrm>
-            <a:off x="978408" y="3742944"/>
-            <a:ext cx="12801" cy="201168"/>
-          </a:xfrm>
-          <a:prstGeom prst="rect">
-            <a:avLst/>
+            <a:off x="6309360" y="1511808"/>
+            <a:ext cx="2286000" cy="2889504"/>
+          </a:xfrm>
+          <a:prstGeom prst="roundRect">
+            <a:avLst>
+              <a:gd name="adj" fmla="val 4800"/>
+            </a:avLst>
           </a:prstGeom>
           <a:solidFill>
-            <a:srgbClr val="DCAA99"/>
+            <a:srgbClr val="EEDFD5"/>
           </a:solidFill>
           <a:ln>
             <a:noFill/>
@@ -12790,19 +12803,17 @@
       </p:sp>
       <p:sp>
         <p:nvSpPr>
-          <p:cNvPr id="28" name="Rounded Rectangle 27"/>
+          <p:cNvPr id="32" name="Rectangle 31"/>
           <p:cNvSpPr/>
           <p:nvPr/>
         </p:nvSpPr>
         <p:spPr>
           <a:xfrm>
-            <a:off x="777240" y="3944112"/>
-            <a:ext cx="402336" cy="402336"/>
-          </a:xfrm>
-          <a:prstGeom prst="roundRect">
-            <a:avLst>
-              <a:gd name="adj" fmla="val 50000"/>
-            </a:avLst>
+            <a:off x="6309360" y="1658112"/>
+            <a:ext cx="64008" cy="2596896"/>
+          </a:xfrm>
+          <a:prstGeom prst="rect">
+            <a:avLst/>
           </a:prstGeom>
           <a:solidFill>
             <a:srgbClr val="B84020"/>
@@ -12836,61 +12847,14 @@
       </p:sp>
       <p:sp>
         <p:nvSpPr>
-          <p:cNvPr id="29" name="TextBox 28"/>
+          <p:cNvPr id="33" name="TextBox 32"/>
           <p:cNvSpPr txBox="1"/>
           <p:nvPr/>
         </p:nvSpPr>
         <p:spPr>
           <a:xfrm>
-            <a:off x="777240" y="3944112"/>
-            <a:ext cx="402336" cy="420624"/>
-          </a:xfrm>
-          <a:prstGeom prst="rect">
-            <a:avLst/>
-          </a:prstGeom>
-          <a:noFill/>
-          <a:ln/>
-        </p:spPr>
-        <p:txBody>
-          <a:bodyPr wrap="square" anchor="ctr" lIns="25400" rIns="25400" tIns="25400" bIns="25400">
-            <a:spAutoFit/>
-          </a:bodyPr>
-          <a:lstStyle/>
-          <a:p>
-            <a:pPr algn="ctr">
-              <a:lnSpc>
-                <a:spcPct val="100000"/>
-              </a:lnSpc>
-              <a:spcBef>
-                <a:spcPts val="0"/>
-              </a:spcBef>
-              <a:spcAft>
-                <a:spcPts val="0"/>
-              </a:spcAft>
-            </a:pPr>
-            <a:r>
-              <a:rPr sz="1600" b="1" i="0">
-                <a:solidFill>
-                  <a:srgbClr val="FFFFFF"/>
-                </a:solidFill>
-                <a:latin typeface="Helvetica Neue"/>
-                <a:ea typeface="Hiragino Sans GB"/>
-              </a:rPr>
-              <a:t>5</a:t>
-            </a:r>
-          </a:p>
-        </p:txBody>
-      </p:sp>
-      <p:sp>
-        <p:nvSpPr>
-          <p:cNvPr id="30" name="TextBox 29"/>
-          <p:cNvSpPr txBox="1"/>
-          <p:nvPr/>
-        </p:nvSpPr>
-        <p:spPr>
-          <a:xfrm>
-            <a:off x="1335024" y="3916680"/>
-            <a:ext cx="4663440" cy="292608"/>
+            <a:off x="6565392" y="1786128"/>
+            <a:ext cx="5486400" cy="274320"/>
           </a:xfrm>
           <a:prstGeom prst="rect">
             <a:avLst/>
@@ -12916,190 +12880,6 @@
               </a:spcAft>
             </a:pPr>
             <a:r>
-              <a:rPr sz="1550" b="1" i="0">
-                <a:solidFill>
-                  <a:srgbClr val="1C1D22"/>
-                </a:solidFill>
-                <a:latin typeface="Helvetica Neue"/>
-                <a:ea typeface="Hiragino Sans GB"/>
-              </a:rPr>
-              <a:t>Bedrock of large models</a:t>
-            </a:r>
-          </a:p>
-        </p:txBody>
-      </p:sp>
-      <p:sp>
-        <p:nvSpPr>
-          <p:cNvPr id="31" name="TextBox 30"/>
-          <p:cNvSpPr txBox="1"/>
-          <p:nvPr/>
-        </p:nvSpPr>
-        <p:spPr>
-          <a:xfrm>
-            <a:off x="1335024" y="4209288"/>
-            <a:ext cx="4663440" cy="274320"/>
-          </a:xfrm>
-          <a:prstGeom prst="rect">
-            <a:avLst/>
-          </a:prstGeom>
-          <a:noFill/>
-          <a:ln/>
-        </p:spPr>
-        <p:txBody>
-          <a:bodyPr wrap="square" anchor="t" lIns="25400" rIns="25400" tIns="25400" bIns="25400">
-            <a:spAutoFit/>
-          </a:bodyPr>
-          <a:lstStyle/>
-          <a:p>
-            <a:pPr algn="l">
-              <a:lnSpc>
-                <a:spcPct val="100000"/>
-              </a:lnSpc>
-              <a:spcBef>
-                <a:spcPts val="0"/>
-              </a:spcBef>
-              <a:spcAft>
-                <a:spcPts val="0"/>
-              </a:spcAft>
-            </a:pPr>
-            <a:r>
-              <a:rPr sz="1150" b="0" i="0">
-                <a:solidFill>
-                  <a:srgbClr val="5A5E68"/>
-                </a:solidFill>
-                <a:latin typeface="Helvetica Neue"/>
-                <a:ea typeface="Hiragino Sans GB"/>
-              </a:rPr>
-              <a:t>28.4 En–De / 41.8 En–Fr BLEU — the backbone of all that followed.</a:t>
-            </a:r>
-          </a:p>
-        </p:txBody>
-      </p:sp>
-      <p:sp>
-        <p:nvSpPr>
-          <p:cNvPr id="32" name="Rounded Rectangle 31"/>
-          <p:cNvSpPr/>
-          <p:nvPr/>
-        </p:nvSpPr>
-        <p:spPr>
-          <a:xfrm>
-            <a:off x="6309360" y="1511808"/>
-            <a:ext cx="2286000" cy="2889504"/>
-          </a:xfrm>
-          <a:prstGeom prst="roundRect">
-            <a:avLst>
-              <a:gd name="adj" fmla="val 4800"/>
-            </a:avLst>
-          </a:prstGeom>
-          <a:solidFill>
-            <a:srgbClr val="EEDFD5"/>
-          </a:solidFill>
-          <a:ln>
-            <a:noFill/>
-          </a:ln>
-          <a:effectLst/>
-        </p:spPr>
-        <p:style>
-          <a:lnRef idx="1">
-            <a:schemeClr val="accent1"/>
-          </a:lnRef>
-          <a:fillRef idx="3">
-            <a:schemeClr val="accent1"/>
-          </a:fillRef>
-          <a:effectRef idx="2">
-            <a:schemeClr val="accent1"/>
-          </a:effectRef>
-          <a:fontRef idx="minor">
-            <a:schemeClr val="lt1"/>
-          </a:fontRef>
-        </p:style>
-        <p:txBody>
-          <a:bodyPr rtlCol="0" anchor="ctr"/>
-          <a:lstStyle/>
-          <a:p>
-            <a:pPr algn="ctr"/>
-          </a:p>
-        </p:txBody>
-      </p:sp>
-      <p:sp>
-        <p:nvSpPr>
-          <p:cNvPr id="33" name="Rectangle 32"/>
-          <p:cNvSpPr/>
-          <p:nvPr/>
-        </p:nvSpPr>
-        <p:spPr>
-          <a:xfrm>
-            <a:off x="6309360" y="1658112"/>
-            <a:ext cx="64008" cy="2596896"/>
-          </a:xfrm>
-          <a:prstGeom prst="rect">
-            <a:avLst/>
-          </a:prstGeom>
-          <a:solidFill>
-            <a:srgbClr val="B84020"/>
-          </a:solidFill>
-          <a:ln>
-            <a:noFill/>
-          </a:ln>
-          <a:effectLst/>
-        </p:spPr>
-        <p:style>
-          <a:lnRef idx="1">
-            <a:schemeClr val="accent1"/>
-          </a:lnRef>
-          <a:fillRef idx="3">
-            <a:schemeClr val="accent1"/>
-          </a:fillRef>
-          <a:effectRef idx="2">
-            <a:schemeClr val="accent1"/>
-          </a:effectRef>
-          <a:fontRef idx="minor">
-            <a:schemeClr val="lt1"/>
-          </a:fontRef>
-        </p:style>
-        <p:txBody>
-          <a:bodyPr rtlCol="0" anchor="ctr"/>
-          <a:lstStyle/>
-          <a:p>
-            <a:pPr algn="ctr"/>
-          </a:p>
-        </p:txBody>
-      </p:sp>
-      <p:sp>
-        <p:nvSpPr>
-          <p:cNvPr id="34" name="TextBox 33"/>
-          <p:cNvSpPr txBox="1"/>
-          <p:nvPr/>
-        </p:nvSpPr>
-        <p:spPr>
-          <a:xfrm>
-            <a:off x="6565392" y="1786128"/>
-            <a:ext cx="5486400" cy="274320"/>
-          </a:xfrm>
-          <a:prstGeom prst="rect">
-            <a:avLst/>
-          </a:prstGeom>
-          <a:noFill/>
-          <a:ln/>
-        </p:spPr>
-        <p:txBody>
-          <a:bodyPr wrap="square" anchor="t" lIns="25400" rIns="25400" tIns="25400" bIns="25400">
-            <a:spAutoFit/>
-          </a:bodyPr>
-          <a:lstStyle/>
-          <a:p>
-            <a:pPr algn="l">
-              <a:lnSpc>
-                <a:spcPct val="100000"/>
-              </a:lnSpc>
-              <a:spcBef>
-                <a:spcPts val="0"/>
-              </a:spcBef>
-              <a:spcAft>
-                <a:spcPts val="0"/>
-              </a:spcAft>
-            </a:pPr>
-            <a:r>
               <a:rPr sz="1100" b="1" i="0" spc="150">
                 <a:solidFill>
                   <a:srgbClr val="B84020"/>
@@ -13114,7 +12894,7 @@
       </p:sp>
       <p:sp>
         <p:nvSpPr>
-          <p:cNvPr id="35" name="TextBox 34"/>
+          <p:cNvPr id="34" name="TextBox 33"/>
           <p:cNvSpPr txBox="1"/>
           <p:nvPr/>
         </p:nvSpPr>
@@ -13207,14 +12987,50 @@
       </p:sp>
       <p:cxnSp>
         <p:nvCxnSpPr>
+          <p:cNvPr id="35" name="Connector 34"/>
+          <p:cNvCxnSpPr/>
+          <p:nvPr/>
+        </p:nvCxnSpPr>
+        <p:spPr>
+          <a:xfrm>
+            <a:off x="6583680" y="3532632"/>
+            <a:ext cx="731520" cy="502920"/>
+          </a:xfrm>
+          <a:prstGeom prst="line">
+            <a:avLst/>
+          </a:prstGeom>
+          <a:ln w="11430">
+            <a:solidFill>
+              <a:srgbClr val="E7CCC0"/>
+            </a:solidFill>
+          </a:ln>
+          <a:effectLst/>
+        </p:spPr>
+        <p:style>
+          <a:lnRef idx="2">
+            <a:schemeClr val="accent1"/>
+          </a:lnRef>
+          <a:fillRef idx="0">
+            <a:schemeClr val="accent1"/>
+          </a:fillRef>
+          <a:effectRef idx="1">
+            <a:schemeClr val="accent1"/>
+          </a:effectRef>
+          <a:fontRef idx="minor">
+            <a:schemeClr val="tx1"/>
+          </a:fontRef>
+        </p:style>
+      </p:cxnSp>
+      <p:cxnSp>
+        <p:nvCxnSpPr>
           <p:cNvPr id="36" name="Connector 35"/>
           <p:cNvCxnSpPr/>
           <p:nvPr/>
         </p:nvCxnSpPr>
         <p:spPr>
           <a:xfrm>
-            <a:off x="6583680" y="3532632"/>
-            <a:ext cx="731520" cy="502920"/>
+            <a:off x="6876288" y="3532632"/>
+            <a:ext cx="438912" cy="502920"/>
           </a:xfrm>
           <a:prstGeom prst="line">
             <a:avLst/>
@@ -13249,8 +13065,8 @@
         </p:nvCxnSpPr>
         <p:spPr>
           <a:xfrm>
-            <a:off x="6876288" y="3532632"/>
-            <a:ext cx="438912" cy="502920"/>
+            <a:off x="7168896" y="3532632"/>
+            <a:ext cx="146304" cy="502920"/>
           </a:xfrm>
           <a:prstGeom prst="line">
             <a:avLst/>
@@ -13284,8 +13100,8 @@
           <p:nvPr/>
         </p:nvCxnSpPr>
         <p:spPr>
-          <a:xfrm>
-            <a:off x="7168896" y="3532632"/>
+          <a:xfrm flipH="1">
+            <a:off x="7315200" y="3532632"/>
             <a:ext cx="146304" cy="502920"/>
           </a:xfrm>
           <a:prstGeom prst="line">
@@ -13322,7 +13138,7 @@
         <p:spPr>
           <a:xfrm flipH="1">
             <a:off x="7315200" y="3532632"/>
-            <a:ext cx="146304" cy="502920"/>
+            <a:ext cx="438912" cy="502920"/>
           </a:xfrm>
           <a:prstGeom prst="line">
             <a:avLst/>
@@ -13358,7 +13174,7 @@
         <p:spPr>
           <a:xfrm flipH="1">
             <a:off x="7315200" y="3532632"/>
-            <a:ext cx="438912" cy="502920"/>
+            <a:ext cx="731520" cy="502920"/>
           </a:xfrm>
           <a:prstGeom prst="line">
             <a:avLst/>
@@ -13385,45 +13201,9 @@
           </a:fontRef>
         </p:style>
       </p:cxnSp>
-      <p:cxnSp>
-        <p:nvCxnSpPr>
-          <p:cNvPr id="41" name="Connector 40"/>
-          <p:cNvCxnSpPr/>
-          <p:nvPr/>
-        </p:nvCxnSpPr>
-        <p:spPr>
-          <a:xfrm flipH="1">
-            <a:off x="7315200" y="3532632"/>
-            <a:ext cx="731520" cy="502920"/>
-          </a:xfrm>
-          <a:prstGeom prst="line">
-            <a:avLst/>
-          </a:prstGeom>
-          <a:ln w="11430">
-            <a:solidFill>
-              <a:srgbClr val="E7CCC0"/>
-            </a:solidFill>
-          </a:ln>
-          <a:effectLst/>
-        </p:spPr>
-        <p:style>
-          <a:lnRef idx="2">
-            <a:schemeClr val="accent1"/>
-          </a:lnRef>
-          <a:fillRef idx="0">
-            <a:schemeClr val="accent1"/>
-          </a:fillRef>
-          <a:effectRef idx="1">
-            <a:schemeClr val="accent1"/>
-          </a:effectRef>
-          <a:fontRef idx="minor">
-            <a:schemeClr val="tx1"/>
-          </a:fontRef>
-        </p:style>
-      </p:cxnSp>
-      <p:sp>
-        <p:nvSpPr>
-          <p:cNvPr id="42" name="Oval 41"/>
+      <p:sp>
+        <p:nvSpPr>
+          <p:cNvPr id="41" name="Oval 40"/>
           <p:cNvSpPr/>
           <p:nvPr/>
         </p:nvSpPr>
@@ -13467,7 +13247,7 @@
       </p:sp>
       <p:sp>
         <p:nvSpPr>
-          <p:cNvPr id="43" name="Oval 42"/>
+          <p:cNvPr id="42" name="Oval 41"/>
           <p:cNvSpPr/>
           <p:nvPr/>
         </p:nvSpPr>
@@ -13511,7 +13291,7 @@
       </p:sp>
       <p:sp>
         <p:nvSpPr>
-          <p:cNvPr id="44" name="Oval 43"/>
+          <p:cNvPr id="43" name="Oval 42"/>
           <p:cNvSpPr/>
           <p:nvPr/>
         </p:nvSpPr>
@@ -13555,7 +13335,7 @@
       </p:sp>
       <p:sp>
         <p:nvSpPr>
-          <p:cNvPr id="45" name="Oval 44"/>
+          <p:cNvPr id="44" name="Oval 43"/>
           <p:cNvSpPr/>
           <p:nvPr/>
         </p:nvSpPr>
@@ -13599,7 +13379,7 @@
       </p:sp>
       <p:sp>
         <p:nvSpPr>
-          <p:cNvPr id="46" name="Oval 45"/>
+          <p:cNvPr id="45" name="Oval 44"/>
           <p:cNvSpPr/>
           <p:nvPr/>
         </p:nvSpPr>
@@ -13643,7 +13423,7 @@
       </p:sp>
       <p:sp>
         <p:nvSpPr>
-          <p:cNvPr id="47" name="Oval 46"/>
+          <p:cNvPr id="46" name="Oval 45"/>
           <p:cNvSpPr/>
           <p:nvPr/>
         </p:nvSpPr>
@@ -13687,7 +13467,7 @@
       </p:sp>
       <p:sp>
         <p:nvSpPr>
-          <p:cNvPr id="48" name="Oval 47"/>
+          <p:cNvPr id="47" name="Oval 46"/>
           <p:cNvSpPr/>
           <p:nvPr/>
         </p:nvSpPr>
@@ -14832,51 +14612,7 @@
       </p:sp>
       <p:sp>
         <p:nvSpPr>
-          <p:cNvPr id="5" name="Rectangle 4"/>
-          <p:cNvSpPr/>
-          <p:nvPr/>
-        </p:nvSpPr>
-        <p:spPr>
-          <a:xfrm>
-            <a:off x="585216" y="1072896"/>
-            <a:ext cx="1097280" cy="45720"/>
-          </a:xfrm>
-          <a:prstGeom prst="rect">
-            <a:avLst/>
-          </a:prstGeom>
-          <a:solidFill>
-            <a:srgbClr val="B84020"/>
-          </a:solidFill>
-          <a:ln>
-            <a:noFill/>
-          </a:ln>
-          <a:effectLst/>
-        </p:spPr>
-        <p:style>
-          <a:lnRef idx="1">
-            <a:schemeClr val="accent1"/>
-          </a:lnRef>
-          <a:fillRef idx="3">
-            <a:schemeClr val="accent1"/>
-          </a:fillRef>
-          <a:effectRef idx="2">
-            <a:schemeClr val="accent1"/>
-          </a:effectRef>
-          <a:fontRef idx="minor">
-            <a:schemeClr val="lt1"/>
-          </a:fontRef>
-        </p:style>
-        <p:txBody>
-          <a:bodyPr rtlCol="0" anchor="ctr"/>
-          <a:lstStyle/>
-          <a:p>
-            <a:pPr algn="ctr"/>
-          </a:p>
-        </p:txBody>
-      </p:sp>
-      <p:sp>
-        <p:nvSpPr>
-          <p:cNvPr id="6" name="TextBox 5"/>
+          <p:cNvPr id="5" name="TextBox 4"/>
           <p:cNvSpPr txBox="1"/>
           <p:nvPr/>
         </p:nvSpPr>
@@ -14923,7 +14659,7 @@
       </p:sp>
       <p:sp>
         <p:nvSpPr>
-          <p:cNvPr id="7" name="TextBox 6"/>
+          <p:cNvPr id="6" name="TextBox 5"/>
           <p:cNvSpPr txBox="1"/>
           <p:nvPr/>
         </p:nvSpPr>
@@ -14970,7 +14706,7 @@
       </p:sp>
       <p:sp>
         <p:nvSpPr>
-          <p:cNvPr id="8" name="Rounded Rectangle 7"/>
+          <p:cNvPr id="7" name="Rounded Rectangle 6"/>
           <p:cNvSpPr/>
           <p:nvPr/>
         </p:nvSpPr>
@@ -15016,7 +14752,7 @@
       </p:sp>
       <p:sp>
         <p:nvSpPr>
-          <p:cNvPr id="9" name="TextBox 8"/>
+          <p:cNvPr id="8" name="TextBox 7"/>
           <p:cNvSpPr txBox="1"/>
           <p:nvPr/>
         </p:nvSpPr>
@@ -15086,7 +14822,7 @@
       </p:sp>
       <p:sp>
         <p:nvSpPr>
-          <p:cNvPr id="10" name="Rounded Rectangle 9"/>
+          <p:cNvPr id="9" name="Rounded Rectangle 8"/>
           <p:cNvSpPr/>
           <p:nvPr/>
         </p:nvSpPr>
@@ -15132,7 +14868,7 @@
       </p:sp>
       <p:sp>
         <p:nvSpPr>
-          <p:cNvPr id="11" name="TextBox 10"/>
+          <p:cNvPr id="10" name="TextBox 9"/>
           <p:cNvSpPr txBox="1"/>
           <p:nvPr/>
         </p:nvSpPr>
@@ -15202,7 +14938,7 @@
       </p:sp>
       <p:cxnSp>
         <p:nvCxnSpPr>
-          <p:cNvPr id="12" name="Connector 11"/>
+          <p:cNvPr id="11" name="Connector 10"/>
           <p:cNvCxnSpPr/>
           <p:nvPr/>
         </p:nvCxnSpPr>
@@ -15239,7 +14975,7 @@
       </p:cxnSp>
       <p:sp>
         <p:nvSpPr>
-          <p:cNvPr id="13" name="Rounded Rectangle 12"/>
+          <p:cNvPr id="12" name="Rounded Rectangle 11"/>
           <p:cNvSpPr/>
           <p:nvPr/>
         </p:nvSpPr>
@@ -15285,7 +15021,7 @@
       </p:sp>
       <p:sp>
         <p:nvSpPr>
-          <p:cNvPr id="14" name="TextBox 13"/>
+          <p:cNvPr id="13" name="TextBox 12"/>
           <p:cNvSpPr txBox="1"/>
           <p:nvPr/>
         </p:nvSpPr>
@@ -15355,7 +15091,7 @@
       </p:sp>
       <p:cxnSp>
         <p:nvCxnSpPr>
-          <p:cNvPr id="15" name="Connector 14"/>
+          <p:cNvPr id="14" name="Connector 13"/>
           <p:cNvCxnSpPr/>
           <p:nvPr/>
         </p:nvCxnSpPr>
@@ -15392,7 +15128,7 @@
       </p:cxnSp>
       <p:sp>
         <p:nvSpPr>
-          <p:cNvPr id="16" name="Rounded Rectangle 15"/>
+          <p:cNvPr id="15" name="Rounded Rectangle 14"/>
           <p:cNvSpPr/>
           <p:nvPr/>
         </p:nvSpPr>
@@ -15438,7 +15174,7 @@
       </p:sp>
       <p:sp>
         <p:nvSpPr>
-          <p:cNvPr id="17" name="TextBox 16"/>
+          <p:cNvPr id="16" name="TextBox 15"/>
           <p:cNvSpPr txBox="1"/>
           <p:nvPr/>
         </p:nvSpPr>
@@ -15508,7 +15244,7 @@
       </p:sp>
       <p:cxnSp>
         <p:nvCxnSpPr>
-          <p:cNvPr id="18" name="Connector 17"/>
+          <p:cNvPr id="17" name="Connector 16"/>
           <p:cNvCxnSpPr/>
           <p:nvPr/>
         </p:nvCxnSpPr>
@@ -15545,7 +15281,7 @@
       </p:cxnSp>
       <p:sp>
         <p:nvSpPr>
-          <p:cNvPr id="19" name="Rounded Rectangle 18"/>
+          <p:cNvPr id="18" name="Rounded Rectangle 17"/>
           <p:cNvSpPr/>
           <p:nvPr/>
         </p:nvSpPr>
@@ -15591,7 +15327,7 @@
       </p:sp>
       <p:sp>
         <p:nvSpPr>
-          <p:cNvPr id="20" name="TextBox 19"/>
+          <p:cNvPr id="19" name="TextBox 18"/>
           <p:cNvSpPr txBox="1"/>
           <p:nvPr/>
         </p:nvSpPr>
@@ -15661,7 +15397,7 @@
       </p:sp>
       <p:cxnSp>
         <p:nvCxnSpPr>
-          <p:cNvPr id="21" name="Connector 20"/>
+          <p:cNvPr id="20" name="Connector 19"/>
           <p:cNvCxnSpPr/>
           <p:nvPr/>
         </p:nvCxnSpPr>
@@ -15678,6 +15414,43 @@
               <a:srgbClr val="16656B"/>
             </a:solidFill>
             <a:tailEnd type="triangle" w="med" len="med"/>
+          </a:ln>
+          <a:effectLst/>
+        </p:spPr>
+        <p:style>
+          <a:lnRef idx="2">
+            <a:schemeClr val="accent1"/>
+          </a:lnRef>
+          <a:fillRef idx="0">
+            <a:schemeClr val="accent1"/>
+          </a:fillRef>
+          <a:effectRef idx="1">
+            <a:schemeClr val="accent1"/>
+          </a:effectRef>
+          <a:fontRef idx="minor">
+            <a:schemeClr val="tx1"/>
+          </a:fontRef>
+        </p:style>
+      </p:cxnSp>
+      <p:cxnSp>
+        <p:nvCxnSpPr>
+          <p:cNvPr id="21" name="Connector 20"/>
+          <p:cNvCxnSpPr/>
+          <p:nvPr/>
+        </p:nvCxnSpPr>
+        <p:spPr>
+          <a:xfrm flipV="1">
+            <a:off x="1472184" y="1475231"/>
+            <a:ext cx="0" cy="310896"/>
+          </a:xfrm>
+          <a:prstGeom prst="line">
+            <a:avLst/>
+          </a:prstGeom>
+          <a:ln w="19050">
+            <a:solidFill>
+              <a:srgbClr val="B84020"/>
+            </a:solidFill>
+            <a:prstDash val="dash"/>
           </a:ln>
           <a:effectLst/>
         </p:spPr>
@@ -15703,9 +15476,9 @@
           <p:nvPr/>
         </p:nvCxnSpPr>
         <p:spPr>
-          <a:xfrm flipV="1">
+          <a:xfrm>
             <a:off x="1472184" y="1475231"/>
-            <a:ext cx="0" cy="310896"/>
+            <a:ext cx="6364224" cy="0"/>
           </a:xfrm>
           <a:prstGeom prst="line">
             <a:avLst/>
@@ -15741,43 +15514,6 @@
         </p:nvCxnSpPr>
         <p:spPr>
           <a:xfrm>
-            <a:off x="1472184" y="1475231"/>
-            <a:ext cx="6364224" cy="0"/>
-          </a:xfrm>
-          <a:prstGeom prst="line">
-            <a:avLst/>
-          </a:prstGeom>
-          <a:ln w="19050">
-            <a:solidFill>
-              <a:srgbClr val="B84020"/>
-            </a:solidFill>
-            <a:prstDash val="dash"/>
-          </a:ln>
-          <a:effectLst/>
-        </p:spPr>
-        <p:style>
-          <a:lnRef idx="2">
-            <a:schemeClr val="accent1"/>
-          </a:lnRef>
-          <a:fillRef idx="0">
-            <a:schemeClr val="accent1"/>
-          </a:fillRef>
-          <a:effectRef idx="1">
-            <a:schemeClr val="accent1"/>
-          </a:effectRef>
-          <a:fontRef idx="minor">
-            <a:schemeClr val="tx1"/>
-          </a:fontRef>
-        </p:style>
-      </p:cxnSp>
-      <p:cxnSp>
-        <p:nvCxnSpPr>
-          <p:cNvPr id="24" name="Connector 23"/>
-          <p:cNvCxnSpPr/>
-          <p:nvPr/>
-        </p:nvCxnSpPr>
-        <p:spPr>
-          <a:xfrm>
             <a:off x="7836408" y="1475231"/>
             <a:ext cx="0" cy="310896"/>
           </a:xfrm>
@@ -15810,7 +15546,7 @@
       </p:cxnSp>
       <p:sp>
         <p:nvSpPr>
-          <p:cNvPr id="25" name="TextBox 24"/>
+          <p:cNvPr id="24" name="TextBox 23"/>
           <p:cNvSpPr txBox="1"/>
           <p:nvPr/>
         </p:nvSpPr>
@@ -15857,7 +15593,7 @@
       </p:sp>
       <p:sp>
         <p:nvSpPr>
-          <p:cNvPr id="26" name="TextBox 25"/>
+          <p:cNvPr id="25" name="TextBox 24"/>
           <p:cNvSpPr txBox="1"/>
           <p:nvPr/>
         </p:nvSpPr>
@@ -15904,7 +15640,7 @@
       </p:sp>
       <p:sp>
         <p:nvSpPr>
-          <p:cNvPr id="27" name="Rounded Rectangle 26"/>
+          <p:cNvPr id="26" name="Rounded Rectangle 25"/>
           <p:cNvSpPr/>
           <p:nvPr/>
         </p:nvSpPr>
@@ -15952,7 +15688,7 @@
       </p:sp>
       <p:sp>
         <p:nvSpPr>
-          <p:cNvPr id="28" name="Rounded Rectangle 27"/>
+          <p:cNvPr id="27" name="Rounded Rectangle 26"/>
           <p:cNvSpPr/>
           <p:nvPr/>
         </p:nvSpPr>
@@ -15998,7 +15734,7 @@
       </p:sp>
       <p:pic>
         <p:nvPicPr>
-          <p:cNvPr id="29" name="Picture 28" descr="ic_clock-bolt.png"/>
+          <p:cNvPr id="28" name="Picture 27" descr="ic_clock-bolt.png"/>
           <p:cNvPicPr>
             <a:picLocks noChangeAspect="1"/>
           </p:cNvPicPr>
@@ -16022,7 +15758,7 @@
       </p:pic>
       <p:sp>
         <p:nvSpPr>
-          <p:cNvPr id="30" name="TextBox 29"/>
+          <p:cNvPr id="29" name="TextBox 28"/>
           <p:cNvSpPr txBox="1"/>
           <p:nvPr/>
         </p:nvSpPr>
@@ -16069,7 +15805,7 @@
       </p:sp>
       <p:sp>
         <p:nvSpPr>
-          <p:cNvPr id="31" name="TextBox 30"/>
+          <p:cNvPr id="30" name="TextBox 29"/>
           <p:cNvSpPr txBox="1"/>
           <p:nvPr/>
         </p:nvSpPr>
@@ -16139,7 +15875,7 @@
       </p:sp>
       <p:sp>
         <p:nvSpPr>
-          <p:cNvPr id="32" name="Rounded Rectangle 31"/>
+          <p:cNvPr id="31" name="Rounded Rectangle 30"/>
           <p:cNvSpPr/>
           <p:nvPr/>
         </p:nvSpPr>
@@ -16187,7 +15923,7 @@
       </p:sp>
       <p:sp>
         <p:nvSpPr>
-          <p:cNvPr id="33" name="Rounded Rectangle 32"/>
+          <p:cNvPr id="32" name="Rounded Rectangle 31"/>
           <p:cNvSpPr/>
           <p:nvPr/>
         </p:nvSpPr>
@@ -16233,7 +15969,7 @@
       </p:sp>
       <p:pic>
         <p:nvPicPr>
-          <p:cNvPr id="34" name="Picture 33" descr="ic_route.png"/>
+          <p:cNvPr id="33" name="Picture 32" descr="ic_route.png"/>
           <p:cNvPicPr>
             <a:picLocks noChangeAspect="1"/>
           </p:cNvPicPr>
@@ -16257,7 +15993,7 @@
       </p:pic>
       <p:sp>
         <p:nvSpPr>
-          <p:cNvPr id="35" name="TextBox 34"/>
+          <p:cNvPr id="34" name="TextBox 33"/>
           <p:cNvSpPr txBox="1"/>
           <p:nvPr/>
         </p:nvSpPr>
@@ -16304,7 +16040,7 @@
       </p:sp>
       <p:sp>
         <p:nvSpPr>
-          <p:cNvPr id="36" name="TextBox 35"/>
+          <p:cNvPr id="35" name="TextBox 34"/>
           <p:cNvSpPr txBox="1"/>
           <p:nvPr/>
         </p:nvSpPr>
@@ -16374,7 +16110,7 @@
       </p:sp>
       <p:sp>
         <p:nvSpPr>
-          <p:cNvPr id="37" name="Rounded Rectangle 36"/>
+          <p:cNvPr id="36" name="Rounded Rectangle 35"/>
           <p:cNvSpPr/>
           <p:nvPr/>
         </p:nvSpPr>
@@ -16422,7 +16158,7 @@
       </p:sp>
       <p:sp>
         <p:nvSpPr>
-          <p:cNvPr id="38" name="Rounded Rectangle 37"/>
+          <p:cNvPr id="37" name="Rounded Rectangle 36"/>
           <p:cNvSpPr/>
           <p:nvPr/>
         </p:nvSpPr>
@@ -16468,7 +16204,7 @@
       </p:sp>
       <p:pic>
         <p:nvPicPr>
-          <p:cNvPr id="39" name="Picture 38" descr="ic_windmill.png"/>
+          <p:cNvPr id="38" name="Picture 37" descr="ic_windmill.png"/>
           <p:cNvPicPr>
             <a:picLocks noChangeAspect="1"/>
           </p:cNvPicPr>
@@ -16492,7 +16228,7 @@
       </p:pic>
       <p:sp>
         <p:nvSpPr>
-          <p:cNvPr id="40" name="TextBox 39"/>
+          <p:cNvPr id="39" name="TextBox 38"/>
           <p:cNvSpPr txBox="1"/>
           <p:nvPr/>
         </p:nvSpPr>
@@ -16539,7 +16275,7 @@
       </p:sp>
       <p:sp>
         <p:nvSpPr>
-          <p:cNvPr id="41" name="TextBox 40"/>
+          <p:cNvPr id="40" name="TextBox 39"/>
           <p:cNvSpPr txBox="1"/>
           <p:nvPr/>
         </p:nvSpPr>
@@ -18202,51 +17938,7 @@
       </p:sp>
       <p:sp>
         <p:nvSpPr>
-          <p:cNvPr id="5" name="Rectangle 4"/>
-          <p:cNvSpPr/>
-          <p:nvPr/>
-        </p:nvSpPr>
-        <p:spPr>
-          <a:xfrm>
-            <a:off x="585216" y="1072896"/>
-            <a:ext cx="1097280" cy="45720"/>
-          </a:xfrm>
-          <a:prstGeom prst="rect">
-            <a:avLst/>
-          </a:prstGeom>
-          <a:solidFill>
-            <a:srgbClr val="B84020"/>
-          </a:solidFill>
-          <a:ln>
-            <a:noFill/>
-          </a:ln>
-          <a:effectLst/>
-        </p:spPr>
-        <p:style>
-          <a:lnRef idx="1">
-            <a:schemeClr val="accent1"/>
-          </a:lnRef>
-          <a:fillRef idx="3">
-            <a:schemeClr val="accent1"/>
-          </a:fillRef>
-          <a:effectRef idx="2">
-            <a:schemeClr val="accent1"/>
-          </a:effectRef>
-          <a:fontRef idx="minor">
-            <a:schemeClr val="lt1"/>
-          </a:fontRef>
-        </p:style>
-        <p:txBody>
-          <a:bodyPr rtlCol="0" anchor="ctr"/>
-          <a:lstStyle/>
-          <a:p>
-            <a:pPr algn="ctr"/>
-          </a:p>
-        </p:txBody>
-      </p:sp>
-      <p:sp>
-        <p:nvSpPr>
-          <p:cNvPr id="6" name="TextBox 5"/>
+          <p:cNvPr id="5" name="TextBox 4"/>
           <p:cNvSpPr txBox="1"/>
           <p:nvPr/>
         </p:nvSpPr>
@@ -18293,7 +17985,7 @@
       </p:sp>
       <p:sp>
         <p:nvSpPr>
-          <p:cNvPr id="7" name="TextBox 6"/>
+          <p:cNvPr id="6" name="TextBox 5"/>
           <p:cNvSpPr txBox="1"/>
           <p:nvPr/>
         </p:nvSpPr>
@@ -18340,7 +18032,7 @@
       </p:sp>
       <p:graphicFrame>
         <p:nvGraphicFramePr>
-          <p:cNvPr id="8" name="Table 7"/>
+          <p:cNvPr id="7" name="Table 6"/>
           <p:cNvGraphicFramePr>
             <a:graphicFrameLocks noGrp="1"/>
           </p:cNvGraphicFramePr>
@@ -18796,7 +18488,7 @@
       </p:graphicFrame>
       <p:sp>
         <p:nvSpPr>
-          <p:cNvPr id="9" name="TextBox 8"/>
+          <p:cNvPr id="8" name="TextBox 7"/>
           <p:cNvSpPr txBox="1"/>
           <p:nvPr/>
         </p:nvSpPr>
@@ -18843,7 +18535,7 @@
       </p:sp>
       <p:sp>
         <p:nvSpPr>
-          <p:cNvPr id="10" name="TextBox 9"/>
+          <p:cNvPr id="9" name="TextBox 8"/>
           <p:cNvSpPr txBox="1"/>
           <p:nvPr/>
         </p:nvSpPr>
@@ -18890,7 +18582,7 @@
       </p:sp>
       <p:sp>
         <p:nvSpPr>
-          <p:cNvPr id="11" name="TextBox 10"/>
+          <p:cNvPr id="10" name="TextBox 9"/>
           <p:cNvSpPr txBox="1"/>
           <p:nvPr/>
         </p:nvSpPr>
@@ -18937,7 +18629,7 @@
       </p:sp>
       <p:sp>
         <p:nvSpPr>
-          <p:cNvPr id="12" name="TextBox 11"/>
+          <p:cNvPr id="11" name="TextBox 10"/>
           <p:cNvSpPr txBox="1"/>
           <p:nvPr/>
         </p:nvSpPr>
@@ -19140,51 +18832,7 @@
       </p:sp>
       <p:sp>
         <p:nvSpPr>
-          <p:cNvPr id="5" name="Rectangle 4"/>
-          <p:cNvSpPr/>
-          <p:nvPr/>
-        </p:nvSpPr>
-        <p:spPr>
-          <a:xfrm>
-            <a:off x="585216" y="1072896"/>
-            <a:ext cx="1097280" cy="45720"/>
-          </a:xfrm>
-          <a:prstGeom prst="rect">
-            <a:avLst/>
-          </a:prstGeom>
-          <a:solidFill>
-            <a:srgbClr val="B84020"/>
-          </a:solidFill>
-          <a:ln>
-            <a:noFill/>
-          </a:ln>
-          <a:effectLst/>
-        </p:spPr>
-        <p:style>
-          <a:lnRef idx="1">
-            <a:schemeClr val="accent1"/>
-          </a:lnRef>
-          <a:fillRef idx="3">
-            <a:schemeClr val="accent1"/>
-          </a:fillRef>
-          <a:effectRef idx="2">
-            <a:schemeClr val="accent1"/>
-          </a:effectRef>
-          <a:fontRef idx="minor">
-            <a:schemeClr val="lt1"/>
-          </a:fontRef>
-        </p:style>
-        <p:txBody>
-          <a:bodyPr rtlCol="0" anchor="ctr"/>
-          <a:lstStyle/>
-          <a:p>
-            <a:pPr algn="ctr"/>
-          </a:p>
-        </p:txBody>
-      </p:sp>
-      <p:sp>
-        <p:nvSpPr>
-          <p:cNvPr id="6" name="TextBox 5"/>
+          <p:cNvPr id="5" name="TextBox 4"/>
           <p:cNvSpPr txBox="1"/>
           <p:nvPr/>
         </p:nvSpPr>
@@ -19231,7 +18879,7 @@
       </p:sp>
       <p:sp>
         <p:nvSpPr>
-          <p:cNvPr id="7" name="TextBox 6"/>
+          <p:cNvPr id="6" name="TextBox 5"/>
           <p:cNvSpPr txBox="1"/>
           <p:nvPr/>
         </p:nvSpPr>
@@ -19278,7 +18926,7 @@
       </p:sp>
       <p:sp>
         <p:nvSpPr>
-          <p:cNvPr id="8" name="TextBox 7"/>
+          <p:cNvPr id="7" name="TextBox 6"/>
           <p:cNvSpPr txBox="1"/>
           <p:nvPr/>
         </p:nvSpPr>
@@ -19325,7 +18973,7 @@
       </p:sp>
       <p:sp>
         <p:nvSpPr>
-          <p:cNvPr id="9" name="TextBox 8"/>
+          <p:cNvPr id="8" name="TextBox 7"/>
           <p:cNvSpPr txBox="1"/>
           <p:nvPr/>
         </p:nvSpPr>
@@ -19372,7 +19020,7 @@
       </p:sp>
       <p:sp>
         <p:nvSpPr>
-          <p:cNvPr id="10" name="Rounded Rectangle 9"/>
+          <p:cNvPr id="9" name="Rounded Rectangle 8"/>
           <p:cNvSpPr/>
           <p:nvPr/>
         </p:nvSpPr>
@@ -19420,7 +19068,7 @@
       </p:sp>
       <p:sp>
         <p:nvSpPr>
-          <p:cNvPr id="11" name="Rounded Rectangle 10"/>
+          <p:cNvPr id="10" name="Rounded Rectangle 9"/>
           <p:cNvSpPr/>
           <p:nvPr/>
         </p:nvSpPr>
@@ -19468,7 +19116,7 @@
       </p:sp>
       <p:sp>
         <p:nvSpPr>
-          <p:cNvPr id="12" name="TextBox 11"/>
+          <p:cNvPr id="11" name="TextBox 10"/>
           <p:cNvSpPr txBox="1"/>
           <p:nvPr/>
         </p:nvSpPr>
@@ -19515,7 +19163,7 @@
       </p:sp>
       <p:sp>
         <p:nvSpPr>
-          <p:cNvPr id="13" name="Rounded Rectangle 12"/>
+          <p:cNvPr id="12" name="Rounded Rectangle 11"/>
           <p:cNvSpPr/>
           <p:nvPr/>
         </p:nvSpPr>
@@ -19561,7 +19209,7 @@
       </p:sp>
       <p:sp>
         <p:nvSpPr>
-          <p:cNvPr id="14" name="TextBox 13"/>
+          <p:cNvPr id="13" name="TextBox 12"/>
           <p:cNvSpPr txBox="1"/>
           <p:nvPr/>
         </p:nvSpPr>
@@ -19608,7 +19256,7 @@
       </p:sp>
       <p:sp>
         <p:nvSpPr>
-          <p:cNvPr id="15" name="TextBox 14"/>
+          <p:cNvPr id="14" name="TextBox 13"/>
           <p:cNvSpPr txBox="1"/>
           <p:nvPr/>
         </p:nvSpPr>
@@ -19655,7 +19303,7 @@
       </p:sp>
       <p:sp>
         <p:nvSpPr>
-          <p:cNvPr id="16" name="Rounded Rectangle 15"/>
+          <p:cNvPr id="15" name="Rounded Rectangle 14"/>
           <p:cNvSpPr/>
           <p:nvPr/>
         </p:nvSpPr>
@@ -19701,7 +19349,7 @@
       </p:sp>
       <p:sp>
         <p:nvSpPr>
-          <p:cNvPr id="17" name="TextBox 16"/>
+          <p:cNvPr id="16" name="TextBox 15"/>
           <p:cNvSpPr txBox="1"/>
           <p:nvPr/>
         </p:nvSpPr>
@@ -19748,7 +19396,7 @@
       </p:sp>
       <p:sp>
         <p:nvSpPr>
-          <p:cNvPr id="18" name="Rounded Rectangle 17"/>
+          <p:cNvPr id="17" name="Rounded Rectangle 16"/>
           <p:cNvSpPr/>
           <p:nvPr/>
         </p:nvSpPr>
@@ -19794,7 +19442,7 @@
       </p:sp>
       <p:sp>
         <p:nvSpPr>
-          <p:cNvPr id="19" name="TextBox 18"/>
+          <p:cNvPr id="18" name="TextBox 17"/>
           <p:cNvSpPr txBox="1"/>
           <p:nvPr/>
         </p:nvSpPr>
@@ -19841,7 +19489,7 @@
       </p:sp>
       <p:sp>
         <p:nvSpPr>
-          <p:cNvPr id="20" name="Rounded Rectangle 19"/>
+          <p:cNvPr id="19" name="Rounded Rectangle 18"/>
           <p:cNvSpPr/>
           <p:nvPr/>
         </p:nvSpPr>
@@ -19887,7 +19535,7 @@
       </p:sp>
       <p:sp>
         <p:nvSpPr>
-          <p:cNvPr id="21" name="TextBox 20"/>
+          <p:cNvPr id="20" name="TextBox 19"/>
           <p:cNvSpPr txBox="1"/>
           <p:nvPr/>
         </p:nvSpPr>
@@ -19934,7 +19582,7 @@
       </p:sp>
       <p:sp>
         <p:nvSpPr>
-          <p:cNvPr id="22" name="Rounded Rectangle 21"/>
+          <p:cNvPr id="21" name="Rounded Rectangle 20"/>
           <p:cNvSpPr/>
           <p:nvPr/>
         </p:nvSpPr>
@@ -19980,7 +19628,7 @@
       </p:sp>
       <p:sp>
         <p:nvSpPr>
-          <p:cNvPr id="23" name="TextBox 22"/>
+          <p:cNvPr id="22" name="TextBox 21"/>
           <p:cNvSpPr txBox="1"/>
           <p:nvPr/>
         </p:nvSpPr>
@@ -20027,7 +19675,7 @@
       </p:sp>
       <p:sp>
         <p:nvSpPr>
-          <p:cNvPr id="24" name="Rounded Rectangle 23"/>
+          <p:cNvPr id="23" name="Rounded Rectangle 22"/>
           <p:cNvSpPr/>
           <p:nvPr/>
         </p:nvSpPr>
@@ -20073,7 +19721,7 @@
       </p:sp>
       <p:sp>
         <p:nvSpPr>
-          <p:cNvPr id="25" name="TextBox 24"/>
+          <p:cNvPr id="24" name="TextBox 23"/>
           <p:cNvSpPr txBox="1"/>
           <p:nvPr/>
         </p:nvSpPr>
@@ -20120,7 +19768,7 @@
       </p:sp>
       <p:sp>
         <p:nvSpPr>
-          <p:cNvPr id="26" name="Rounded Rectangle 25"/>
+          <p:cNvPr id="25" name="Rounded Rectangle 24"/>
           <p:cNvSpPr/>
           <p:nvPr/>
         </p:nvSpPr>
@@ -20166,7 +19814,7 @@
       </p:sp>
       <p:sp>
         <p:nvSpPr>
-          <p:cNvPr id="27" name="TextBox 26"/>
+          <p:cNvPr id="26" name="TextBox 25"/>
           <p:cNvSpPr txBox="1"/>
           <p:nvPr/>
         </p:nvSpPr>
@@ -20213,7 +19861,7 @@
       </p:sp>
       <p:cxnSp>
         <p:nvCxnSpPr>
-          <p:cNvPr id="28" name="Connector 27"/>
+          <p:cNvPr id="27" name="Connector 26"/>
           <p:cNvCxnSpPr/>
           <p:nvPr/>
         </p:nvCxnSpPr>
@@ -20251,7 +19899,7 @@
       </p:cxnSp>
       <p:sp>
         <p:nvSpPr>
-          <p:cNvPr id="29" name="Rounded Rectangle 28"/>
+          <p:cNvPr id="28" name="Rounded Rectangle 27"/>
           <p:cNvSpPr/>
           <p:nvPr/>
         </p:nvSpPr>
@@ -20299,7 +19947,7 @@
       </p:sp>
       <p:sp>
         <p:nvSpPr>
-          <p:cNvPr id="30" name="TextBox 29"/>
+          <p:cNvPr id="29" name="TextBox 28"/>
           <p:cNvSpPr txBox="1"/>
           <p:nvPr/>
         </p:nvSpPr>
@@ -20346,7 +19994,7 @@
       </p:sp>
       <p:sp>
         <p:nvSpPr>
-          <p:cNvPr id="31" name="Rounded Rectangle 30"/>
+          <p:cNvPr id="30" name="Rounded Rectangle 29"/>
           <p:cNvSpPr/>
           <p:nvPr/>
         </p:nvSpPr>
@@ -20394,7 +20042,7 @@
       </p:sp>
       <p:sp>
         <p:nvSpPr>
-          <p:cNvPr id="32" name="TextBox 31"/>
+          <p:cNvPr id="31" name="TextBox 30"/>
           <p:cNvSpPr txBox="1"/>
           <p:nvPr/>
         </p:nvSpPr>
@@ -20597,51 +20245,7 @@
       </p:sp>
       <p:sp>
         <p:nvSpPr>
-          <p:cNvPr id="5" name="Rectangle 4"/>
-          <p:cNvSpPr/>
-          <p:nvPr/>
-        </p:nvSpPr>
-        <p:spPr>
-          <a:xfrm>
-            <a:off x="585216" y="1432560"/>
-            <a:ext cx="1097280" cy="45720"/>
-          </a:xfrm>
-          <a:prstGeom prst="rect">
-            <a:avLst/>
-          </a:prstGeom>
-          <a:solidFill>
-            <a:srgbClr val="B84020"/>
-          </a:solidFill>
-          <a:ln>
-            <a:noFill/>
-          </a:ln>
-          <a:effectLst/>
-        </p:spPr>
-        <p:style>
-          <a:lnRef idx="1">
-            <a:schemeClr val="accent1"/>
-          </a:lnRef>
-          <a:fillRef idx="3">
-            <a:schemeClr val="accent1"/>
-          </a:fillRef>
-          <a:effectRef idx="2">
-            <a:schemeClr val="accent1"/>
-          </a:effectRef>
-          <a:fontRef idx="minor">
-            <a:schemeClr val="lt1"/>
-          </a:fontRef>
-        </p:style>
-        <p:txBody>
-          <a:bodyPr rtlCol="0" anchor="ctr"/>
-          <a:lstStyle/>
-          <a:p>
-            <a:pPr algn="ctr"/>
-          </a:p>
-        </p:txBody>
-      </p:sp>
-      <p:sp>
-        <p:nvSpPr>
-          <p:cNvPr id="6" name="TextBox 5"/>
+          <p:cNvPr id="5" name="TextBox 4"/>
           <p:cNvSpPr txBox="1"/>
           <p:nvPr/>
         </p:nvSpPr>
@@ -20688,7 +20292,7 @@
       </p:sp>
       <p:sp>
         <p:nvSpPr>
-          <p:cNvPr id="7" name="TextBox 6"/>
+          <p:cNvPr id="6" name="TextBox 5"/>
           <p:cNvSpPr txBox="1"/>
           <p:nvPr/>
         </p:nvSpPr>
@@ -20735,7 +20339,7 @@
       </p:sp>
       <p:pic>
         <p:nvPicPr>
-          <p:cNvPr id="8" name="Picture 7" descr="equation attention" title="equation attention"/>
+          <p:cNvPr id="7" name="Picture 6" descr="equation attention" title="equation attention"/>
           <p:cNvPicPr>
             <a:picLocks noChangeAspect="1"/>
           </p:cNvPicPr>
@@ -20759,7 +20363,7 @@
       </p:pic>
       <p:sp>
         <p:nvSpPr>
-          <p:cNvPr id="9" name="Rounded Rectangle 8"/>
+          <p:cNvPr id="8" name="Rounded Rectangle 7"/>
           <p:cNvSpPr/>
           <p:nvPr/>
         </p:nvSpPr>
@@ -20807,7 +20411,7 @@
       </p:sp>
       <p:sp>
         <p:nvSpPr>
-          <p:cNvPr id="10" name="Rectangle 9"/>
+          <p:cNvPr id="9" name="Rectangle 8"/>
           <p:cNvSpPr/>
           <p:nvPr/>
         </p:nvSpPr>
@@ -20851,7 +20455,7 @@
       </p:sp>
       <p:sp>
         <p:nvSpPr>
-          <p:cNvPr id="11" name="TextBox 10"/>
+          <p:cNvPr id="10" name="TextBox 9"/>
           <p:cNvSpPr txBox="1"/>
           <p:nvPr/>
         </p:nvSpPr>
@@ -20898,7 +20502,7 @@
       </p:sp>
       <p:sp>
         <p:nvSpPr>
-          <p:cNvPr id="12" name="TextBox 11"/>
+          <p:cNvPr id="11" name="TextBox 10"/>
           <p:cNvSpPr txBox="1"/>
           <p:nvPr/>
         </p:nvSpPr>
@@ -20945,7 +20549,7 @@
       </p:sp>
       <p:sp>
         <p:nvSpPr>
-          <p:cNvPr id="13" name="Rounded Rectangle 12"/>
+          <p:cNvPr id="12" name="Rounded Rectangle 11"/>
           <p:cNvSpPr/>
           <p:nvPr/>
         </p:nvSpPr>
@@ -20993,7 +20597,7 @@
       </p:sp>
       <p:sp>
         <p:nvSpPr>
-          <p:cNvPr id="14" name="Rectangle 13"/>
+          <p:cNvPr id="13" name="Rectangle 12"/>
           <p:cNvSpPr/>
           <p:nvPr/>
         </p:nvSpPr>
@@ -21037,7 +20641,7 @@
       </p:sp>
       <p:sp>
         <p:nvSpPr>
-          <p:cNvPr id="15" name="TextBox 14"/>
+          <p:cNvPr id="14" name="TextBox 13"/>
           <p:cNvSpPr txBox="1"/>
           <p:nvPr/>
         </p:nvSpPr>
@@ -21084,7 +20688,7 @@
       </p:sp>
       <p:sp>
         <p:nvSpPr>
-          <p:cNvPr id="16" name="TextBox 15"/>
+          <p:cNvPr id="15" name="TextBox 14"/>
           <p:cNvSpPr txBox="1"/>
           <p:nvPr/>
         </p:nvSpPr>
@@ -21131,7 +20735,7 @@
       </p:sp>
       <p:sp>
         <p:nvSpPr>
-          <p:cNvPr id="17" name="Rounded Rectangle 16"/>
+          <p:cNvPr id="16" name="Rounded Rectangle 15"/>
           <p:cNvSpPr/>
           <p:nvPr/>
         </p:nvSpPr>
@@ -21179,7 +20783,7 @@
       </p:sp>
       <p:sp>
         <p:nvSpPr>
-          <p:cNvPr id="18" name="Rectangle 17"/>
+          <p:cNvPr id="17" name="Rectangle 16"/>
           <p:cNvSpPr/>
           <p:nvPr/>
         </p:nvSpPr>
@@ -21223,7 +20827,7 @@
       </p:sp>
       <p:sp>
         <p:nvSpPr>
-          <p:cNvPr id="19" name="TextBox 18"/>
+          <p:cNvPr id="18" name="TextBox 17"/>
           <p:cNvSpPr txBox="1"/>
           <p:nvPr/>
         </p:nvSpPr>
@@ -21270,7 +20874,7 @@
       </p:sp>
       <p:sp>
         <p:nvSpPr>
-          <p:cNvPr id="20" name="TextBox 19"/>
+          <p:cNvPr id="19" name="TextBox 18"/>
           <p:cNvSpPr txBox="1"/>
           <p:nvPr/>
         </p:nvSpPr>
@@ -21317,7 +20921,7 @@
       </p:sp>
       <p:sp>
         <p:nvSpPr>
-          <p:cNvPr id="21" name="Rounded Rectangle 20"/>
+          <p:cNvPr id="20" name="Rounded Rectangle 19"/>
           <p:cNvSpPr/>
           <p:nvPr/>
         </p:nvSpPr>
@@ -21363,7 +20967,7 @@
       </p:sp>
       <p:sp>
         <p:nvSpPr>
-          <p:cNvPr id="22" name="TextBox 21"/>
+          <p:cNvPr id="21" name="TextBox 20"/>
           <p:cNvSpPr txBox="1"/>
           <p:nvPr/>
         </p:nvSpPr>
@@ -21433,7 +21037,7 @@
       </p:sp>
       <p:sp>
         <p:nvSpPr>
-          <p:cNvPr id="23" name="Rounded Rectangle 22"/>
+          <p:cNvPr id="22" name="Rounded Rectangle 21"/>
           <p:cNvSpPr/>
           <p:nvPr/>
         </p:nvSpPr>
@@ -21479,7 +21083,7 @@
       </p:sp>
       <p:sp>
         <p:nvSpPr>
-          <p:cNvPr id="24" name="TextBox 23"/>
+          <p:cNvPr id="23" name="TextBox 22"/>
           <p:cNvSpPr txBox="1"/>
           <p:nvPr/>
         </p:nvSpPr>
@@ -21549,7 +21153,7 @@
       </p:sp>
       <p:cxnSp>
         <p:nvCxnSpPr>
-          <p:cNvPr id="25" name="Connector 24"/>
+          <p:cNvPr id="24" name="Connector 23"/>
           <p:cNvCxnSpPr/>
           <p:nvPr/>
         </p:nvCxnSpPr>
@@ -21586,7 +21190,7 @@
       </p:cxnSp>
       <p:sp>
         <p:nvSpPr>
-          <p:cNvPr id="26" name="Rounded Rectangle 25"/>
+          <p:cNvPr id="25" name="Rounded Rectangle 24"/>
           <p:cNvSpPr/>
           <p:nvPr/>
         </p:nvSpPr>
@@ -21632,7 +21236,7 @@
       </p:sp>
       <p:sp>
         <p:nvSpPr>
-          <p:cNvPr id="27" name="TextBox 26"/>
+          <p:cNvPr id="26" name="TextBox 25"/>
           <p:cNvSpPr txBox="1"/>
           <p:nvPr/>
         </p:nvSpPr>
@@ -21702,7 +21306,7 @@
       </p:sp>
       <p:cxnSp>
         <p:nvCxnSpPr>
-          <p:cNvPr id="28" name="Connector 27"/>
+          <p:cNvPr id="27" name="Connector 26"/>
           <p:cNvCxnSpPr/>
           <p:nvPr/>
         </p:nvCxnSpPr>
@@ -21739,7 +21343,7 @@
       </p:cxnSp>
       <p:sp>
         <p:nvSpPr>
-          <p:cNvPr id="29" name="Rounded Rectangle 28"/>
+          <p:cNvPr id="28" name="Rounded Rectangle 27"/>
           <p:cNvSpPr/>
           <p:nvPr/>
         </p:nvSpPr>
@@ -21783,7 +21387,7 @@
       </p:sp>
       <p:sp>
         <p:nvSpPr>
-          <p:cNvPr id="30" name="TextBox 29"/>
+          <p:cNvPr id="29" name="TextBox 28"/>
           <p:cNvSpPr txBox="1"/>
           <p:nvPr/>
         </p:nvSpPr>
@@ -21853,7 +21457,7 @@
       </p:sp>
       <p:cxnSp>
         <p:nvCxnSpPr>
-          <p:cNvPr id="31" name="Connector 30"/>
+          <p:cNvPr id="30" name="Connector 29"/>
           <p:cNvCxnSpPr/>
           <p:nvPr/>
         </p:nvCxnSpPr>
@@ -22046,17 +21650,698 @@
       </p:sp>
       <p:sp>
         <p:nvSpPr>
-          <p:cNvPr id="5" name="Rectangle 4"/>
+          <p:cNvPr id="5" name="TextBox 4"/>
+          <p:cNvSpPr txBox="1"/>
+          <p:nvPr/>
+        </p:nvSpPr>
+        <p:spPr>
+          <a:xfrm>
+            <a:off x="7680960" y="4759452"/>
+            <a:ext cx="1097280" cy="274320"/>
+          </a:xfrm>
+          <a:prstGeom prst="rect">
+            <a:avLst/>
+          </a:prstGeom>
+          <a:noFill/>
+          <a:ln/>
+        </p:spPr>
+        <p:txBody>
+          <a:bodyPr wrap="square" anchor="t" lIns="25400" rIns="25400" tIns="25400" bIns="25400">
+            <a:spAutoFit/>
+          </a:bodyPr>
+          <a:lstStyle/>
+          <a:p>
+            <a:pPr algn="r">
+              <a:lnSpc>
+                <a:spcPct val="100000"/>
+              </a:lnSpc>
+              <a:spcBef>
+                <a:spcPts val="0"/>
+              </a:spcBef>
+              <a:spcAft>
+                <a:spcPts val="0"/>
+              </a:spcAft>
+            </a:pPr>
+            <a:r>
+              <a:rPr sz="900" b="1" i="0">
+                <a:solidFill>
+                  <a:srgbClr val="6F6656"/>
+                </a:solidFill>
+                <a:latin typeface="Menlo"/>
+                <a:ea typeface="Hiragino Sans GB"/>
+              </a:rPr>
+              <a:t>07 / 15</a:t>
+            </a:r>
+          </a:p>
+        </p:txBody>
+      </p:sp>
+      <p:sp>
+        <p:nvSpPr>
+          <p:cNvPr id="6" name="TextBox 5"/>
+          <p:cNvSpPr txBox="1"/>
+          <p:nvPr/>
+        </p:nvSpPr>
+        <p:spPr>
+          <a:xfrm>
+            <a:off x="566928" y="4777740"/>
+            <a:ext cx="5486400" cy="274320"/>
+          </a:xfrm>
+          <a:prstGeom prst="rect">
+            <a:avLst/>
+          </a:prstGeom>
+          <a:noFill/>
+          <a:ln/>
+        </p:spPr>
+        <p:txBody>
+          <a:bodyPr wrap="square" anchor="t" lIns="25400" rIns="25400" tIns="25400" bIns="25400">
+            <a:spAutoFit/>
+          </a:bodyPr>
+          <a:lstStyle/>
+          <a:p>
+            <a:pPr algn="l">
+              <a:lnSpc>
+                <a:spcPct val="100000"/>
+              </a:lnSpc>
+              <a:spcBef>
+                <a:spcPts val="0"/>
+              </a:spcBef>
+              <a:spcAft>
+                <a:spcPts val="0"/>
+              </a:spcAft>
+            </a:pPr>
+            <a:r>
+              <a:rPr sz="800" b="0" i="0">
+                <a:solidFill>
+                  <a:srgbClr val="6F6656"/>
+                </a:solidFill>
+                <a:latin typeface="Menlo"/>
+                <a:ea typeface="Hiragino Sans GB"/>
+              </a:rPr>
+              <a:t>ATTENTION IS ALL YOU NEED · PAPER DEEP-DIVE</a:t>
+            </a:r>
+          </a:p>
+        </p:txBody>
+      </p:sp>
+      <p:pic>
+        <p:nvPicPr>
+          <p:cNvPr id="7" name="Picture 6" descr="equation var" title="equation var"/>
+          <p:cNvPicPr>
+            <a:picLocks noChangeAspect="1"/>
+          </p:cNvPicPr>
+          <p:nvPr/>
+        </p:nvPicPr>
+        <p:blipFill>
+          <a:blip r:embed="rId2"/>
+          <a:stretch>
+            <a:fillRect/>
+          </a:stretch>
+        </p:blipFill>
+        <p:spPr>
+          <a:xfrm>
+            <a:off x="566928" y="1438656"/>
+            <a:ext cx="2604532" cy="292608"/>
+          </a:xfrm>
+          <a:prstGeom prst="rect">
+            <a:avLst/>
+          </a:prstGeom>
+        </p:spPr>
+      </p:pic>
+      <p:sp>
+        <p:nvSpPr>
+          <p:cNvPr id="8" name="Rounded Rectangle 7"/>
           <p:cNvSpPr/>
           <p:nvPr/>
         </p:nvSpPr>
         <p:spPr>
           <a:xfrm>
-            <a:off x="585216" y="1072896"/>
-            <a:ext cx="1097280" cy="45720"/>
-          </a:xfrm>
-          <a:prstGeom prst="rect">
-            <a:avLst/>
+            <a:off x="566928" y="1987295"/>
+            <a:ext cx="310896" cy="310896"/>
+          </a:xfrm>
+          <a:prstGeom prst="roundRect">
+            <a:avLst>
+              <a:gd name="adj" fmla="val 50000"/>
+            </a:avLst>
+          </a:prstGeom>
+          <a:solidFill>
+            <a:srgbClr val="2A3F57"/>
+          </a:solidFill>
+          <a:ln>
+            <a:noFill/>
+          </a:ln>
+          <a:effectLst/>
+        </p:spPr>
+        <p:style>
+          <a:lnRef idx="1">
+            <a:schemeClr val="accent1"/>
+          </a:lnRef>
+          <a:fillRef idx="3">
+            <a:schemeClr val="accent1"/>
+          </a:fillRef>
+          <a:effectRef idx="2">
+            <a:schemeClr val="accent1"/>
+          </a:effectRef>
+          <a:fontRef idx="minor">
+            <a:schemeClr val="lt1"/>
+          </a:fontRef>
+        </p:style>
+        <p:txBody>
+          <a:bodyPr rtlCol="0" anchor="ctr"/>
+          <a:lstStyle/>
+          <a:p>
+            <a:pPr algn="ctr"/>
+          </a:p>
+        </p:txBody>
+      </p:sp>
+      <p:sp>
+        <p:nvSpPr>
+          <p:cNvPr id="9" name="TextBox 8"/>
+          <p:cNvSpPr txBox="1"/>
+          <p:nvPr/>
+        </p:nvSpPr>
+        <p:spPr>
+          <a:xfrm>
+            <a:off x="566928" y="1987295"/>
+            <a:ext cx="310896" cy="310896"/>
+          </a:xfrm>
+          <a:prstGeom prst="rect">
+            <a:avLst/>
+          </a:prstGeom>
+          <a:noFill/>
+          <a:ln/>
+        </p:spPr>
+        <p:txBody>
+          <a:bodyPr wrap="square" anchor="ctr" lIns="25400" rIns="25400" tIns="25400" bIns="25400">
+            <a:spAutoFit/>
+          </a:bodyPr>
+          <a:lstStyle/>
+          <a:p>
+            <a:pPr algn="ctr">
+              <a:lnSpc>
+                <a:spcPct val="100000"/>
+              </a:lnSpc>
+              <a:spcBef>
+                <a:spcPts val="0"/>
+              </a:spcBef>
+              <a:spcAft>
+                <a:spcPts val="0"/>
+              </a:spcAft>
+            </a:pPr>
+            <a:r>
+              <a:rPr sz="1300" b="1" i="0">
+                <a:solidFill>
+                  <a:srgbClr val="FFFFFF"/>
+                </a:solidFill>
+                <a:latin typeface="Helvetica Neue"/>
+                <a:ea typeface="Hiragino Sans GB"/>
+              </a:rPr>
+              <a:t>1</a:t>
+            </a:r>
+          </a:p>
+        </p:txBody>
+      </p:sp>
+      <p:sp>
+        <p:nvSpPr>
+          <p:cNvPr id="10" name="TextBox 9"/>
+          <p:cNvSpPr txBox="1"/>
+          <p:nvPr/>
+        </p:nvSpPr>
+        <p:spPr>
+          <a:xfrm>
+            <a:off x="1005840" y="1959863"/>
+            <a:ext cx="2958592" cy="274320"/>
+          </a:xfrm>
+          <a:prstGeom prst="rect">
+            <a:avLst/>
+          </a:prstGeom>
+          <a:noFill/>
+          <a:ln/>
+        </p:spPr>
+        <p:txBody>
+          <a:bodyPr wrap="square" anchor="t" lIns="25400" rIns="25400" tIns="25400" bIns="25400">
+            <a:spAutoFit/>
+          </a:bodyPr>
+          <a:lstStyle/>
+          <a:p>
+            <a:pPr algn="l">
+              <a:lnSpc>
+                <a:spcPct val="100000"/>
+              </a:lnSpc>
+              <a:spcBef>
+                <a:spcPts val="0"/>
+              </a:spcBef>
+              <a:spcAft>
+                <a:spcPts val="0"/>
+              </a:spcAft>
+            </a:pPr>
+            <a:r>
+              <a:rPr sz="1250" b="1" i="0">
+                <a:solidFill>
+                  <a:srgbClr val="1C1D22"/>
+                </a:solidFill>
+                <a:latin typeface="Helvetica Neue"/>
+                <a:ea typeface="Hiragino Sans GB"/>
+              </a:rPr>
+              <a:t>The larger dₖ is</a:t>
+            </a:r>
+          </a:p>
+        </p:txBody>
+      </p:sp>
+      <p:sp>
+        <p:nvSpPr>
+          <p:cNvPr id="11" name="TextBox 10"/>
+          <p:cNvSpPr txBox="1"/>
+          <p:nvPr/>
+        </p:nvSpPr>
+        <p:spPr>
+          <a:xfrm>
+            <a:off x="1005840" y="2225039"/>
+            <a:ext cx="2958592" cy="310896"/>
+          </a:xfrm>
+          <a:prstGeom prst="rect">
+            <a:avLst/>
+          </a:prstGeom>
+          <a:noFill/>
+          <a:ln/>
+        </p:spPr>
+        <p:txBody>
+          <a:bodyPr wrap="square" anchor="t" lIns="25400" rIns="25400" tIns="25400" bIns="25400">
+            <a:spAutoFit/>
+          </a:bodyPr>
+          <a:lstStyle/>
+          <a:p>
+            <a:pPr algn="l">
+              <a:lnSpc>
+                <a:spcPct val="105000"/>
+              </a:lnSpc>
+              <a:spcBef>
+                <a:spcPts val="0"/>
+              </a:spcBef>
+              <a:spcAft>
+                <a:spcPts val="0"/>
+              </a:spcAft>
+            </a:pPr>
+            <a:r>
+              <a:rPr sz="1050" b="0" i="0">
+                <a:solidFill>
+                  <a:srgbClr val="5A5E68"/>
+                </a:solidFill>
+                <a:latin typeface="Helvetica Neue"/>
+                <a:ea typeface="Hiragino Sans GB"/>
+              </a:rPr>
+              <a:t>Q·K sums dₖ products, so its variance grows linearly with dₖ</a:t>
+            </a:r>
+          </a:p>
+        </p:txBody>
+      </p:sp>
+      <p:sp>
+        <p:nvSpPr>
+          <p:cNvPr id="12" name="Rounded Rectangle 11"/>
+          <p:cNvSpPr/>
+          <p:nvPr/>
+        </p:nvSpPr>
+        <p:spPr>
+          <a:xfrm>
+            <a:off x="566928" y="2663952"/>
+            <a:ext cx="310896" cy="310896"/>
+          </a:xfrm>
+          <a:prstGeom prst="roundRect">
+            <a:avLst>
+              <a:gd name="adj" fmla="val 50000"/>
+            </a:avLst>
+          </a:prstGeom>
+          <a:solidFill>
+            <a:srgbClr val="2A3F57"/>
+          </a:solidFill>
+          <a:ln>
+            <a:noFill/>
+          </a:ln>
+          <a:effectLst/>
+        </p:spPr>
+        <p:style>
+          <a:lnRef idx="1">
+            <a:schemeClr val="accent1"/>
+          </a:lnRef>
+          <a:fillRef idx="3">
+            <a:schemeClr val="accent1"/>
+          </a:fillRef>
+          <a:effectRef idx="2">
+            <a:schemeClr val="accent1"/>
+          </a:effectRef>
+          <a:fontRef idx="minor">
+            <a:schemeClr val="lt1"/>
+          </a:fontRef>
+        </p:style>
+        <p:txBody>
+          <a:bodyPr rtlCol="0" anchor="ctr"/>
+          <a:lstStyle/>
+          <a:p>
+            <a:pPr algn="ctr"/>
+          </a:p>
+        </p:txBody>
+      </p:sp>
+      <p:sp>
+        <p:nvSpPr>
+          <p:cNvPr id="13" name="TextBox 12"/>
+          <p:cNvSpPr txBox="1"/>
+          <p:nvPr/>
+        </p:nvSpPr>
+        <p:spPr>
+          <a:xfrm>
+            <a:off x="566928" y="2663952"/>
+            <a:ext cx="310896" cy="310896"/>
+          </a:xfrm>
+          <a:prstGeom prst="rect">
+            <a:avLst/>
+          </a:prstGeom>
+          <a:noFill/>
+          <a:ln/>
+        </p:spPr>
+        <p:txBody>
+          <a:bodyPr wrap="square" anchor="ctr" lIns="25400" rIns="25400" tIns="25400" bIns="25400">
+            <a:spAutoFit/>
+          </a:bodyPr>
+          <a:lstStyle/>
+          <a:p>
+            <a:pPr algn="ctr">
+              <a:lnSpc>
+                <a:spcPct val="100000"/>
+              </a:lnSpc>
+              <a:spcBef>
+                <a:spcPts val="0"/>
+              </a:spcBef>
+              <a:spcAft>
+                <a:spcPts val="0"/>
+              </a:spcAft>
+            </a:pPr>
+            <a:r>
+              <a:rPr sz="1300" b="1" i="0">
+                <a:solidFill>
+                  <a:srgbClr val="FFFFFF"/>
+                </a:solidFill>
+                <a:latin typeface="Helvetica Neue"/>
+                <a:ea typeface="Hiragino Sans GB"/>
+              </a:rPr>
+              <a:t>2</a:t>
+            </a:r>
+          </a:p>
+        </p:txBody>
+      </p:sp>
+      <p:sp>
+        <p:nvSpPr>
+          <p:cNvPr id="14" name="TextBox 13"/>
+          <p:cNvSpPr txBox="1"/>
+          <p:nvPr/>
+        </p:nvSpPr>
+        <p:spPr>
+          <a:xfrm>
+            <a:off x="1005840" y="2636520"/>
+            <a:ext cx="2958592" cy="274320"/>
+          </a:xfrm>
+          <a:prstGeom prst="rect">
+            <a:avLst/>
+          </a:prstGeom>
+          <a:noFill/>
+          <a:ln/>
+        </p:spPr>
+        <p:txBody>
+          <a:bodyPr wrap="square" anchor="t" lIns="25400" rIns="25400" tIns="25400" bIns="25400">
+            <a:spAutoFit/>
+          </a:bodyPr>
+          <a:lstStyle/>
+          <a:p>
+            <a:pPr algn="l">
+              <a:lnSpc>
+                <a:spcPct val="100000"/>
+              </a:lnSpc>
+              <a:spcBef>
+                <a:spcPts val="0"/>
+              </a:spcBef>
+              <a:spcAft>
+                <a:spcPts val="0"/>
+              </a:spcAft>
+            </a:pPr>
+            <a:r>
+              <a:rPr sz="1250" b="1" i="0">
+                <a:solidFill>
+                  <a:srgbClr val="1C1D22"/>
+                </a:solidFill>
+                <a:latin typeface="Helvetica Neue"/>
+                <a:ea typeface="Hiragino Sans GB"/>
+              </a:rPr>
+              <a:t>Dot products blow up</a:t>
+            </a:r>
+          </a:p>
+        </p:txBody>
+      </p:sp>
+      <p:sp>
+        <p:nvSpPr>
+          <p:cNvPr id="15" name="TextBox 14"/>
+          <p:cNvSpPr txBox="1"/>
+          <p:nvPr/>
+        </p:nvSpPr>
+        <p:spPr>
+          <a:xfrm>
+            <a:off x="1005840" y="2901695"/>
+            <a:ext cx="2958592" cy="310896"/>
+          </a:xfrm>
+          <a:prstGeom prst="rect">
+            <a:avLst/>
+          </a:prstGeom>
+          <a:noFill/>
+          <a:ln/>
+        </p:spPr>
+        <p:txBody>
+          <a:bodyPr wrap="square" anchor="t" lIns="25400" rIns="25400" tIns="25400" bIns="25400">
+            <a:spAutoFit/>
+          </a:bodyPr>
+          <a:lstStyle/>
+          <a:p>
+            <a:pPr algn="l">
+              <a:lnSpc>
+                <a:spcPct val="105000"/>
+              </a:lnSpc>
+              <a:spcBef>
+                <a:spcPts val="0"/>
+              </a:spcBef>
+              <a:spcAft>
+                <a:spcPts val="0"/>
+              </a:spcAft>
+            </a:pPr>
+            <a:r>
+              <a:rPr sz="1050" b="0" i="0">
+                <a:solidFill>
+                  <a:srgbClr val="5A5E68"/>
+                </a:solidFill>
+                <a:latin typeface="Helvetica Neue"/>
+                <a:ea typeface="Hiragino Sans GB"/>
+              </a:rPr>
+              <a:t>Softmax slides into saturation and dumps nearly all weight on one key</a:t>
+            </a:r>
+          </a:p>
+        </p:txBody>
+      </p:sp>
+      <p:sp>
+        <p:nvSpPr>
+          <p:cNvPr id="16" name="Rounded Rectangle 15"/>
+          <p:cNvSpPr/>
+          <p:nvPr/>
+        </p:nvSpPr>
+        <p:spPr>
+          <a:xfrm>
+            <a:off x="566928" y="3340608"/>
+            <a:ext cx="310896" cy="310896"/>
+          </a:xfrm>
+          <a:prstGeom prst="roundRect">
+            <a:avLst>
+              <a:gd name="adj" fmla="val 50000"/>
+            </a:avLst>
+          </a:prstGeom>
+          <a:solidFill>
+            <a:srgbClr val="2A3F57"/>
+          </a:solidFill>
+          <a:ln>
+            <a:noFill/>
+          </a:ln>
+          <a:effectLst/>
+        </p:spPr>
+        <p:style>
+          <a:lnRef idx="1">
+            <a:schemeClr val="accent1"/>
+          </a:lnRef>
+          <a:fillRef idx="3">
+            <a:schemeClr val="accent1"/>
+          </a:fillRef>
+          <a:effectRef idx="2">
+            <a:schemeClr val="accent1"/>
+          </a:effectRef>
+          <a:fontRef idx="minor">
+            <a:schemeClr val="lt1"/>
+          </a:fontRef>
+        </p:style>
+        <p:txBody>
+          <a:bodyPr rtlCol="0" anchor="ctr"/>
+          <a:lstStyle/>
+          <a:p>
+            <a:pPr algn="ctr"/>
+          </a:p>
+        </p:txBody>
+      </p:sp>
+      <p:sp>
+        <p:nvSpPr>
+          <p:cNvPr id="17" name="TextBox 16"/>
+          <p:cNvSpPr txBox="1"/>
+          <p:nvPr/>
+        </p:nvSpPr>
+        <p:spPr>
+          <a:xfrm>
+            <a:off x="566928" y="3340608"/>
+            <a:ext cx="310896" cy="310896"/>
+          </a:xfrm>
+          <a:prstGeom prst="rect">
+            <a:avLst/>
+          </a:prstGeom>
+          <a:noFill/>
+          <a:ln/>
+        </p:spPr>
+        <p:txBody>
+          <a:bodyPr wrap="square" anchor="ctr" lIns="25400" rIns="25400" tIns="25400" bIns="25400">
+            <a:spAutoFit/>
+          </a:bodyPr>
+          <a:lstStyle/>
+          <a:p>
+            <a:pPr algn="ctr">
+              <a:lnSpc>
+                <a:spcPct val="100000"/>
+              </a:lnSpc>
+              <a:spcBef>
+                <a:spcPts val="0"/>
+              </a:spcBef>
+              <a:spcAft>
+                <a:spcPts val="0"/>
+              </a:spcAft>
+            </a:pPr>
+            <a:r>
+              <a:rPr sz="1300" b="1" i="0">
+                <a:solidFill>
+                  <a:srgbClr val="FFFFFF"/>
+                </a:solidFill>
+                <a:latin typeface="Helvetica Neue"/>
+                <a:ea typeface="Hiragino Sans GB"/>
+              </a:rPr>
+              <a:t>3</a:t>
+            </a:r>
+          </a:p>
+        </p:txBody>
+      </p:sp>
+      <p:sp>
+        <p:nvSpPr>
+          <p:cNvPr id="18" name="TextBox 17"/>
+          <p:cNvSpPr txBox="1"/>
+          <p:nvPr/>
+        </p:nvSpPr>
+        <p:spPr>
+          <a:xfrm>
+            <a:off x="1005840" y="3313176"/>
+            <a:ext cx="2958592" cy="274320"/>
+          </a:xfrm>
+          <a:prstGeom prst="rect">
+            <a:avLst/>
+          </a:prstGeom>
+          <a:noFill/>
+          <a:ln/>
+        </p:spPr>
+        <p:txBody>
+          <a:bodyPr wrap="square" anchor="t" lIns="25400" rIns="25400" tIns="25400" bIns="25400">
+            <a:spAutoFit/>
+          </a:bodyPr>
+          <a:lstStyle/>
+          <a:p>
+            <a:pPr algn="l">
+              <a:lnSpc>
+                <a:spcPct val="100000"/>
+              </a:lnSpc>
+              <a:spcBef>
+                <a:spcPts val="0"/>
+              </a:spcBef>
+              <a:spcAft>
+                <a:spcPts val="0"/>
+              </a:spcAft>
+            </a:pPr>
+            <a:r>
+              <a:rPr sz="1250" b="1" i="0">
+                <a:solidFill>
+                  <a:srgbClr val="1C1D22"/>
+                </a:solidFill>
+                <a:latin typeface="Helvetica Neue"/>
+                <a:ea typeface="Hiragino Sans GB"/>
+              </a:rPr>
+              <a:t>Gradients vanish</a:t>
+            </a:r>
+          </a:p>
+        </p:txBody>
+      </p:sp>
+      <p:sp>
+        <p:nvSpPr>
+          <p:cNvPr id="19" name="TextBox 18"/>
+          <p:cNvSpPr txBox="1"/>
+          <p:nvPr/>
+        </p:nvSpPr>
+        <p:spPr>
+          <a:xfrm>
+            <a:off x="1005840" y="3578352"/>
+            <a:ext cx="2958592" cy="310896"/>
+          </a:xfrm>
+          <a:prstGeom prst="rect">
+            <a:avLst/>
+          </a:prstGeom>
+          <a:noFill/>
+          <a:ln/>
+        </p:spPr>
+        <p:txBody>
+          <a:bodyPr wrap="square" anchor="t" lIns="25400" rIns="25400" tIns="25400" bIns="25400">
+            <a:spAutoFit/>
+          </a:bodyPr>
+          <a:lstStyle/>
+          <a:p>
+            <a:pPr algn="l">
+              <a:lnSpc>
+                <a:spcPct val="105000"/>
+              </a:lnSpc>
+              <a:spcBef>
+                <a:spcPts val="0"/>
+              </a:spcBef>
+              <a:spcAft>
+                <a:spcPts val="0"/>
+              </a:spcAft>
+            </a:pPr>
+            <a:r>
+              <a:rPr sz="1050" b="0" i="0">
+                <a:solidFill>
+                  <a:srgbClr val="5A5E68"/>
+                </a:solidFill>
+                <a:latin typeface="Helvetica Neue"/>
+                <a:ea typeface="Hiragino Sans GB"/>
+              </a:rPr>
+              <a:t>Backprop can't learn — training stalls</a:t>
+            </a:r>
+          </a:p>
+        </p:txBody>
+      </p:sp>
+      <p:sp>
+        <p:nvSpPr>
+          <p:cNvPr id="20" name="Rounded Rectangle 19"/>
+          <p:cNvSpPr/>
+          <p:nvPr/>
+        </p:nvSpPr>
+        <p:spPr>
+          <a:xfrm>
+            <a:off x="566928" y="4017264"/>
+            <a:ext cx="310896" cy="310896"/>
+          </a:xfrm>
+          <a:prstGeom prst="roundRect">
+            <a:avLst>
+              <a:gd name="adj" fmla="val 50000"/>
+            </a:avLst>
           </a:prstGeom>
           <a:solidFill>
             <a:srgbClr val="B84020"/>
@@ -22090,14 +22375,14 @@
       </p:sp>
       <p:sp>
         <p:nvSpPr>
-          <p:cNvPr id="6" name="TextBox 5"/>
+          <p:cNvPr id="21" name="TextBox 20"/>
           <p:cNvSpPr txBox="1"/>
           <p:nvPr/>
         </p:nvSpPr>
         <p:spPr>
           <a:xfrm>
-            <a:off x="7680960" y="4759452"/>
-            <a:ext cx="1097280" cy="274320"/>
+            <a:off x="566928" y="4017264"/>
+            <a:ext cx="310896" cy="310896"/>
           </a:xfrm>
           <a:prstGeom prst="rect">
             <a:avLst/>
@@ -22106,12 +22391,12 @@
           <a:ln/>
         </p:spPr>
         <p:txBody>
-          <a:bodyPr wrap="square" anchor="t" lIns="25400" rIns="25400" tIns="25400" bIns="25400">
+          <a:bodyPr wrap="square" anchor="ctr" lIns="25400" rIns="25400" tIns="25400" bIns="25400">
             <a:spAutoFit/>
           </a:bodyPr>
           <a:lstStyle/>
           <a:p>
-            <a:pPr algn="r">
+            <a:pPr algn="ctr">
               <a:lnSpc>
                 <a:spcPct val="100000"/>
               </a:lnSpc>
@@ -22123,28 +22408,28 @@
               </a:spcAft>
             </a:pPr>
             <a:r>
-              <a:rPr sz="900" b="1" i="0">
-                <a:solidFill>
-                  <a:srgbClr val="6F6656"/>
-                </a:solidFill>
-                <a:latin typeface="Menlo"/>
+              <a:rPr sz="1300" b="1" i="0">
+                <a:solidFill>
+                  <a:srgbClr val="FFFFFF"/>
+                </a:solidFill>
+                <a:latin typeface="Helvetica Neue"/>
                 <a:ea typeface="Hiragino Sans GB"/>
               </a:rPr>
-              <a:t>07 / 15</a:t>
-            </a:r>
-          </a:p>
-        </p:txBody>
-      </p:sp>
-      <p:sp>
-        <p:nvSpPr>
-          <p:cNvPr id="7" name="TextBox 6"/>
+              <a:t>4</a:t>
+            </a:r>
+          </a:p>
+        </p:txBody>
+      </p:sp>
+      <p:sp>
+        <p:nvSpPr>
+          <p:cNvPr id="22" name="TextBox 21"/>
           <p:cNvSpPr txBox="1"/>
           <p:nvPr/>
         </p:nvSpPr>
         <p:spPr>
           <a:xfrm>
-            <a:off x="566928" y="4777740"/>
-            <a:ext cx="5486400" cy="274320"/>
+            <a:off x="1005840" y="3989832"/>
+            <a:ext cx="2958592" cy="274320"/>
           </a:xfrm>
           <a:prstGeom prst="rect">
             <a:avLst/>
@@ -22170,145 +22455,75 @@
               </a:spcAft>
             </a:pPr>
             <a:r>
-              <a:rPr sz="800" b="0" i="0">
-                <a:solidFill>
-                  <a:srgbClr val="6F6656"/>
-                </a:solidFill>
-                <a:latin typeface="Menlo"/>
-                <a:ea typeface="Hiragino Sans GB"/>
-              </a:rPr>
-              <a:t>ATTENTION IS ALL YOU NEED · PAPER DEEP-DIVE</a:t>
-            </a:r>
-          </a:p>
-        </p:txBody>
-      </p:sp>
-      <p:pic>
-        <p:nvPicPr>
-          <p:cNvPr id="8" name="Picture 7" descr="equation var" title="equation var"/>
-          <p:cNvPicPr>
-            <a:picLocks noChangeAspect="1"/>
-          </p:cNvPicPr>
-          <p:nvPr/>
-        </p:nvPicPr>
-        <p:blipFill>
-          <a:blip r:embed="rId2"/>
-          <a:stretch>
-            <a:fillRect/>
-          </a:stretch>
-        </p:blipFill>
-        <p:spPr>
-          <a:xfrm>
-            <a:off x="566928" y="1438656"/>
-            <a:ext cx="2604532" cy="292608"/>
-          </a:xfrm>
-          <a:prstGeom prst="rect">
-            <a:avLst/>
-          </a:prstGeom>
-        </p:spPr>
-      </p:pic>
-      <p:sp>
-        <p:nvSpPr>
-          <p:cNvPr id="9" name="Rounded Rectangle 8"/>
-          <p:cNvSpPr/>
-          <p:nvPr/>
-        </p:nvSpPr>
-        <p:spPr>
-          <a:xfrm>
-            <a:off x="566928" y="1987295"/>
-            <a:ext cx="310896" cy="310896"/>
-          </a:xfrm>
-          <a:prstGeom prst="roundRect">
-            <a:avLst>
-              <a:gd name="adj" fmla="val 50000"/>
-            </a:avLst>
-          </a:prstGeom>
-          <a:solidFill>
-            <a:srgbClr val="2A3F57"/>
-          </a:solidFill>
-          <a:ln>
-            <a:noFill/>
-          </a:ln>
-          <a:effectLst/>
-        </p:spPr>
-        <p:style>
-          <a:lnRef idx="1">
-            <a:schemeClr val="accent1"/>
-          </a:lnRef>
-          <a:fillRef idx="3">
-            <a:schemeClr val="accent1"/>
-          </a:fillRef>
-          <a:effectRef idx="2">
-            <a:schemeClr val="accent1"/>
-          </a:effectRef>
-          <a:fontRef idx="minor">
-            <a:schemeClr val="lt1"/>
-          </a:fontRef>
-        </p:style>
-        <p:txBody>
-          <a:bodyPr rtlCol="0" anchor="ctr"/>
-          <a:lstStyle/>
-          <a:p>
-            <a:pPr algn="ctr"/>
-          </a:p>
-        </p:txBody>
-      </p:sp>
-      <p:sp>
-        <p:nvSpPr>
-          <p:cNvPr id="10" name="TextBox 9"/>
-          <p:cNvSpPr txBox="1"/>
-          <p:nvPr/>
-        </p:nvSpPr>
-        <p:spPr>
-          <a:xfrm>
-            <a:off x="566928" y="1987295"/>
-            <a:ext cx="310896" cy="310896"/>
-          </a:xfrm>
-          <a:prstGeom prst="rect">
-            <a:avLst/>
-          </a:prstGeom>
-          <a:noFill/>
-          <a:ln/>
-        </p:spPr>
-        <p:txBody>
-          <a:bodyPr wrap="square" anchor="ctr" lIns="25400" rIns="25400" tIns="25400" bIns="25400">
-            <a:spAutoFit/>
-          </a:bodyPr>
-          <a:lstStyle/>
-          <a:p>
-            <a:pPr algn="ctr">
-              <a:lnSpc>
-                <a:spcPct val="100000"/>
-              </a:lnSpc>
-              <a:spcBef>
-                <a:spcPts val="0"/>
-              </a:spcBef>
-              <a:spcAft>
-                <a:spcPts val="0"/>
-              </a:spcAft>
-            </a:pPr>
-            <a:r>
-              <a:rPr sz="1300" b="1" i="0">
-                <a:solidFill>
-                  <a:srgbClr val="FFFFFF"/>
+              <a:rPr sz="1250" b="1" i="0">
+                <a:solidFill>
+                  <a:srgbClr val="1C1D22"/>
                 </a:solidFill>
                 <a:latin typeface="Helvetica Neue"/>
                 <a:ea typeface="Hiragino Sans GB"/>
               </a:rPr>
-              <a:t>1</a:t>
-            </a:r>
-          </a:p>
-        </p:txBody>
-      </p:sp>
-      <p:sp>
-        <p:nvSpPr>
-          <p:cNvPr id="11" name="TextBox 10"/>
+              <a:t>÷ √dₖ, variance back to ~1</a:t>
+            </a:r>
+          </a:p>
+        </p:txBody>
+      </p:sp>
+      <p:sp>
+        <p:nvSpPr>
+          <p:cNvPr id="23" name="TextBox 22"/>
           <p:cNvSpPr txBox="1"/>
           <p:nvPr/>
         </p:nvSpPr>
         <p:spPr>
           <a:xfrm>
-            <a:off x="1005840" y="1959863"/>
-            <a:ext cx="2958592" cy="274320"/>
+            <a:off x="1005840" y="4255008"/>
+            <a:ext cx="2958592" cy="310896"/>
+          </a:xfrm>
+          <a:prstGeom prst="rect">
+            <a:avLst/>
+          </a:prstGeom>
+          <a:noFill/>
+          <a:ln/>
+        </p:spPr>
+        <p:txBody>
+          <a:bodyPr wrap="square" anchor="t" lIns="25400" rIns="25400" tIns="25400" bIns="25400">
+            <a:spAutoFit/>
+          </a:bodyPr>
+          <a:lstStyle/>
+          <a:p>
+            <a:pPr algn="l">
+              <a:lnSpc>
+                <a:spcPct val="105000"/>
+              </a:lnSpc>
+              <a:spcBef>
+                <a:spcPts val="0"/>
+              </a:spcBef>
+              <a:spcAft>
+                <a:spcPts val="0"/>
+              </a:spcAft>
+            </a:pPr>
+            <a:r>
+              <a:rPr sz="1050" b="0" i="0">
+                <a:solidFill>
+                  <a:srgbClr val="5A5E68"/>
+                </a:solidFill>
+                <a:latin typeface="Helvetica Neue"/>
+                <a:ea typeface="Hiragino Sans GB"/>
+              </a:rPr>
+              <a:t>Flatter distribution, healthy gradients, stable training</a:t>
+            </a:r>
+          </a:p>
+        </p:txBody>
+      </p:sp>
+      <p:sp>
+        <p:nvSpPr>
+          <p:cNvPr id="24" name="TextBox 23"/>
+          <p:cNvSpPr txBox="1"/>
+          <p:nvPr/>
+        </p:nvSpPr>
+        <p:spPr>
+          <a:xfrm>
+            <a:off x="4330192" y="1365503"/>
+            <a:ext cx="4246879" cy="274320"/>
           </a:xfrm>
           <a:prstGeom prst="rect">
             <a:avLst/>
@@ -22334,661 +22549,6 @@
               </a:spcAft>
             </a:pPr>
             <a:r>
-              <a:rPr sz="1250" b="1" i="0">
-                <a:solidFill>
-                  <a:srgbClr val="1C1D22"/>
-                </a:solidFill>
-                <a:latin typeface="Helvetica Neue"/>
-                <a:ea typeface="Hiragino Sans GB"/>
-              </a:rPr>
-              <a:t>The larger dₖ is</a:t>
-            </a:r>
-          </a:p>
-        </p:txBody>
-      </p:sp>
-      <p:sp>
-        <p:nvSpPr>
-          <p:cNvPr id="12" name="TextBox 11"/>
-          <p:cNvSpPr txBox="1"/>
-          <p:nvPr/>
-        </p:nvSpPr>
-        <p:spPr>
-          <a:xfrm>
-            <a:off x="1005840" y="2225039"/>
-            <a:ext cx="2958592" cy="310896"/>
-          </a:xfrm>
-          <a:prstGeom prst="rect">
-            <a:avLst/>
-          </a:prstGeom>
-          <a:noFill/>
-          <a:ln/>
-        </p:spPr>
-        <p:txBody>
-          <a:bodyPr wrap="square" anchor="t" lIns="25400" rIns="25400" tIns="25400" bIns="25400">
-            <a:spAutoFit/>
-          </a:bodyPr>
-          <a:lstStyle/>
-          <a:p>
-            <a:pPr algn="l">
-              <a:lnSpc>
-                <a:spcPct val="105000"/>
-              </a:lnSpc>
-              <a:spcBef>
-                <a:spcPts val="0"/>
-              </a:spcBef>
-              <a:spcAft>
-                <a:spcPts val="0"/>
-              </a:spcAft>
-            </a:pPr>
-            <a:r>
-              <a:rPr sz="1050" b="0" i="0">
-                <a:solidFill>
-                  <a:srgbClr val="5A5E68"/>
-                </a:solidFill>
-                <a:latin typeface="Helvetica Neue"/>
-                <a:ea typeface="Hiragino Sans GB"/>
-              </a:rPr>
-              <a:t>Q·K sums dₖ products, so its variance grows linearly with dₖ</a:t>
-            </a:r>
-          </a:p>
-        </p:txBody>
-      </p:sp>
-      <p:sp>
-        <p:nvSpPr>
-          <p:cNvPr id="13" name="Rounded Rectangle 12"/>
-          <p:cNvSpPr/>
-          <p:nvPr/>
-        </p:nvSpPr>
-        <p:spPr>
-          <a:xfrm>
-            <a:off x="566928" y="2663952"/>
-            <a:ext cx="310896" cy="310896"/>
-          </a:xfrm>
-          <a:prstGeom prst="roundRect">
-            <a:avLst>
-              <a:gd name="adj" fmla="val 50000"/>
-            </a:avLst>
-          </a:prstGeom>
-          <a:solidFill>
-            <a:srgbClr val="2A3F57"/>
-          </a:solidFill>
-          <a:ln>
-            <a:noFill/>
-          </a:ln>
-          <a:effectLst/>
-        </p:spPr>
-        <p:style>
-          <a:lnRef idx="1">
-            <a:schemeClr val="accent1"/>
-          </a:lnRef>
-          <a:fillRef idx="3">
-            <a:schemeClr val="accent1"/>
-          </a:fillRef>
-          <a:effectRef idx="2">
-            <a:schemeClr val="accent1"/>
-          </a:effectRef>
-          <a:fontRef idx="minor">
-            <a:schemeClr val="lt1"/>
-          </a:fontRef>
-        </p:style>
-        <p:txBody>
-          <a:bodyPr rtlCol="0" anchor="ctr"/>
-          <a:lstStyle/>
-          <a:p>
-            <a:pPr algn="ctr"/>
-          </a:p>
-        </p:txBody>
-      </p:sp>
-      <p:sp>
-        <p:nvSpPr>
-          <p:cNvPr id="14" name="TextBox 13"/>
-          <p:cNvSpPr txBox="1"/>
-          <p:nvPr/>
-        </p:nvSpPr>
-        <p:spPr>
-          <a:xfrm>
-            <a:off x="566928" y="2663952"/>
-            <a:ext cx="310896" cy="310896"/>
-          </a:xfrm>
-          <a:prstGeom prst="rect">
-            <a:avLst/>
-          </a:prstGeom>
-          <a:noFill/>
-          <a:ln/>
-        </p:spPr>
-        <p:txBody>
-          <a:bodyPr wrap="square" anchor="ctr" lIns="25400" rIns="25400" tIns="25400" bIns="25400">
-            <a:spAutoFit/>
-          </a:bodyPr>
-          <a:lstStyle/>
-          <a:p>
-            <a:pPr algn="ctr">
-              <a:lnSpc>
-                <a:spcPct val="100000"/>
-              </a:lnSpc>
-              <a:spcBef>
-                <a:spcPts val="0"/>
-              </a:spcBef>
-              <a:spcAft>
-                <a:spcPts val="0"/>
-              </a:spcAft>
-            </a:pPr>
-            <a:r>
-              <a:rPr sz="1300" b="1" i="0">
-                <a:solidFill>
-                  <a:srgbClr val="FFFFFF"/>
-                </a:solidFill>
-                <a:latin typeface="Helvetica Neue"/>
-                <a:ea typeface="Hiragino Sans GB"/>
-              </a:rPr>
-              <a:t>2</a:t>
-            </a:r>
-          </a:p>
-        </p:txBody>
-      </p:sp>
-      <p:sp>
-        <p:nvSpPr>
-          <p:cNvPr id="15" name="TextBox 14"/>
-          <p:cNvSpPr txBox="1"/>
-          <p:nvPr/>
-        </p:nvSpPr>
-        <p:spPr>
-          <a:xfrm>
-            <a:off x="1005840" y="2636520"/>
-            <a:ext cx="2958592" cy="274320"/>
-          </a:xfrm>
-          <a:prstGeom prst="rect">
-            <a:avLst/>
-          </a:prstGeom>
-          <a:noFill/>
-          <a:ln/>
-        </p:spPr>
-        <p:txBody>
-          <a:bodyPr wrap="square" anchor="t" lIns="25400" rIns="25400" tIns="25400" bIns="25400">
-            <a:spAutoFit/>
-          </a:bodyPr>
-          <a:lstStyle/>
-          <a:p>
-            <a:pPr algn="l">
-              <a:lnSpc>
-                <a:spcPct val="100000"/>
-              </a:lnSpc>
-              <a:spcBef>
-                <a:spcPts val="0"/>
-              </a:spcBef>
-              <a:spcAft>
-                <a:spcPts val="0"/>
-              </a:spcAft>
-            </a:pPr>
-            <a:r>
-              <a:rPr sz="1250" b="1" i="0">
-                <a:solidFill>
-                  <a:srgbClr val="1C1D22"/>
-                </a:solidFill>
-                <a:latin typeface="Helvetica Neue"/>
-                <a:ea typeface="Hiragino Sans GB"/>
-              </a:rPr>
-              <a:t>Dot products blow up</a:t>
-            </a:r>
-          </a:p>
-        </p:txBody>
-      </p:sp>
-      <p:sp>
-        <p:nvSpPr>
-          <p:cNvPr id="16" name="TextBox 15"/>
-          <p:cNvSpPr txBox="1"/>
-          <p:nvPr/>
-        </p:nvSpPr>
-        <p:spPr>
-          <a:xfrm>
-            <a:off x="1005840" y="2901695"/>
-            <a:ext cx="2958592" cy="310896"/>
-          </a:xfrm>
-          <a:prstGeom prst="rect">
-            <a:avLst/>
-          </a:prstGeom>
-          <a:noFill/>
-          <a:ln/>
-        </p:spPr>
-        <p:txBody>
-          <a:bodyPr wrap="square" anchor="t" lIns="25400" rIns="25400" tIns="25400" bIns="25400">
-            <a:spAutoFit/>
-          </a:bodyPr>
-          <a:lstStyle/>
-          <a:p>
-            <a:pPr algn="l">
-              <a:lnSpc>
-                <a:spcPct val="105000"/>
-              </a:lnSpc>
-              <a:spcBef>
-                <a:spcPts val="0"/>
-              </a:spcBef>
-              <a:spcAft>
-                <a:spcPts val="0"/>
-              </a:spcAft>
-            </a:pPr>
-            <a:r>
-              <a:rPr sz="1050" b="0" i="0">
-                <a:solidFill>
-                  <a:srgbClr val="5A5E68"/>
-                </a:solidFill>
-                <a:latin typeface="Helvetica Neue"/>
-                <a:ea typeface="Hiragino Sans GB"/>
-              </a:rPr>
-              <a:t>Softmax slides into saturation and dumps nearly all weight on one key</a:t>
-            </a:r>
-          </a:p>
-        </p:txBody>
-      </p:sp>
-      <p:sp>
-        <p:nvSpPr>
-          <p:cNvPr id="17" name="Rounded Rectangle 16"/>
-          <p:cNvSpPr/>
-          <p:nvPr/>
-        </p:nvSpPr>
-        <p:spPr>
-          <a:xfrm>
-            <a:off x="566928" y="3340608"/>
-            <a:ext cx="310896" cy="310896"/>
-          </a:xfrm>
-          <a:prstGeom prst="roundRect">
-            <a:avLst>
-              <a:gd name="adj" fmla="val 50000"/>
-            </a:avLst>
-          </a:prstGeom>
-          <a:solidFill>
-            <a:srgbClr val="2A3F57"/>
-          </a:solidFill>
-          <a:ln>
-            <a:noFill/>
-          </a:ln>
-          <a:effectLst/>
-        </p:spPr>
-        <p:style>
-          <a:lnRef idx="1">
-            <a:schemeClr val="accent1"/>
-          </a:lnRef>
-          <a:fillRef idx="3">
-            <a:schemeClr val="accent1"/>
-          </a:fillRef>
-          <a:effectRef idx="2">
-            <a:schemeClr val="accent1"/>
-          </a:effectRef>
-          <a:fontRef idx="minor">
-            <a:schemeClr val="lt1"/>
-          </a:fontRef>
-        </p:style>
-        <p:txBody>
-          <a:bodyPr rtlCol="0" anchor="ctr"/>
-          <a:lstStyle/>
-          <a:p>
-            <a:pPr algn="ctr"/>
-          </a:p>
-        </p:txBody>
-      </p:sp>
-      <p:sp>
-        <p:nvSpPr>
-          <p:cNvPr id="18" name="TextBox 17"/>
-          <p:cNvSpPr txBox="1"/>
-          <p:nvPr/>
-        </p:nvSpPr>
-        <p:spPr>
-          <a:xfrm>
-            <a:off x="566928" y="3340608"/>
-            <a:ext cx="310896" cy="310896"/>
-          </a:xfrm>
-          <a:prstGeom prst="rect">
-            <a:avLst/>
-          </a:prstGeom>
-          <a:noFill/>
-          <a:ln/>
-        </p:spPr>
-        <p:txBody>
-          <a:bodyPr wrap="square" anchor="ctr" lIns="25400" rIns="25400" tIns="25400" bIns="25400">
-            <a:spAutoFit/>
-          </a:bodyPr>
-          <a:lstStyle/>
-          <a:p>
-            <a:pPr algn="ctr">
-              <a:lnSpc>
-                <a:spcPct val="100000"/>
-              </a:lnSpc>
-              <a:spcBef>
-                <a:spcPts val="0"/>
-              </a:spcBef>
-              <a:spcAft>
-                <a:spcPts val="0"/>
-              </a:spcAft>
-            </a:pPr>
-            <a:r>
-              <a:rPr sz="1300" b="1" i="0">
-                <a:solidFill>
-                  <a:srgbClr val="FFFFFF"/>
-                </a:solidFill>
-                <a:latin typeface="Helvetica Neue"/>
-                <a:ea typeface="Hiragino Sans GB"/>
-              </a:rPr>
-              <a:t>3</a:t>
-            </a:r>
-          </a:p>
-        </p:txBody>
-      </p:sp>
-      <p:sp>
-        <p:nvSpPr>
-          <p:cNvPr id="19" name="TextBox 18"/>
-          <p:cNvSpPr txBox="1"/>
-          <p:nvPr/>
-        </p:nvSpPr>
-        <p:spPr>
-          <a:xfrm>
-            <a:off x="1005840" y="3313176"/>
-            <a:ext cx="2958592" cy="274320"/>
-          </a:xfrm>
-          <a:prstGeom prst="rect">
-            <a:avLst/>
-          </a:prstGeom>
-          <a:noFill/>
-          <a:ln/>
-        </p:spPr>
-        <p:txBody>
-          <a:bodyPr wrap="square" anchor="t" lIns="25400" rIns="25400" tIns="25400" bIns="25400">
-            <a:spAutoFit/>
-          </a:bodyPr>
-          <a:lstStyle/>
-          <a:p>
-            <a:pPr algn="l">
-              <a:lnSpc>
-                <a:spcPct val="100000"/>
-              </a:lnSpc>
-              <a:spcBef>
-                <a:spcPts val="0"/>
-              </a:spcBef>
-              <a:spcAft>
-                <a:spcPts val="0"/>
-              </a:spcAft>
-            </a:pPr>
-            <a:r>
-              <a:rPr sz="1250" b="1" i="0">
-                <a:solidFill>
-                  <a:srgbClr val="1C1D22"/>
-                </a:solidFill>
-                <a:latin typeface="Helvetica Neue"/>
-                <a:ea typeface="Hiragino Sans GB"/>
-              </a:rPr>
-              <a:t>Gradients vanish</a:t>
-            </a:r>
-          </a:p>
-        </p:txBody>
-      </p:sp>
-      <p:sp>
-        <p:nvSpPr>
-          <p:cNvPr id="20" name="TextBox 19"/>
-          <p:cNvSpPr txBox="1"/>
-          <p:nvPr/>
-        </p:nvSpPr>
-        <p:spPr>
-          <a:xfrm>
-            <a:off x="1005840" y="3578352"/>
-            <a:ext cx="2958592" cy="310896"/>
-          </a:xfrm>
-          <a:prstGeom prst="rect">
-            <a:avLst/>
-          </a:prstGeom>
-          <a:noFill/>
-          <a:ln/>
-        </p:spPr>
-        <p:txBody>
-          <a:bodyPr wrap="square" anchor="t" lIns="25400" rIns="25400" tIns="25400" bIns="25400">
-            <a:spAutoFit/>
-          </a:bodyPr>
-          <a:lstStyle/>
-          <a:p>
-            <a:pPr algn="l">
-              <a:lnSpc>
-                <a:spcPct val="105000"/>
-              </a:lnSpc>
-              <a:spcBef>
-                <a:spcPts val="0"/>
-              </a:spcBef>
-              <a:spcAft>
-                <a:spcPts val="0"/>
-              </a:spcAft>
-            </a:pPr>
-            <a:r>
-              <a:rPr sz="1050" b="0" i="0">
-                <a:solidFill>
-                  <a:srgbClr val="5A5E68"/>
-                </a:solidFill>
-                <a:latin typeface="Helvetica Neue"/>
-                <a:ea typeface="Hiragino Sans GB"/>
-              </a:rPr>
-              <a:t>Backprop can't learn — training stalls</a:t>
-            </a:r>
-          </a:p>
-        </p:txBody>
-      </p:sp>
-      <p:sp>
-        <p:nvSpPr>
-          <p:cNvPr id="21" name="Rounded Rectangle 20"/>
-          <p:cNvSpPr/>
-          <p:nvPr/>
-        </p:nvSpPr>
-        <p:spPr>
-          <a:xfrm>
-            <a:off x="566928" y="4017264"/>
-            <a:ext cx="310896" cy="310896"/>
-          </a:xfrm>
-          <a:prstGeom prst="roundRect">
-            <a:avLst>
-              <a:gd name="adj" fmla="val 50000"/>
-            </a:avLst>
-          </a:prstGeom>
-          <a:solidFill>
-            <a:srgbClr val="B84020"/>
-          </a:solidFill>
-          <a:ln>
-            <a:noFill/>
-          </a:ln>
-          <a:effectLst/>
-        </p:spPr>
-        <p:style>
-          <a:lnRef idx="1">
-            <a:schemeClr val="accent1"/>
-          </a:lnRef>
-          <a:fillRef idx="3">
-            <a:schemeClr val="accent1"/>
-          </a:fillRef>
-          <a:effectRef idx="2">
-            <a:schemeClr val="accent1"/>
-          </a:effectRef>
-          <a:fontRef idx="minor">
-            <a:schemeClr val="lt1"/>
-          </a:fontRef>
-        </p:style>
-        <p:txBody>
-          <a:bodyPr rtlCol="0" anchor="ctr"/>
-          <a:lstStyle/>
-          <a:p>
-            <a:pPr algn="ctr"/>
-          </a:p>
-        </p:txBody>
-      </p:sp>
-      <p:sp>
-        <p:nvSpPr>
-          <p:cNvPr id="22" name="TextBox 21"/>
-          <p:cNvSpPr txBox="1"/>
-          <p:nvPr/>
-        </p:nvSpPr>
-        <p:spPr>
-          <a:xfrm>
-            <a:off x="566928" y="4017264"/>
-            <a:ext cx="310896" cy="310896"/>
-          </a:xfrm>
-          <a:prstGeom prst="rect">
-            <a:avLst/>
-          </a:prstGeom>
-          <a:noFill/>
-          <a:ln/>
-        </p:spPr>
-        <p:txBody>
-          <a:bodyPr wrap="square" anchor="ctr" lIns="25400" rIns="25400" tIns="25400" bIns="25400">
-            <a:spAutoFit/>
-          </a:bodyPr>
-          <a:lstStyle/>
-          <a:p>
-            <a:pPr algn="ctr">
-              <a:lnSpc>
-                <a:spcPct val="100000"/>
-              </a:lnSpc>
-              <a:spcBef>
-                <a:spcPts val="0"/>
-              </a:spcBef>
-              <a:spcAft>
-                <a:spcPts val="0"/>
-              </a:spcAft>
-            </a:pPr>
-            <a:r>
-              <a:rPr sz="1300" b="1" i="0">
-                <a:solidFill>
-                  <a:srgbClr val="FFFFFF"/>
-                </a:solidFill>
-                <a:latin typeface="Helvetica Neue"/>
-                <a:ea typeface="Hiragino Sans GB"/>
-              </a:rPr>
-              <a:t>4</a:t>
-            </a:r>
-          </a:p>
-        </p:txBody>
-      </p:sp>
-      <p:sp>
-        <p:nvSpPr>
-          <p:cNvPr id="23" name="TextBox 22"/>
-          <p:cNvSpPr txBox="1"/>
-          <p:nvPr/>
-        </p:nvSpPr>
-        <p:spPr>
-          <a:xfrm>
-            <a:off x="1005840" y="3989832"/>
-            <a:ext cx="2958592" cy="274320"/>
-          </a:xfrm>
-          <a:prstGeom prst="rect">
-            <a:avLst/>
-          </a:prstGeom>
-          <a:noFill/>
-          <a:ln/>
-        </p:spPr>
-        <p:txBody>
-          <a:bodyPr wrap="square" anchor="t" lIns="25400" rIns="25400" tIns="25400" bIns="25400">
-            <a:spAutoFit/>
-          </a:bodyPr>
-          <a:lstStyle/>
-          <a:p>
-            <a:pPr algn="l">
-              <a:lnSpc>
-                <a:spcPct val="100000"/>
-              </a:lnSpc>
-              <a:spcBef>
-                <a:spcPts val="0"/>
-              </a:spcBef>
-              <a:spcAft>
-                <a:spcPts val="0"/>
-              </a:spcAft>
-            </a:pPr>
-            <a:r>
-              <a:rPr sz="1250" b="1" i="0">
-                <a:solidFill>
-                  <a:srgbClr val="1C1D22"/>
-                </a:solidFill>
-                <a:latin typeface="Helvetica Neue"/>
-                <a:ea typeface="Hiragino Sans GB"/>
-              </a:rPr>
-              <a:t>÷ √dₖ, variance back to ~1</a:t>
-            </a:r>
-          </a:p>
-        </p:txBody>
-      </p:sp>
-      <p:sp>
-        <p:nvSpPr>
-          <p:cNvPr id="24" name="TextBox 23"/>
-          <p:cNvSpPr txBox="1"/>
-          <p:nvPr/>
-        </p:nvSpPr>
-        <p:spPr>
-          <a:xfrm>
-            <a:off x="1005840" y="4255008"/>
-            <a:ext cx="2958592" cy="310896"/>
-          </a:xfrm>
-          <a:prstGeom prst="rect">
-            <a:avLst/>
-          </a:prstGeom>
-          <a:noFill/>
-          <a:ln/>
-        </p:spPr>
-        <p:txBody>
-          <a:bodyPr wrap="square" anchor="t" lIns="25400" rIns="25400" tIns="25400" bIns="25400">
-            <a:spAutoFit/>
-          </a:bodyPr>
-          <a:lstStyle/>
-          <a:p>
-            <a:pPr algn="l">
-              <a:lnSpc>
-                <a:spcPct val="105000"/>
-              </a:lnSpc>
-              <a:spcBef>
-                <a:spcPts val="0"/>
-              </a:spcBef>
-              <a:spcAft>
-                <a:spcPts val="0"/>
-              </a:spcAft>
-            </a:pPr>
-            <a:r>
-              <a:rPr sz="1050" b="0" i="0">
-                <a:solidFill>
-                  <a:srgbClr val="5A5E68"/>
-                </a:solidFill>
-                <a:latin typeface="Helvetica Neue"/>
-                <a:ea typeface="Hiragino Sans GB"/>
-              </a:rPr>
-              <a:t>Flatter distribution, healthy gradients, stable training</a:t>
-            </a:r>
-          </a:p>
-        </p:txBody>
-      </p:sp>
-      <p:sp>
-        <p:nvSpPr>
-          <p:cNvPr id="25" name="TextBox 24"/>
-          <p:cNvSpPr txBox="1"/>
-          <p:nvPr/>
-        </p:nvSpPr>
-        <p:spPr>
-          <a:xfrm>
-            <a:off x="4330192" y="1365503"/>
-            <a:ext cx="4246879" cy="274320"/>
-          </a:xfrm>
-          <a:prstGeom prst="rect">
-            <a:avLst/>
-          </a:prstGeom>
-          <a:noFill/>
-          <a:ln/>
-        </p:spPr>
-        <p:txBody>
-          <a:bodyPr wrap="square" anchor="t" lIns="25400" rIns="25400" tIns="25400" bIns="25400">
-            <a:spAutoFit/>
-          </a:bodyPr>
-          <a:lstStyle/>
-          <a:p>
-            <a:pPr algn="l">
-              <a:lnSpc>
-                <a:spcPct val="100000"/>
-              </a:lnSpc>
-              <a:spcBef>
-                <a:spcPts val="0"/>
-              </a:spcBef>
-              <a:spcAft>
-                <a:spcPts val="0"/>
-              </a:spcAft>
-            </a:pPr>
-            <a:r>
               <a:rPr sz="1050" b="1" i="0">
                 <a:solidFill>
                   <a:srgbClr val="6F6656"/>
@@ -23003,7 +22563,7 @@
       </p:sp>
       <p:graphicFrame>
         <p:nvGraphicFramePr>
-          <p:cNvPr id="26" name="Chart 25"/>
+          <p:cNvPr id="25" name="Chart 24"/>
           <p:cNvGraphicFramePr>
             <a:graphicFrameLocks noGrp="1"/>
           </p:cNvGraphicFramePr>
@@ -23021,7 +22581,7 @@
       </p:graphicFrame>
       <p:sp>
         <p:nvSpPr>
-          <p:cNvPr id="27" name="TextBox 26"/>
+          <p:cNvPr id="26" name="TextBox 25"/>
           <p:cNvSpPr txBox="1"/>
           <p:nvPr/>
         </p:nvSpPr>
@@ -23224,51 +22784,7 @@
       </p:sp>
       <p:sp>
         <p:nvSpPr>
-          <p:cNvPr id="5" name="Rectangle 4"/>
-          <p:cNvSpPr/>
-          <p:nvPr/>
-        </p:nvSpPr>
-        <p:spPr>
-          <a:xfrm>
-            <a:off x="585216" y="1072896"/>
-            <a:ext cx="1097280" cy="45720"/>
-          </a:xfrm>
-          <a:prstGeom prst="rect">
-            <a:avLst/>
-          </a:prstGeom>
-          <a:solidFill>
-            <a:srgbClr val="B84020"/>
-          </a:solidFill>
-          <a:ln>
-            <a:noFill/>
-          </a:ln>
-          <a:effectLst/>
-        </p:spPr>
-        <p:style>
-          <a:lnRef idx="1">
-            <a:schemeClr val="accent1"/>
-          </a:lnRef>
-          <a:fillRef idx="3">
-            <a:schemeClr val="accent1"/>
-          </a:fillRef>
-          <a:effectRef idx="2">
-            <a:schemeClr val="accent1"/>
-          </a:effectRef>
-          <a:fontRef idx="minor">
-            <a:schemeClr val="lt1"/>
-          </a:fontRef>
-        </p:style>
-        <p:txBody>
-          <a:bodyPr rtlCol="0" anchor="ctr"/>
-          <a:lstStyle/>
-          <a:p>
-            <a:pPr algn="ctr"/>
-          </a:p>
-        </p:txBody>
-      </p:sp>
-      <p:sp>
-        <p:nvSpPr>
-          <p:cNvPr id="6" name="TextBox 5"/>
+          <p:cNvPr id="5" name="TextBox 4"/>
           <p:cNvSpPr txBox="1"/>
           <p:nvPr/>
         </p:nvSpPr>
@@ -23315,7 +22831,7 @@
       </p:sp>
       <p:sp>
         <p:nvSpPr>
-          <p:cNvPr id="7" name="TextBox 6"/>
+          <p:cNvPr id="6" name="TextBox 5"/>
           <p:cNvSpPr txBox="1"/>
           <p:nvPr/>
         </p:nvSpPr>
@@ -23362,7 +22878,7 @@
       </p:sp>
       <p:sp>
         <p:nvSpPr>
-          <p:cNvPr id="8" name="Rounded Rectangle 7"/>
+          <p:cNvPr id="7" name="Rounded Rectangle 6"/>
           <p:cNvSpPr/>
           <p:nvPr/>
         </p:nvSpPr>
@@ -23408,7 +22924,7 @@
       </p:sp>
       <p:sp>
         <p:nvSpPr>
-          <p:cNvPr id="9" name="TextBox 8"/>
+          <p:cNvPr id="8" name="TextBox 7"/>
           <p:cNvSpPr txBox="1"/>
           <p:nvPr/>
         </p:nvSpPr>
@@ -23455,7 +22971,7 @@
       </p:sp>
       <p:sp>
         <p:nvSpPr>
-          <p:cNvPr id="10" name="Rounded Rectangle 9"/>
+          <p:cNvPr id="9" name="Rounded Rectangle 8"/>
           <p:cNvSpPr/>
           <p:nvPr/>
         </p:nvSpPr>
@@ -23501,7 +23017,7 @@
       </p:sp>
       <p:sp>
         <p:nvSpPr>
-          <p:cNvPr id="11" name="TextBox 10"/>
+          <p:cNvPr id="10" name="TextBox 9"/>
           <p:cNvSpPr txBox="1"/>
           <p:nvPr/>
         </p:nvSpPr>
@@ -23548,7 +23064,7 @@
       </p:sp>
       <p:sp>
         <p:nvSpPr>
-          <p:cNvPr id="12" name="Rounded Rectangle 11"/>
+          <p:cNvPr id="11" name="Rounded Rectangle 10"/>
           <p:cNvSpPr/>
           <p:nvPr/>
         </p:nvSpPr>
@@ -23594,7 +23110,7 @@
       </p:sp>
       <p:sp>
         <p:nvSpPr>
-          <p:cNvPr id="13" name="TextBox 12"/>
+          <p:cNvPr id="12" name="TextBox 11"/>
           <p:cNvSpPr txBox="1"/>
           <p:nvPr/>
         </p:nvSpPr>
@@ -23641,7 +23157,7 @@
       </p:sp>
       <p:sp>
         <p:nvSpPr>
-          <p:cNvPr id="14" name="TextBox 13"/>
+          <p:cNvPr id="13" name="TextBox 12"/>
           <p:cNvSpPr txBox="1"/>
           <p:nvPr/>
         </p:nvSpPr>
@@ -23688,7 +23204,7 @@
       </p:sp>
       <p:sp>
         <p:nvSpPr>
-          <p:cNvPr id="15" name="Rounded Rectangle 14"/>
+          <p:cNvPr id="14" name="Rounded Rectangle 13"/>
           <p:cNvSpPr/>
           <p:nvPr/>
         </p:nvSpPr>
@@ -23734,7 +23250,7 @@
       </p:sp>
       <p:sp>
         <p:nvSpPr>
-          <p:cNvPr id="16" name="TextBox 15"/>
+          <p:cNvPr id="15" name="TextBox 14"/>
           <p:cNvSpPr txBox="1"/>
           <p:nvPr/>
         </p:nvSpPr>
@@ -23781,7 +23297,7 @@
       </p:sp>
       <p:sp>
         <p:nvSpPr>
-          <p:cNvPr id="17" name="Rounded Rectangle 16"/>
+          <p:cNvPr id="16" name="Rounded Rectangle 15"/>
           <p:cNvSpPr/>
           <p:nvPr/>
         </p:nvSpPr>
@@ -23827,7 +23343,7 @@
       </p:sp>
       <p:sp>
         <p:nvSpPr>
-          <p:cNvPr id="18" name="TextBox 17"/>
+          <p:cNvPr id="17" name="TextBox 16"/>
           <p:cNvSpPr txBox="1"/>
           <p:nvPr/>
         </p:nvSpPr>
@@ -23874,7 +23390,7 @@
       </p:sp>
       <p:sp>
         <p:nvSpPr>
-          <p:cNvPr id="19" name="TextBox 18"/>
+          <p:cNvPr id="18" name="TextBox 17"/>
           <p:cNvSpPr txBox="1"/>
           <p:nvPr/>
         </p:nvSpPr>
@@ -23921,7 +23437,7 @@
       </p:sp>
       <p:sp>
         <p:nvSpPr>
-          <p:cNvPr id="20" name="TextBox 19"/>
+          <p:cNvPr id="19" name="TextBox 18"/>
           <p:cNvSpPr txBox="1"/>
           <p:nvPr/>
         </p:nvSpPr>
@@ -23968,7 +23484,7 @@
       </p:sp>
       <p:pic>
         <p:nvPicPr>
-          <p:cNvPr id="21" name="Picture 20" descr="equation multihead" title="equation multihead"/>
+          <p:cNvPr id="20" name="Picture 19" descr="equation multihead" title="equation multihead"/>
           <p:cNvPicPr>
             <a:picLocks noChangeAspect="1"/>
           </p:cNvPicPr>
@@ -23992,7 +23508,7 @@
       </p:pic>
       <p:sp>
         <p:nvSpPr>
-          <p:cNvPr id="22" name="Rounded Rectangle 21"/>
+          <p:cNvPr id="21" name="Rounded Rectangle 20"/>
           <p:cNvSpPr/>
           <p:nvPr/>
         </p:nvSpPr>
@@ -24040,7 +23556,7 @@
       </p:sp>
       <p:sp>
         <p:nvSpPr>
-          <p:cNvPr id="23" name="Rectangle 22"/>
+          <p:cNvPr id="22" name="Rectangle 21"/>
           <p:cNvSpPr/>
           <p:nvPr/>
         </p:nvSpPr>
@@ -24084,7 +23600,7 @@
       </p:sp>
       <p:sp>
         <p:nvSpPr>
-          <p:cNvPr id="24" name="TextBox 23"/>
+          <p:cNvPr id="23" name="TextBox 22"/>
           <p:cNvSpPr txBox="1"/>
           <p:nvPr/>
         </p:nvSpPr>
@@ -24154,7 +23670,7 @@
       </p:sp>
       <p:sp>
         <p:nvSpPr>
-          <p:cNvPr id="25" name="Rounded Rectangle 24"/>
+          <p:cNvPr id="24" name="Rounded Rectangle 23"/>
           <p:cNvSpPr/>
           <p:nvPr/>
         </p:nvSpPr>
@@ -24202,7 +23718,7 @@
       </p:sp>
       <p:sp>
         <p:nvSpPr>
-          <p:cNvPr id="26" name="Rectangle 25"/>
+          <p:cNvPr id="25" name="Rectangle 24"/>
           <p:cNvSpPr/>
           <p:nvPr/>
         </p:nvSpPr>
@@ -24246,7 +23762,7 @@
       </p:sp>
       <p:sp>
         <p:nvSpPr>
-          <p:cNvPr id="27" name="TextBox 26"/>
+          <p:cNvPr id="26" name="TextBox 25"/>
           <p:cNvSpPr txBox="1"/>
           <p:nvPr/>
         </p:nvSpPr>
@@ -24316,7 +23832,7 @@
       </p:sp>
       <p:sp>
         <p:nvSpPr>
-          <p:cNvPr id="28" name="Rounded Rectangle 27"/>
+          <p:cNvPr id="27" name="Rounded Rectangle 26"/>
           <p:cNvSpPr/>
           <p:nvPr/>
         </p:nvSpPr>
@@ -24364,7 +23880,7 @@
       </p:sp>
       <p:sp>
         <p:nvSpPr>
-          <p:cNvPr id="29" name="Rectangle 28"/>
+          <p:cNvPr id="28" name="Rectangle 27"/>
           <p:cNvSpPr/>
           <p:nvPr/>
         </p:nvSpPr>
@@ -24408,7 +23924,7 @@
       </p:sp>
       <p:sp>
         <p:nvSpPr>
-          <p:cNvPr id="30" name="TextBox 29"/>
+          <p:cNvPr id="29" name="TextBox 28"/>
           <p:cNvSpPr txBox="1"/>
           <p:nvPr/>
         </p:nvSpPr>
@@ -24634,14 +24150,575 @@
       </p:sp>
       <p:sp>
         <p:nvSpPr>
-          <p:cNvPr id="5" name="Rectangle 4"/>
+          <p:cNvPr id="5" name="TextBox 4"/>
+          <p:cNvSpPr txBox="1"/>
+          <p:nvPr/>
+        </p:nvSpPr>
+        <p:spPr>
+          <a:xfrm>
+            <a:off x="7680960" y="4759452"/>
+            <a:ext cx="1097280" cy="274320"/>
+          </a:xfrm>
+          <a:prstGeom prst="rect">
+            <a:avLst/>
+          </a:prstGeom>
+          <a:noFill/>
+          <a:ln/>
+        </p:spPr>
+        <p:txBody>
+          <a:bodyPr wrap="square" anchor="t" lIns="25400" rIns="25400" tIns="25400" bIns="25400">
+            <a:spAutoFit/>
+          </a:bodyPr>
+          <a:lstStyle/>
+          <a:p>
+            <a:pPr algn="r">
+              <a:lnSpc>
+                <a:spcPct val="100000"/>
+              </a:lnSpc>
+              <a:spcBef>
+                <a:spcPts val="0"/>
+              </a:spcBef>
+              <a:spcAft>
+                <a:spcPts val="0"/>
+              </a:spcAft>
+            </a:pPr>
+            <a:r>
+              <a:rPr sz="900" b="1" i="0">
+                <a:solidFill>
+                  <a:srgbClr val="6F6656"/>
+                </a:solidFill>
+                <a:latin typeface="Menlo"/>
+                <a:ea typeface="Hiragino Sans GB"/>
+              </a:rPr>
+              <a:t>09 / 15</a:t>
+            </a:r>
+          </a:p>
+        </p:txBody>
+      </p:sp>
+      <p:sp>
+        <p:nvSpPr>
+          <p:cNvPr id="6" name="TextBox 5"/>
+          <p:cNvSpPr txBox="1"/>
+          <p:nvPr/>
+        </p:nvSpPr>
+        <p:spPr>
+          <a:xfrm>
+            <a:off x="566928" y="4777740"/>
+            <a:ext cx="5486400" cy="274320"/>
+          </a:xfrm>
+          <a:prstGeom prst="rect">
+            <a:avLst/>
+          </a:prstGeom>
+          <a:noFill/>
+          <a:ln/>
+        </p:spPr>
+        <p:txBody>
+          <a:bodyPr wrap="square" anchor="t" lIns="25400" rIns="25400" tIns="25400" bIns="25400">
+            <a:spAutoFit/>
+          </a:bodyPr>
+          <a:lstStyle/>
+          <a:p>
+            <a:pPr algn="l">
+              <a:lnSpc>
+                <a:spcPct val="100000"/>
+              </a:lnSpc>
+              <a:spcBef>
+                <a:spcPts val="0"/>
+              </a:spcBef>
+              <a:spcAft>
+                <a:spcPts val="0"/>
+              </a:spcAft>
+            </a:pPr>
+            <a:r>
+              <a:rPr sz="800" b="0" i="0">
+                <a:solidFill>
+                  <a:srgbClr val="6F6656"/>
+                </a:solidFill>
+                <a:latin typeface="Menlo"/>
+                <a:ea typeface="Hiragino Sans GB"/>
+              </a:rPr>
+              <a:t>ATTENTION IS ALL YOU NEED · PAPER DEEP-DIVE</a:t>
+            </a:r>
+          </a:p>
+        </p:txBody>
+      </p:sp>
+      <p:pic>
+        <p:nvPicPr>
+          <p:cNvPr id="7" name="Picture 6" descr="equation pe" title="equation pe"/>
+          <p:cNvPicPr>
+            <a:picLocks noChangeAspect="1"/>
+          </p:cNvPicPr>
+          <p:nvPr/>
+        </p:nvPicPr>
+        <p:blipFill>
+          <a:blip r:embed="rId2"/>
+          <a:stretch>
+            <a:fillRect/>
+          </a:stretch>
+        </p:blipFill>
+        <p:spPr>
+          <a:xfrm>
+            <a:off x="566928" y="1438656"/>
+            <a:ext cx="3396675" cy="658367"/>
+          </a:xfrm>
+          <a:prstGeom prst="rect">
+            <a:avLst/>
+          </a:prstGeom>
+        </p:spPr>
+      </p:pic>
+      <p:sp>
+        <p:nvSpPr>
+          <p:cNvPr id="8" name="Rounded Rectangle 7"/>
           <p:cNvSpPr/>
           <p:nvPr/>
         </p:nvSpPr>
         <p:spPr>
           <a:xfrm>
-            <a:off x="585216" y="1072896"/>
-            <a:ext cx="1097280" cy="45720"/>
+            <a:off x="585216" y="2453640"/>
+            <a:ext cx="128016" cy="128016"/>
+          </a:xfrm>
+          <a:prstGeom prst="roundRect">
+            <a:avLst>
+              <a:gd name="adj" fmla="val 50000"/>
+            </a:avLst>
+          </a:prstGeom>
+          <a:solidFill>
+            <a:srgbClr val="2A3F57"/>
+          </a:solidFill>
+          <a:ln>
+            <a:noFill/>
+          </a:ln>
+          <a:effectLst/>
+        </p:spPr>
+        <p:style>
+          <a:lnRef idx="1">
+            <a:schemeClr val="accent1"/>
+          </a:lnRef>
+          <a:fillRef idx="3">
+            <a:schemeClr val="accent1"/>
+          </a:fillRef>
+          <a:effectRef idx="2">
+            <a:schemeClr val="accent1"/>
+          </a:effectRef>
+          <a:fontRef idx="minor">
+            <a:schemeClr val="lt1"/>
+          </a:fontRef>
+        </p:style>
+        <p:txBody>
+          <a:bodyPr rtlCol="0" anchor="ctr"/>
+          <a:lstStyle/>
+          <a:p>
+            <a:pPr algn="ctr"/>
+          </a:p>
+        </p:txBody>
+      </p:sp>
+      <p:sp>
+        <p:nvSpPr>
+          <p:cNvPr id="9" name="TextBox 8"/>
+          <p:cNvSpPr txBox="1"/>
+          <p:nvPr/>
+        </p:nvSpPr>
+        <p:spPr>
+          <a:xfrm>
+            <a:off x="841247" y="2398775"/>
+            <a:ext cx="3200399" cy="292608"/>
+          </a:xfrm>
+          <a:prstGeom prst="rect">
+            <a:avLst/>
+          </a:prstGeom>
+          <a:noFill/>
+          <a:ln/>
+        </p:spPr>
+        <p:txBody>
+          <a:bodyPr wrap="square" anchor="t" lIns="25400" rIns="25400" tIns="25400" bIns="25400">
+            <a:spAutoFit/>
+          </a:bodyPr>
+          <a:lstStyle/>
+          <a:p>
+            <a:pPr algn="l">
+              <a:lnSpc>
+                <a:spcPct val="100000"/>
+              </a:lnSpc>
+              <a:spcBef>
+                <a:spcPts val="0"/>
+              </a:spcBef>
+              <a:spcAft>
+                <a:spcPts val="0"/>
+              </a:spcAft>
+            </a:pPr>
+            <a:r>
+              <a:rPr sz="1200" b="0" i="0">
+                <a:solidFill>
+                  <a:srgbClr val="1C1D22"/>
+                </a:solidFill>
+                <a:latin typeface="Helvetica Neue"/>
+                <a:ea typeface="Hiragino Sans GB"/>
+              </a:rPr>
+              <a:t>A different sine / cosine frequency per dimension</a:t>
+            </a:r>
+          </a:p>
+        </p:txBody>
+      </p:sp>
+      <p:sp>
+        <p:nvSpPr>
+          <p:cNvPr id="10" name="Rounded Rectangle 9"/>
+          <p:cNvSpPr/>
+          <p:nvPr/>
+        </p:nvSpPr>
+        <p:spPr>
+          <a:xfrm>
+            <a:off x="585216" y="2874264"/>
+            <a:ext cx="128016" cy="128016"/>
+          </a:xfrm>
+          <a:prstGeom prst="roundRect">
+            <a:avLst>
+              <a:gd name="adj" fmla="val 50000"/>
+            </a:avLst>
+          </a:prstGeom>
+          <a:solidFill>
+            <a:srgbClr val="2A3F57"/>
+          </a:solidFill>
+          <a:ln>
+            <a:noFill/>
+          </a:ln>
+          <a:effectLst/>
+        </p:spPr>
+        <p:style>
+          <a:lnRef idx="1">
+            <a:schemeClr val="accent1"/>
+          </a:lnRef>
+          <a:fillRef idx="3">
+            <a:schemeClr val="accent1"/>
+          </a:fillRef>
+          <a:effectRef idx="2">
+            <a:schemeClr val="accent1"/>
+          </a:effectRef>
+          <a:fontRef idx="minor">
+            <a:schemeClr val="lt1"/>
+          </a:fontRef>
+        </p:style>
+        <p:txBody>
+          <a:bodyPr rtlCol="0" anchor="ctr"/>
+          <a:lstStyle/>
+          <a:p>
+            <a:pPr algn="ctr"/>
+          </a:p>
+        </p:txBody>
+      </p:sp>
+      <p:sp>
+        <p:nvSpPr>
+          <p:cNvPr id="11" name="TextBox 10"/>
+          <p:cNvSpPr txBox="1"/>
+          <p:nvPr/>
+        </p:nvSpPr>
+        <p:spPr>
+          <a:xfrm>
+            <a:off x="841247" y="2819399"/>
+            <a:ext cx="3200399" cy="292608"/>
+          </a:xfrm>
+          <a:prstGeom prst="rect">
+            <a:avLst/>
+          </a:prstGeom>
+          <a:noFill/>
+          <a:ln/>
+        </p:spPr>
+        <p:txBody>
+          <a:bodyPr wrap="square" anchor="t" lIns="25400" rIns="25400" tIns="25400" bIns="25400">
+            <a:spAutoFit/>
+          </a:bodyPr>
+          <a:lstStyle/>
+          <a:p>
+            <a:pPr algn="l">
+              <a:lnSpc>
+                <a:spcPct val="100000"/>
+              </a:lnSpc>
+              <a:spcBef>
+                <a:spcPts val="0"/>
+              </a:spcBef>
+              <a:spcAft>
+                <a:spcPts val="0"/>
+              </a:spcAft>
+            </a:pPr>
+            <a:r>
+              <a:rPr sz="1200" b="0" i="0">
+                <a:solidFill>
+                  <a:srgbClr val="1C1D22"/>
+                </a:solidFill>
+                <a:latin typeface="Helvetica Neue"/>
+                <a:ea typeface="Hiragino Sans GB"/>
+              </a:rPr>
+              <a:t>Relative position falls out of a linear transform</a:t>
+            </a:r>
+          </a:p>
+        </p:txBody>
+      </p:sp>
+      <p:sp>
+        <p:nvSpPr>
+          <p:cNvPr id="12" name="Rounded Rectangle 11"/>
+          <p:cNvSpPr/>
+          <p:nvPr/>
+        </p:nvSpPr>
+        <p:spPr>
+          <a:xfrm>
+            <a:off x="585216" y="3294887"/>
+            <a:ext cx="128016" cy="128016"/>
+          </a:xfrm>
+          <a:prstGeom prst="roundRect">
+            <a:avLst>
+              <a:gd name="adj" fmla="val 50000"/>
+            </a:avLst>
+          </a:prstGeom>
+          <a:solidFill>
+            <a:srgbClr val="2A3F57"/>
+          </a:solidFill>
+          <a:ln>
+            <a:noFill/>
+          </a:ln>
+          <a:effectLst/>
+        </p:spPr>
+        <p:style>
+          <a:lnRef idx="1">
+            <a:schemeClr val="accent1"/>
+          </a:lnRef>
+          <a:fillRef idx="3">
+            <a:schemeClr val="accent1"/>
+          </a:fillRef>
+          <a:effectRef idx="2">
+            <a:schemeClr val="accent1"/>
+          </a:effectRef>
+          <a:fontRef idx="minor">
+            <a:schemeClr val="lt1"/>
+          </a:fontRef>
+        </p:style>
+        <p:txBody>
+          <a:bodyPr rtlCol="0" anchor="ctr"/>
+          <a:lstStyle/>
+          <a:p>
+            <a:pPr algn="ctr"/>
+          </a:p>
+        </p:txBody>
+      </p:sp>
+      <p:sp>
+        <p:nvSpPr>
+          <p:cNvPr id="13" name="TextBox 12"/>
+          <p:cNvSpPr txBox="1"/>
+          <p:nvPr/>
+        </p:nvSpPr>
+        <p:spPr>
+          <a:xfrm>
+            <a:off x="841247" y="3240023"/>
+            <a:ext cx="3200399" cy="292608"/>
+          </a:xfrm>
+          <a:prstGeom prst="rect">
+            <a:avLst/>
+          </a:prstGeom>
+          <a:noFill/>
+          <a:ln/>
+        </p:spPr>
+        <p:txBody>
+          <a:bodyPr wrap="square" anchor="t" lIns="25400" rIns="25400" tIns="25400" bIns="25400">
+            <a:spAutoFit/>
+          </a:bodyPr>
+          <a:lstStyle/>
+          <a:p>
+            <a:pPr algn="l">
+              <a:lnSpc>
+                <a:spcPct val="100000"/>
+              </a:lnSpc>
+              <a:spcBef>
+                <a:spcPts val="0"/>
+              </a:spcBef>
+              <a:spcAft>
+                <a:spcPts val="0"/>
+              </a:spcAft>
+            </a:pPr>
+            <a:r>
+              <a:rPr sz="1200" b="0" i="0">
+                <a:solidFill>
+                  <a:srgbClr val="1C1D22"/>
+                </a:solidFill>
+                <a:latin typeface="Helvetica Neue"/>
+                <a:ea typeface="Hiragino Sans GB"/>
+              </a:rPr>
+              <a:t>Extrapolates to sequences longer than seen in training</a:t>
+            </a:r>
+          </a:p>
+        </p:txBody>
+      </p:sp>
+      <p:sp>
+        <p:nvSpPr>
+          <p:cNvPr id="14" name="TextBox 13"/>
+          <p:cNvSpPr txBox="1"/>
+          <p:nvPr/>
+        </p:nvSpPr>
+        <p:spPr>
+          <a:xfrm>
+            <a:off x="4407407" y="1365503"/>
+            <a:ext cx="4169663" cy="274320"/>
+          </a:xfrm>
+          <a:prstGeom prst="rect">
+            <a:avLst/>
+          </a:prstGeom>
+          <a:noFill/>
+          <a:ln/>
+        </p:spPr>
+        <p:txBody>
+          <a:bodyPr wrap="square" anchor="t" lIns="25400" rIns="25400" tIns="25400" bIns="25400">
+            <a:spAutoFit/>
+          </a:bodyPr>
+          <a:lstStyle/>
+          <a:p>
+            <a:pPr algn="l">
+              <a:lnSpc>
+                <a:spcPct val="100000"/>
+              </a:lnSpc>
+              <a:spcBef>
+                <a:spcPts val="0"/>
+              </a:spcBef>
+              <a:spcAft>
+                <a:spcPts val="0"/>
+              </a:spcAft>
+            </a:pPr>
+            <a:r>
+              <a:rPr sz="1100" b="1" i="0">
+                <a:solidFill>
+                  <a:srgbClr val="6F6656"/>
+                </a:solidFill>
+                <a:latin typeface="Helvetica Neue"/>
+                <a:ea typeface="Hiragino Sans GB"/>
+              </a:rPr>
+              <a:t>Positional encoding matrix (computed: position × dimension)</a:t>
+            </a:r>
+          </a:p>
+        </p:txBody>
+      </p:sp>
+      <p:pic>
+        <p:nvPicPr>
+          <p:cNvPr id="15" name="Picture 14" descr="positional encoding heatmap" title="positional encoding heatmap"/>
+          <p:cNvPicPr>
+            <a:picLocks noChangeAspect="1"/>
+          </p:cNvPicPr>
+          <p:nvPr/>
+        </p:nvPicPr>
+        <p:blipFill>
+          <a:blip r:embed="rId3"/>
+          <a:stretch>
+            <a:fillRect/>
+          </a:stretch>
+        </p:blipFill>
+        <p:spPr>
+          <a:xfrm>
+            <a:off x="4407407" y="1694687"/>
+            <a:ext cx="4169663" cy="1886934"/>
+          </a:xfrm>
+          <a:prstGeom prst="rect">
+            <a:avLst/>
+          </a:prstGeom>
+        </p:spPr>
+      </p:pic>
+      <p:sp>
+        <p:nvSpPr>
+          <p:cNvPr id="16" name="TextBox 15"/>
+          <p:cNvSpPr txBox="1"/>
+          <p:nvPr/>
+        </p:nvSpPr>
+        <p:spPr>
+          <a:xfrm>
+            <a:off x="4407407" y="3654774"/>
+            <a:ext cx="4169663" cy="219456"/>
+          </a:xfrm>
+          <a:prstGeom prst="rect">
+            <a:avLst/>
+          </a:prstGeom>
+          <a:noFill/>
+          <a:ln/>
+        </p:spPr>
+        <p:txBody>
+          <a:bodyPr wrap="square" anchor="t" lIns="25400" rIns="25400" tIns="25400" bIns="25400">
+            <a:spAutoFit/>
+          </a:bodyPr>
+          <a:lstStyle/>
+          <a:p>
+            <a:pPr algn="l">
+              <a:lnSpc>
+                <a:spcPct val="112000"/>
+              </a:lnSpc>
+              <a:spcBef>
+                <a:spcPts val="0"/>
+              </a:spcBef>
+              <a:spcAft>
+                <a:spcPts val="0"/>
+              </a:spcAft>
+            </a:pPr>
+            <a:r>
+              <a:rPr sz="1100" b="0" i="0">
+                <a:solidFill>
+                  <a:srgbClr val="5A5E68"/>
+                </a:solidFill>
+                <a:latin typeface="Helvetica Neue"/>
+                <a:ea typeface="Hiragino Sans GB"/>
+              </a:rPr>
+              <a:t>Low dims cycle fast, high dims drift slowly.</a:t>
+            </a:r>
+          </a:p>
+        </p:txBody>
+      </p:sp>
+      <p:sp>
+        <p:nvSpPr>
+          <p:cNvPr id="17" name="Rounded Rectangle 16"/>
+          <p:cNvSpPr/>
+          <p:nvPr/>
+        </p:nvSpPr>
+        <p:spPr>
+          <a:xfrm>
+            <a:off x="566928" y="4050791"/>
+            <a:ext cx="8010144" cy="498347"/>
+          </a:xfrm>
+          <a:prstGeom prst="roundRect">
+            <a:avLst>
+              <a:gd name="adj" fmla="val 8000"/>
+            </a:avLst>
+          </a:prstGeom>
+          <a:solidFill>
+            <a:srgbClr val="EAF3FA"/>
+          </a:solidFill>
+          <a:ln>
+            <a:noFill/>
+          </a:ln>
+          <a:effectLst/>
+        </p:spPr>
+        <p:style>
+          <a:lnRef idx="1">
+            <a:schemeClr val="accent1"/>
+          </a:lnRef>
+          <a:fillRef idx="3">
+            <a:schemeClr val="accent1"/>
+          </a:fillRef>
+          <a:effectRef idx="2">
+            <a:schemeClr val="accent1"/>
+          </a:effectRef>
+          <a:fontRef idx="minor">
+            <a:schemeClr val="lt1"/>
+          </a:fontRef>
+        </p:style>
+        <p:txBody>
+          <a:bodyPr rtlCol="0" anchor="ctr"/>
+          <a:lstStyle/>
+          <a:p>
+            <a:pPr algn="ctr"/>
+          </a:p>
+        </p:txBody>
+      </p:sp>
+      <p:sp>
+        <p:nvSpPr>
+          <p:cNvPr id="18" name="Rectangle 17"/>
+          <p:cNvSpPr/>
+          <p:nvPr/>
+        </p:nvSpPr>
+        <p:spPr>
+          <a:xfrm>
+            <a:off x="566928" y="4090659"/>
+            <a:ext cx="64008" cy="418612"/>
           </a:xfrm>
           <a:prstGeom prst="rect">
             <a:avLst/>
@@ -24678,612 +24755,7 @@
       </p:sp>
       <p:sp>
         <p:nvSpPr>
-          <p:cNvPr id="6" name="TextBox 5"/>
-          <p:cNvSpPr txBox="1"/>
-          <p:nvPr/>
-        </p:nvSpPr>
-        <p:spPr>
-          <a:xfrm>
-            <a:off x="7680960" y="4759452"/>
-            <a:ext cx="1097280" cy="274320"/>
-          </a:xfrm>
-          <a:prstGeom prst="rect">
-            <a:avLst/>
-          </a:prstGeom>
-          <a:noFill/>
-          <a:ln/>
-        </p:spPr>
-        <p:txBody>
-          <a:bodyPr wrap="square" anchor="t" lIns="25400" rIns="25400" tIns="25400" bIns="25400">
-            <a:spAutoFit/>
-          </a:bodyPr>
-          <a:lstStyle/>
-          <a:p>
-            <a:pPr algn="r">
-              <a:lnSpc>
-                <a:spcPct val="100000"/>
-              </a:lnSpc>
-              <a:spcBef>
-                <a:spcPts val="0"/>
-              </a:spcBef>
-              <a:spcAft>
-                <a:spcPts val="0"/>
-              </a:spcAft>
-            </a:pPr>
-            <a:r>
-              <a:rPr sz="900" b="1" i="0">
-                <a:solidFill>
-                  <a:srgbClr val="6F6656"/>
-                </a:solidFill>
-                <a:latin typeface="Menlo"/>
-                <a:ea typeface="Hiragino Sans GB"/>
-              </a:rPr>
-              <a:t>09 / 15</a:t>
-            </a:r>
-          </a:p>
-        </p:txBody>
-      </p:sp>
-      <p:sp>
-        <p:nvSpPr>
-          <p:cNvPr id="7" name="TextBox 6"/>
-          <p:cNvSpPr txBox="1"/>
-          <p:nvPr/>
-        </p:nvSpPr>
-        <p:spPr>
-          <a:xfrm>
-            <a:off x="566928" y="4777740"/>
-            <a:ext cx="5486400" cy="274320"/>
-          </a:xfrm>
-          <a:prstGeom prst="rect">
-            <a:avLst/>
-          </a:prstGeom>
-          <a:noFill/>
-          <a:ln/>
-        </p:spPr>
-        <p:txBody>
-          <a:bodyPr wrap="square" anchor="t" lIns="25400" rIns="25400" tIns="25400" bIns="25400">
-            <a:spAutoFit/>
-          </a:bodyPr>
-          <a:lstStyle/>
-          <a:p>
-            <a:pPr algn="l">
-              <a:lnSpc>
-                <a:spcPct val="100000"/>
-              </a:lnSpc>
-              <a:spcBef>
-                <a:spcPts val="0"/>
-              </a:spcBef>
-              <a:spcAft>
-                <a:spcPts val="0"/>
-              </a:spcAft>
-            </a:pPr>
-            <a:r>
-              <a:rPr sz="800" b="0" i="0">
-                <a:solidFill>
-                  <a:srgbClr val="6F6656"/>
-                </a:solidFill>
-                <a:latin typeface="Menlo"/>
-                <a:ea typeface="Hiragino Sans GB"/>
-              </a:rPr>
-              <a:t>ATTENTION IS ALL YOU NEED · PAPER DEEP-DIVE</a:t>
-            </a:r>
-          </a:p>
-        </p:txBody>
-      </p:sp>
-      <p:pic>
-        <p:nvPicPr>
-          <p:cNvPr id="8" name="Picture 7" descr="equation pe" title="equation pe"/>
-          <p:cNvPicPr>
-            <a:picLocks noChangeAspect="1"/>
-          </p:cNvPicPr>
-          <p:nvPr/>
-        </p:nvPicPr>
-        <p:blipFill>
-          <a:blip r:embed="rId2"/>
-          <a:stretch>
-            <a:fillRect/>
-          </a:stretch>
-        </p:blipFill>
-        <p:spPr>
-          <a:xfrm>
-            <a:off x="566928" y="1438656"/>
-            <a:ext cx="3396675" cy="658367"/>
-          </a:xfrm>
-          <a:prstGeom prst="rect">
-            <a:avLst/>
-          </a:prstGeom>
-        </p:spPr>
-      </p:pic>
-      <p:sp>
-        <p:nvSpPr>
-          <p:cNvPr id="9" name="Rounded Rectangle 8"/>
-          <p:cNvSpPr/>
-          <p:nvPr/>
-        </p:nvSpPr>
-        <p:spPr>
-          <a:xfrm>
-            <a:off x="585216" y="2453640"/>
-            <a:ext cx="128016" cy="128016"/>
-          </a:xfrm>
-          <a:prstGeom prst="roundRect">
-            <a:avLst>
-              <a:gd name="adj" fmla="val 50000"/>
-            </a:avLst>
-          </a:prstGeom>
-          <a:solidFill>
-            <a:srgbClr val="2A3F57"/>
-          </a:solidFill>
-          <a:ln>
-            <a:noFill/>
-          </a:ln>
-          <a:effectLst/>
-        </p:spPr>
-        <p:style>
-          <a:lnRef idx="1">
-            <a:schemeClr val="accent1"/>
-          </a:lnRef>
-          <a:fillRef idx="3">
-            <a:schemeClr val="accent1"/>
-          </a:fillRef>
-          <a:effectRef idx="2">
-            <a:schemeClr val="accent1"/>
-          </a:effectRef>
-          <a:fontRef idx="minor">
-            <a:schemeClr val="lt1"/>
-          </a:fontRef>
-        </p:style>
-        <p:txBody>
-          <a:bodyPr rtlCol="0" anchor="ctr"/>
-          <a:lstStyle/>
-          <a:p>
-            <a:pPr algn="ctr"/>
-          </a:p>
-        </p:txBody>
-      </p:sp>
-      <p:sp>
-        <p:nvSpPr>
-          <p:cNvPr id="10" name="TextBox 9"/>
-          <p:cNvSpPr txBox="1"/>
-          <p:nvPr/>
-        </p:nvSpPr>
-        <p:spPr>
-          <a:xfrm>
-            <a:off x="841247" y="2398775"/>
-            <a:ext cx="3200399" cy="292608"/>
-          </a:xfrm>
-          <a:prstGeom prst="rect">
-            <a:avLst/>
-          </a:prstGeom>
-          <a:noFill/>
-          <a:ln/>
-        </p:spPr>
-        <p:txBody>
-          <a:bodyPr wrap="square" anchor="t" lIns="25400" rIns="25400" tIns="25400" bIns="25400">
-            <a:spAutoFit/>
-          </a:bodyPr>
-          <a:lstStyle/>
-          <a:p>
-            <a:pPr algn="l">
-              <a:lnSpc>
-                <a:spcPct val="100000"/>
-              </a:lnSpc>
-              <a:spcBef>
-                <a:spcPts val="0"/>
-              </a:spcBef>
-              <a:spcAft>
-                <a:spcPts val="0"/>
-              </a:spcAft>
-            </a:pPr>
-            <a:r>
-              <a:rPr sz="1200" b="0" i="0">
-                <a:solidFill>
-                  <a:srgbClr val="1C1D22"/>
-                </a:solidFill>
-                <a:latin typeface="Helvetica Neue"/>
-                <a:ea typeface="Hiragino Sans GB"/>
-              </a:rPr>
-              <a:t>A different sine / cosine frequency per dimension</a:t>
-            </a:r>
-          </a:p>
-        </p:txBody>
-      </p:sp>
-      <p:sp>
-        <p:nvSpPr>
-          <p:cNvPr id="11" name="Rounded Rectangle 10"/>
-          <p:cNvSpPr/>
-          <p:nvPr/>
-        </p:nvSpPr>
-        <p:spPr>
-          <a:xfrm>
-            <a:off x="585216" y="2874264"/>
-            <a:ext cx="128016" cy="128016"/>
-          </a:xfrm>
-          <a:prstGeom prst="roundRect">
-            <a:avLst>
-              <a:gd name="adj" fmla="val 50000"/>
-            </a:avLst>
-          </a:prstGeom>
-          <a:solidFill>
-            <a:srgbClr val="2A3F57"/>
-          </a:solidFill>
-          <a:ln>
-            <a:noFill/>
-          </a:ln>
-          <a:effectLst/>
-        </p:spPr>
-        <p:style>
-          <a:lnRef idx="1">
-            <a:schemeClr val="accent1"/>
-          </a:lnRef>
-          <a:fillRef idx="3">
-            <a:schemeClr val="accent1"/>
-          </a:fillRef>
-          <a:effectRef idx="2">
-            <a:schemeClr val="accent1"/>
-          </a:effectRef>
-          <a:fontRef idx="minor">
-            <a:schemeClr val="lt1"/>
-          </a:fontRef>
-        </p:style>
-        <p:txBody>
-          <a:bodyPr rtlCol="0" anchor="ctr"/>
-          <a:lstStyle/>
-          <a:p>
-            <a:pPr algn="ctr"/>
-          </a:p>
-        </p:txBody>
-      </p:sp>
-      <p:sp>
-        <p:nvSpPr>
-          <p:cNvPr id="12" name="TextBox 11"/>
-          <p:cNvSpPr txBox="1"/>
-          <p:nvPr/>
-        </p:nvSpPr>
-        <p:spPr>
-          <a:xfrm>
-            <a:off x="841247" y="2819399"/>
-            <a:ext cx="3200399" cy="292608"/>
-          </a:xfrm>
-          <a:prstGeom prst="rect">
-            <a:avLst/>
-          </a:prstGeom>
-          <a:noFill/>
-          <a:ln/>
-        </p:spPr>
-        <p:txBody>
-          <a:bodyPr wrap="square" anchor="t" lIns="25400" rIns="25400" tIns="25400" bIns="25400">
-            <a:spAutoFit/>
-          </a:bodyPr>
-          <a:lstStyle/>
-          <a:p>
-            <a:pPr algn="l">
-              <a:lnSpc>
-                <a:spcPct val="100000"/>
-              </a:lnSpc>
-              <a:spcBef>
-                <a:spcPts val="0"/>
-              </a:spcBef>
-              <a:spcAft>
-                <a:spcPts val="0"/>
-              </a:spcAft>
-            </a:pPr>
-            <a:r>
-              <a:rPr sz="1200" b="0" i="0">
-                <a:solidFill>
-                  <a:srgbClr val="1C1D22"/>
-                </a:solidFill>
-                <a:latin typeface="Helvetica Neue"/>
-                <a:ea typeface="Hiragino Sans GB"/>
-              </a:rPr>
-              <a:t>Relative position falls out of a linear transform</a:t>
-            </a:r>
-          </a:p>
-        </p:txBody>
-      </p:sp>
-      <p:sp>
-        <p:nvSpPr>
-          <p:cNvPr id="13" name="Rounded Rectangle 12"/>
-          <p:cNvSpPr/>
-          <p:nvPr/>
-        </p:nvSpPr>
-        <p:spPr>
-          <a:xfrm>
-            <a:off x="585216" y="3294887"/>
-            <a:ext cx="128016" cy="128016"/>
-          </a:xfrm>
-          <a:prstGeom prst="roundRect">
-            <a:avLst>
-              <a:gd name="adj" fmla="val 50000"/>
-            </a:avLst>
-          </a:prstGeom>
-          <a:solidFill>
-            <a:srgbClr val="2A3F57"/>
-          </a:solidFill>
-          <a:ln>
-            <a:noFill/>
-          </a:ln>
-          <a:effectLst/>
-        </p:spPr>
-        <p:style>
-          <a:lnRef idx="1">
-            <a:schemeClr val="accent1"/>
-          </a:lnRef>
-          <a:fillRef idx="3">
-            <a:schemeClr val="accent1"/>
-          </a:fillRef>
-          <a:effectRef idx="2">
-            <a:schemeClr val="accent1"/>
-          </a:effectRef>
-          <a:fontRef idx="minor">
-            <a:schemeClr val="lt1"/>
-          </a:fontRef>
-        </p:style>
-        <p:txBody>
-          <a:bodyPr rtlCol="0" anchor="ctr"/>
-          <a:lstStyle/>
-          <a:p>
-            <a:pPr algn="ctr"/>
-          </a:p>
-        </p:txBody>
-      </p:sp>
-      <p:sp>
-        <p:nvSpPr>
-          <p:cNvPr id="14" name="TextBox 13"/>
-          <p:cNvSpPr txBox="1"/>
-          <p:nvPr/>
-        </p:nvSpPr>
-        <p:spPr>
-          <a:xfrm>
-            <a:off x="841247" y="3240023"/>
-            <a:ext cx="3200399" cy="292608"/>
-          </a:xfrm>
-          <a:prstGeom prst="rect">
-            <a:avLst/>
-          </a:prstGeom>
-          <a:noFill/>
-          <a:ln/>
-        </p:spPr>
-        <p:txBody>
-          <a:bodyPr wrap="square" anchor="t" lIns="25400" rIns="25400" tIns="25400" bIns="25400">
-            <a:spAutoFit/>
-          </a:bodyPr>
-          <a:lstStyle/>
-          <a:p>
-            <a:pPr algn="l">
-              <a:lnSpc>
-                <a:spcPct val="100000"/>
-              </a:lnSpc>
-              <a:spcBef>
-                <a:spcPts val="0"/>
-              </a:spcBef>
-              <a:spcAft>
-                <a:spcPts val="0"/>
-              </a:spcAft>
-            </a:pPr>
-            <a:r>
-              <a:rPr sz="1200" b="0" i="0">
-                <a:solidFill>
-                  <a:srgbClr val="1C1D22"/>
-                </a:solidFill>
-                <a:latin typeface="Helvetica Neue"/>
-                <a:ea typeface="Hiragino Sans GB"/>
-              </a:rPr>
-              <a:t>Extrapolates to sequences longer than seen in training</a:t>
-            </a:r>
-          </a:p>
-        </p:txBody>
-      </p:sp>
-      <p:sp>
-        <p:nvSpPr>
-          <p:cNvPr id="15" name="TextBox 14"/>
-          <p:cNvSpPr txBox="1"/>
-          <p:nvPr/>
-        </p:nvSpPr>
-        <p:spPr>
-          <a:xfrm>
-            <a:off x="4407407" y="1365503"/>
-            <a:ext cx="4169663" cy="274320"/>
-          </a:xfrm>
-          <a:prstGeom prst="rect">
-            <a:avLst/>
-          </a:prstGeom>
-          <a:noFill/>
-          <a:ln/>
-        </p:spPr>
-        <p:txBody>
-          <a:bodyPr wrap="square" anchor="t" lIns="25400" rIns="25400" tIns="25400" bIns="25400">
-            <a:spAutoFit/>
-          </a:bodyPr>
-          <a:lstStyle/>
-          <a:p>
-            <a:pPr algn="l">
-              <a:lnSpc>
-                <a:spcPct val="100000"/>
-              </a:lnSpc>
-              <a:spcBef>
-                <a:spcPts val="0"/>
-              </a:spcBef>
-              <a:spcAft>
-                <a:spcPts val="0"/>
-              </a:spcAft>
-            </a:pPr>
-            <a:r>
-              <a:rPr sz="1100" b="1" i="0">
-                <a:solidFill>
-                  <a:srgbClr val="6F6656"/>
-                </a:solidFill>
-                <a:latin typeface="Helvetica Neue"/>
-                <a:ea typeface="Hiragino Sans GB"/>
-              </a:rPr>
-              <a:t>Positional encoding matrix (computed: position × dimension)</a:t>
-            </a:r>
-          </a:p>
-        </p:txBody>
-      </p:sp>
-      <p:pic>
-        <p:nvPicPr>
-          <p:cNvPr id="16" name="Picture 15" descr="positional encoding heatmap" title="positional encoding heatmap"/>
-          <p:cNvPicPr>
-            <a:picLocks noChangeAspect="1"/>
-          </p:cNvPicPr>
-          <p:nvPr/>
-        </p:nvPicPr>
-        <p:blipFill>
-          <a:blip r:embed="rId3"/>
-          <a:stretch>
-            <a:fillRect/>
-          </a:stretch>
-        </p:blipFill>
-        <p:spPr>
-          <a:xfrm>
-            <a:off x="4407407" y="1694687"/>
-            <a:ext cx="4169663" cy="1886934"/>
-          </a:xfrm>
-          <a:prstGeom prst="rect">
-            <a:avLst/>
-          </a:prstGeom>
-        </p:spPr>
-      </p:pic>
-      <p:sp>
-        <p:nvSpPr>
-          <p:cNvPr id="17" name="TextBox 16"/>
-          <p:cNvSpPr txBox="1"/>
-          <p:nvPr/>
-        </p:nvSpPr>
-        <p:spPr>
-          <a:xfrm>
-            <a:off x="4407407" y="3654774"/>
-            <a:ext cx="4169663" cy="219456"/>
-          </a:xfrm>
-          <a:prstGeom prst="rect">
-            <a:avLst/>
-          </a:prstGeom>
-          <a:noFill/>
-          <a:ln/>
-        </p:spPr>
-        <p:txBody>
-          <a:bodyPr wrap="square" anchor="t" lIns="25400" rIns="25400" tIns="25400" bIns="25400">
-            <a:spAutoFit/>
-          </a:bodyPr>
-          <a:lstStyle/>
-          <a:p>
-            <a:pPr algn="l">
-              <a:lnSpc>
-                <a:spcPct val="112000"/>
-              </a:lnSpc>
-              <a:spcBef>
-                <a:spcPts val="0"/>
-              </a:spcBef>
-              <a:spcAft>
-                <a:spcPts val="0"/>
-              </a:spcAft>
-            </a:pPr>
-            <a:r>
-              <a:rPr sz="1100" b="0" i="0">
-                <a:solidFill>
-                  <a:srgbClr val="5A5E68"/>
-                </a:solidFill>
-                <a:latin typeface="Helvetica Neue"/>
-                <a:ea typeface="Hiragino Sans GB"/>
-              </a:rPr>
-              <a:t>Low dims cycle fast, high dims drift slowly.</a:t>
-            </a:r>
-          </a:p>
-        </p:txBody>
-      </p:sp>
-      <p:sp>
-        <p:nvSpPr>
-          <p:cNvPr id="18" name="Rounded Rectangle 17"/>
-          <p:cNvSpPr/>
-          <p:nvPr/>
-        </p:nvSpPr>
-        <p:spPr>
-          <a:xfrm>
-            <a:off x="566928" y="4050791"/>
-            <a:ext cx="8010144" cy="498347"/>
-          </a:xfrm>
-          <a:prstGeom prst="roundRect">
-            <a:avLst>
-              <a:gd name="adj" fmla="val 8000"/>
-            </a:avLst>
-          </a:prstGeom>
-          <a:solidFill>
-            <a:srgbClr val="EAF3FA"/>
-          </a:solidFill>
-          <a:ln>
-            <a:noFill/>
-          </a:ln>
-          <a:effectLst/>
-        </p:spPr>
-        <p:style>
-          <a:lnRef idx="1">
-            <a:schemeClr val="accent1"/>
-          </a:lnRef>
-          <a:fillRef idx="3">
-            <a:schemeClr val="accent1"/>
-          </a:fillRef>
-          <a:effectRef idx="2">
-            <a:schemeClr val="accent1"/>
-          </a:effectRef>
-          <a:fontRef idx="minor">
-            <a:schemeClr val="lt1"/>
-          </a:fontRef>
-        </p:style>
-        <p:txBody>
-          <a:bodyPr rtlCol="0" anchor="ctr"/>
-          <a:lstStyle/>
-          <a:p>
-            <a:pPr algn="ctr"/>
-          </a:p>
-        </p:txBody>
-      </p:sp>
-      <p:sp>
-        <p:nvSpPr>
-          <p:cNvPr id="19" name="Rectangle 18"/>
-          <p:cNvSpPr/>
-          <p:nvPr/>
-        </p:nvSpPr>
-        <p:spPr>
-          <a:xfrm>
-            <a:off x="566928" y="4090659"/>
-            <a:ext cx="64008" cy="418612"/>
-          </a:xfrm>
-          <a:prstGeom prst="rect">
-            <a:avLst/>
-          </a:prstGeom>
-          <a:solidFill>
-            <a:srgbClr val="B84020"/>
-          </a:solidFill>
-          <a:ln>
-            <a:noFill/>
-          </a:ln>
-          <a:effectLst/>
-        </p:spPr>
-        <p:style>
-          <a:lnRef idx="1">
-            <a:schemeClr val="accent1"/>
-          </a:lnRef>
-          <a:fillRef idx="3">
-            <a:schemeClr val="accent1"/>
-          </a:fillRef>
-          <a:effectRef idx="2">
-            <a:schemeClr val="accent1"/>
-          </a:effectRef>
-          <a:fontRef idx="minor">
-            <a:schemeClr val="lt1"/>
-          </a:fontRef>
-        </p:style>
-        <p:txBody>
-          <a:bodyPr rtlCol="0" anchor="ctr"/>
-          <a:lstStyle/>
-          <a:p>
-            <a:pPr algn="ctr"/>
-          </a:p>
-        </p:txBody>
-      </p:sp>
-      <p:sp>
-        <p:nvSpPr>
-          <p:cNvPr id="20" name="TextBox 19"/>
+          <p:cNvPr id="19" name="TextBox 18"/>
           <p:cNvSpPr txBox="1"/>
           <p:nvPr/>
         </p:nvSpPr>

--- a/templates/decks/en/transformer-talk/template.pptx
+++ b/templates/decks/en/transformer-talk/template.pptx
@@ -5698,51 +5698,7 @@
       </p:sp>
       <p:sp>
         <p:nvSpPr>
-          <p:cNvPr id="18" name="Rectangle 17"/>
-          <p:cNvSpPr/>
-          <p:nvPr/>
-        </p:nvSpPr>
-        <p:spPr>
-          <a:xfrm>
-            <a:off x="640080" y="566928"/>
-            <a:ext cx="1051560" cy="45720"/>
-          </a:xfrm>
-          <a:prstGeom prst="rect">
-            <a:avLst/>
-          </a:prstGeom>
-          <a:solidFill>
-            <a:srgbClr val="B84020"/>
-          </a:solidFill>
-          <a:ln>
-            <a:noFill/>
-          </a:ln>
-          <a:effectLst/>
-        </p:spPr>
-        <p:style>
-          <a:lnRef idx="1">
-            <a:schemeClr val="accent1"/>
-          </a:lnRef>
-          <a:fillRef idx="3">
-            <a:schemeClr val="accent1"/>
-          </a:fillRef>
-          <a:effectRef idx="2">
-            <a:schemeClr val="accent1"/>
-          </a:effectRef>
-          <a:fontRef idx="minor">
-            <a:schemeClr val="lt1"/>
-          </a:fontRef>
-        </p:style>
-        <p:txBody>
-          <a:bodyPr rtlCol="0" anchor="ctr"/>
-          <a:lstStyle/>
-          <a:p>
-            <a:pPr algn="ctr"/>
-          </a:p>
-        </p:txBody>
-      </p:sp>
-      <p:sp>
-        <p:nvSpPr>
-          <p:cNvPr id="19" name="TextBox 18"/>
+          <p:cNvPr id="18" name="TextBox 17"/>
           <p:cNvSpPr txBox="1"/>
           <p:nvPr/>
         </p:nvSpPr>
@@ -5789,7 +5745,7 @@
       </p:sp>
       <p:sp>
         <p:nvSpPr>
-          <p:cNvPr id="20" name="TextBox 19"/>
+          <p:cNvPr id="19" name="TextBox 18"/>
           <p:cNvSpPr txBox="1"/>
           <p:nvPr/>
         </p:nvSpPr>
@@ -5836,51 +5792,7 @@
       </p:sp>
       <p:sp>
         <p:nvSpPr>
-          <p:cNvPr id="21" name="Rectangle 20"/>
-          <p:cNvSpPr/>
-          <p:nvPr/>
-        </p:nvSpPr>
-        <p:spPr>
-          <a:xfrm>
-            <a:off x="658368" y="3246120"/>
-            <a:ext cx="1280160" cy="54864"/>
-          </a:xfrm>
-          <a:prstGeom prst="rect">
-            <a:avLst/>
-          </a:prstGeom>
-          <a:solidFill>
-            <a:srgbClr val="B84020"/>
-          </a:solidFill>
-          <a:ln>
-            <a:noFill/>
-          </a:ln>
-          <a:effectLst/>
-        </p:spPr>
-        <p:style>
-          <a:lnRef idx="1">
-            <a:schemeClr val="accent1"/>
-          </a:lnRef>
-          <a:fillRef idx="3">
-            <a:schemeClr val="accent1"/>
-          </a:fillRef>
-          <a:effectRef idx="2">
-            <a:schemeClr val="accent1"/>
-          </a:effectRef>
-          <a:fontRef idx="minor">
-            <a:schemeClr val="lt1"/>
-          </a:fontRef>
-        </p:style>
-        <p:txBody>
-          <a:bodyPr rtlCol="0" anchor="ctr"/>
-          <a:lstStyle/>
-          <a:p>
-            <a:pPr algn="ctr"/>
-          </a:p>
-        </p:txBody>
-      </p:sp>
-      <p:sp>
-        <p:nvSpPr>
-          <p:cNvPr id="22" name="TextBox 21"/>
+          <p:cNvPr id="20" name="TextBox 19"/>
           <p:cNvSpPr txBox="1"/>
           <p:nvPr/>
         </p:nvSpPr>
@@ -5927,7 +5839,7 @@
       </p:sp>
       <p:sp>
         <p:nvSpPr>
-          <p:cNvPr id="23" name="TextBox 22"/>
+          <p:cNvPr id="21" name="TextBox 20"/>
           <p:cNvSpPr txBox="1"/>
           <p:nvPr/>
         </p:nvSpPr>
@@ -5974,7 +5886,7 @@
       </p:sp>
       <p:sp>
         <p:nvSpPr>
-          <p:cNvPr id="24" name="TextBox 23"/>
+          <p:cNvPr id="22" name="TextBox 21"/>
           <p:cNvSpPr txBox="1"/>
           <p:nvPr/>
         </p:nvSpPr>

--- a/templates/decks/en/transformer-talk/template.pptx
+++ b/templates/decks/en/transformer-talk/template.pptx
@@ -18440,7 +18440,7 @@
                 <a:latin typeface="Helvetica Neue"/>
                 <a:ea typeface="Hiragino Sans GB"/>
               </a:rPr>
-              <a:t>n = sequence length　d = representation dim　k = kernel width　(orange row = self-attention)</a:t>
+              <a:t>n = sequence length　d = representation dim　k = kernel width</a:t>
             </a:r>
           </a:p>
         </p:txBody>

--- a/templates/decks/en/transformer-talk/template.pptx
+++ b/templates/decks/en/transformer-talk/template.pptx
@@ -17097,51 +17097,7 @@
       </p:sp>
       <p:sp>
         <p:nvSpPr>
-          <p:cNvPr id="21" name="Rectangle 20"/>
-          <p:cNvSpPr/>
-          <p:nvPr/>
-        </p:nvSpPr>
-        <p:spPr>
-          <a:xfrm>
-            <a:off x="658368" y="2761488"/>
-            <a:ext cx="1188720" cy="54864"/>
-          </a:xfrm>
-          <a:prstGeom prst="rect">
-            <a:avLst/>
-          </a:prstGeom>
-          <a:solidFill>
-            <a:srgbClr val="B84020"/>
-          </a:solidFill>
-          <a:ln>
-            <a:noFill/>
-          </a:ln>
-          <a:effectLst/>
-        </p:spPr>
-        <p:style>
-          <a:lnRef idx="1">
-            <a:schemeClr val="accent1"/>
-          </a:lnRef>
-          <a:fillRef idx="3">
-            <a:schemeClr val="accent1"/>
-          </a:fillRef>
-          <a:effectRef idx="2">
-            <a:schemeClr val="accent1"/>
-          </a:effectRef>
-          <a:fontRef idx="minor">
-            <a:schemeClr val="lt1"/>
-          </a:fontRef>
-        </p:style>
-        <p:txBody>
-          <a:bodyPr rtlCol="0" anchor="ctr"/>
-          <a:lstStyle/>
-          <a:p>
-            <a:pPr algn="ctr"/>
-          </a:p>
-        </p:txBody>
-      </p:sp>
-      <p:sp>
-        <p:nvSpPr>
-          <p:cNvPr id="22" name="TextBox 21"/>
+          <p:cNvPr id="21" name="TextBox 20"/>
           <p:cNvSpPr txBox="1"/>
           <p:nvPr/>
         </p:nvSpPr>
@@ -17208,7 +17164,7 @@
       </p:sp>
       <p:sp>
         <p:nvSpPr>
-          <p:cNvPr id="23" name="Rounded Rectangle 22"/>
+          <p:cNvPr id="22" name="Rounded Rectangle 21"/>
           <p:cNvSpPr/>
           <p:nvPr/>
         </p:nvSpPr>
@@ -17256,7 +17212,7 @@
       </p:sp>
       <p:sp>
         <p:nvSpPr>
-          <p:cNvPr id="24" name="Rectangle 23"/>
+          <p:cNvPr id="23" name="Rectangle 22"/>
           <p:cNvSpPr/>
           <p:nvPr/>
         </p:nvSpPr>
@@ -17300,7 +17256,7 @@
       </p:sp>
       <p:sp>
         <p:nvSpPr>
-          <p:cNvPr id="25" name="TextBox 24"/>
+          <p:cNvPr id="24" name="TextBox 23"/>
           <p:cNvSpPr txBox="1"/>
           <p:nvPr/>
         </p:nvSpPr>
@@ -17370,7 +17326,7 @@
       </p:sp>
       <p:sp>
         <p:nvSpPr>
-          <p:cNvPr id="26" name="Rounded Rectangle 25"/>
+          <p:cNvPr id="25" name="Rounded Rectangle 24"/>
           <p:cNvSpPr/>
           <p:nvPr/>
         </p:nvSpPr>
@@ -17418,7 +17374,7 @@
       </p:sp>
       <p:sp>
         <p:nvSpPr>
-          <p:cNvPr id="27" name="Rectangle 26"/>
+          <p:cNvPr id="26" name="Rectangle 25"/>
           <p:cNvSpPr/>
           <p:nvPr/>
         </p:nvSpPr>
@@ -17462,7 +17418,7 @@
       </p:sp>
       <p:sp>
         <p:nvSpPr>
-          <p:cNvPr id="28" name="TextBox 27"/>
+          <p:cNvPr id="27" name="TextBox 26"/>
           <p:cNvSpPr txBox="1"/>
           <p:nvPr/>
         </p:nvSpPr>
@@ -17532,7 +17488,7 @@
       </p:sp>
       <p:sp>
         <p:nvSpPr>
-          <p:cNvPr id="29" name="Rounded Rectangle 28"/>
+          <p:cNvPr id="28" name="Rounded Rectangle 27"/>
           <p:cNvSpPr/>
           <p:nvPr/>
         </p:nvSpPr>
@@ -17580,7 +17536,7 @@
       </p:sp>
       <p:sp>
         <p:nvSpPr>
-          <p:cNvPr id="30" name="Rectangle 29"/>
+          <p:cNvPr id="29" name="Rectangle 28"/>
           <p:cNvSpPr/>
           <p:nvPr/>
         </p:nvSpPr>
@@ -17624,7 +17580,7 @@
       </p:sp>
       <p:sp>
         <p:nvSpPr>
-          <p:cNvPr id="31" name="TextBox 30"/>
+          <p:cNvPr id="30" name="TextBox 29"/>
           <p:cNvSpPr txBox="1"/>
           <p:nvPr/>
         </p:nvSpPr>
